--- a/backend/templates/pptx/bold_geometric.pptx
+++ b/backend/templates/pptx/bold_geometric.pptx
@@ -14,9 +14,19 @@
     <p:sldId id="262" r:id="rId8"/>
     <p:sldId id="263" r:id="rId9"/>
     <p:sldId id="264" r:id="rId10"/>
+    <p:sldId id="265" r:id="rId11"/>
+    <p:sldId id="266" r:id="rId12"/>
+    <p:sldId id="267" r:id="rId13"/>
+    <p:sldId id="268" r:id="rId14"/>
+    <p:sldId id="269" r:id="rId15"/>
+    <p:sldId id="270" r:id="rId16"/>
+    <p:sldId id="271" r:id="rId17"/>
+    <p:sldId id="272" r:id="rId18"/>
+    <p:sldId id="273" r:id="rId19"/>
+    <p:sldId id="274" r:id="rId20"/>
   </p:sldIdLst>
   <p:notesMasterIdLst>
-    <p:notesMasterId r:id="rId11"/>
+    <p:notesMasterId r:id="rId21"/>
   </p:notesMasterIdLst>
   <p:sldSz cx="12192000" cy="6858000"/>
   <p:notesSz cx="6858000" cy="12192000"/>
@@ -552,6 +562,886 @@
 </p:notes>
 </file>
 
+<file path=ppt/notesSlides/notesSlide10.xml><?xml version="1.0" encoding="utf-8"?>
+<p:notes xmlns:a="http://schemas.openxmlformats.org/drawingml/2006/main" xmlns:r="http://schemas.openxmlformats.org/officeDocument/2006/relationships" xmlns:p="http://schemas.openxmlformats.org/presentationml/2006/main">
+  <p:cSld>
+    <p:spTree>
+      <p:nvGrpSpPr>
+        <p:cNvPr id="1" name=""/>
+        <p:cNvGrpSpPr/>
+        <p:nvPr/>
+      </p:nvGrpSpPr>
+      <p:grpSpPr>
+        <a:xfrm>
+          <a:off x="0" y="0"/>
+          <a:ext cx="0" cy="0"/>
+          <a:chOff x="0" y="0"/>
+          <a:chExt cx="0" cy="0"/>
+        </a:xfrm>
+      </p:grpSpPr>
+      <p:sp>
+        <p:nvSpPr>
+          <p:cNvPr id="2" name="Slide Image Placeholder 1"/>
+          <p:cNvSpPr>
+            <a:spLocks noGrp="1" noRot="1" noChangeAspect="1"/>
+          </p:cNvSpPr>
+          <p:nvPr>
+            <p:ph type="sldImg"/>
+          </p:nvPr>
+        </p:nvSpPr>
+        <p:spPr/>
+      </p:sp>
+      <p:sp>
+        <p:nvSpPr>
+          <p:cNvPr id="3" name="Notes Placeholder 2"/>
+          <p:cNvSpPr>
+            <a:spLocks noGrp="1"/>
+          </p:cNvSpPr>
+          <p:nvPr>
+            <p:ph type="body" idx="1"/>
+          </p:nvPr>
+        </p:nvSpPr>
+        <p:spPr/>
+        <p:txBody>
+          <a:bodyPr/>
+          <a:lstStyle/>
+          <a:p>
+            <a:r>
+              <a:rPr lang="en-US" dirty="0"/>
+              <a:t/>
+            </a:r>
+            <a:endParaRPr lang="en-US" dirty="0"/>
+          </a:p>
+        </p:txBody>
+      </p:sp>
+      <p:sp>
+        <p:nvSpPr>
+          <p:cNvPr id="4" name="Slide Number Placeholder 3"/>
+          <p:cNvSpPr>
+            <a:spLocks noGrp="1"/>
+          </p:cNvSpPr>
+          <p:nvPr>
+            <p:ph type="sldNum" sz="quarter" idx="10"/>
+          </p:nvPr>
+        </p:nvSpPr>
+        <p:spPr/>
+        <p:txBody>
+          <a:bodyPr/>
+          <a:lstStyle/>
+          <a:p>
+            <a:fld id="{F7021451-1387-4CA6-816F-3879F97B5CBC}" type="slidenum">
+              <a:rPr lang="en-US"/>
+              <a:t>10</a:t>
+            </a:fld>
+            <a:endParaRPr lang="en-US"/>
+          </a:p>
+        </p:txBody>
+      </p:sp>
+    </p:spTree>
+    <p:extLst>
+      <p:ext uri="{BB962C8B-B14F-4D97-AF65-F5344CB8AC3E}">
+        <p14:creationId xmlns:p14="http://schemas.microsoft.com/office/powerpoint/2010/main" val="1024086991"/>
+      </p:ext>
+    </p:extLst>
+  </p:cSld>
+  <p:clrMapOvr>
+    <a:masterClrMapping/>
+  </p:clrMapOvr>
+</p:notes>
+</file>
+
+<file path=ppt/notesSlides/notesSlide11.xml><?xml version="1.0" encoding="utf-8"?>
+<p:notes xmlns:a="http://schemas.openxmlformats.org/drawingml/2006/main" xmlns:r="http://schemas.openxmlformats.org/officeDocument/2006/relationships" xmlns:p="http://schemas.openxmlformats.org/presentationml/2006/main">
+  <p:cSld>
+    <p:spTree>
+      <p:nvGrpSpPr>
+        <p:cNvPr id="1" name=""/>
+        <p:cNvGrpSpPr/>
+        <p:nvPr/>
+      </p:nvGrpSpPr>
+      <p:grpSpPr>
+        <a:xfrm>
+          <a:off x="0" y="0"/>
+          <a:ext cx="0" cy="0"/>
+          <a:chOff x="0" y="0"/>
+          <a:chExt cx="0" cy="0"/>
+        </a:xfrm>
+      </p:grpSpPr>
+      <p:sp>
+        <p:nvSpPr>
+          <p:cNvPr id="2" name="Slide Image Placeholder 1"/>
+          <p:cNvSpPr>
+            <a:spLocks noGrp="1" noRot="1" noChangeAspect="1"/>
+          </p:cNvSpPr>
+          <p:nvPr>
+            <p:ph type="sldImg"/>
+          </p:nvPr>
+        </p:nvSpPr>
+        <p:spPr/>
+      </p:sp>
+      <p:sp>
+        <p:nvSpPr>
+          <p:cNvPr id="3" name="Notes Placeholder 2"/>
+          <p:cNvSpPr>
+            <a:spLocks noGrp="1"/>
+          </p:cNvSpPr>
+          <p:nvPr>
+            <p:ph type="body" idx="1"/>
+          </p:nvPr>
+        </p:nvSpPr>
+        <p:spPr/>
+        <p:txBody>
+          <a:bodyPr/>
+          <a:lstStyle/>
+          <a:p>
+            <a:r>
+              <a:rPr lang="en-US" dirty="0"/>
+              <a:t/>
+            </a:r>
+            <a:endParaRPr lang="en-US" dirty="0"/>
+          </a:p>
+        </p:txBody>
+      </p:sp>
+      <p:sp>
+        <p:nvSpPr>
+          <p:cNvPr id="4" name="Slide Number Placeholder 3"/>
+          <p:cNvSpPr>
+            <a:spLocks noGrp="1"/>
+          </p:cNvSpPr>
+          <p:nvPr>
+            <p:ph type="sldNum" sz="quarter" idx="10"/>
+          </p:nvPr>
+        </p:nvSpPr>
+        <p:spPr/>
+        <p:txBody>
+          <a:bodyPr/>
+          <a:lstStyle/>
+          <a:p>
+            <a:fld id="{F7021451-1387-4CA6-816F-3879F97B5CBC}" type="slidenum">
+              <a:rPr lang="en-US"/>
+              <a:t>11</a:t>
+            </a:fld>
+            <a:endParaRPr lang="en-US"/>
+          </a:p>
+        </p:txBody>
+      </p:sp>
+    </p:spTree>
+    <p:extLst>
+      <p:ext uri="{BB962C8B-B14F-4D97-AF65-F5344CB8AC3E}">
+        <p14:creationId xmlns:p14="http://schemas.microsoft.com/office/powerpoint/2010/main" val="1024086991"/>
+      </p:ext>
+    </p:extLst>
+  </p:cSld>
+  <p:clrMapOvr>
+    <a:masterClrMapping/>
+  </p:clrMapOvr>
+</p:notes>
+</file>
+
+<file path=ppt/notesSlides/notesSlide12.xml><?xml version="1.0" encoding="utf-8"?>
+<p:notes xmlns:a="http://schemas.openxmlformats.org/drawingml/2006/main" xmlns:r="http://schemas.openxmlformats.org/officeDocument/2006/relationships" xmlns:p="http://schemas.openxmlformats.org/presentationml/2006/main">
+  <p:cSld>
+    <p:spTree>
+      <p:nvGrpSpPr>
+        <p:cNvPr id="1" name=""/>
+        <p:cNvGrpSpPr/>
+        <p:nvPr/>
+      </p:nvGrpSpPr>
+      <p:grpSpPr>
+        <a:xfrm>
+          <a:off x="0" y="0"/>
+          <a:ext cx="0" cy="0"/>
+          <a:chOff x="0" y="0"/>
+          <a:chExt cx="0" cy="0"/>
+        </a:xfrm>
+      </p:grpSpPr>
+      <p:sp>
+        <p:nvSpPr>
+          <p:cNvPr id="2" name="Slide Image Placeholder 1"/>
+          <p:cNvSpPr>
+            <a:spLocks noGrp="1" noRot="1" noChangeAspect="1"/>
+          </p:cNvSpPr>
+          <p:nvPr>
+            <p:ph type="sldImg"/>
+          </p:nvPr>
+        </p:nvSpPr>
+        <p:spPr/>
+      </p:sp>
+      <p:sp>
+        <p:nvSpPr>
+          <p:cNvPr id="3" name="Notes Placeholder 2"/>
+          <p:cNvSpPr>
+            <a:spLocks noGrp="1"/>
+          </p:cNvSpPr>
+          <p:nvPr>
+            <p:ph type="body" idx="1"/>
+          </p:nvPr>
+        </p:nvSpPr>
+        <p:spPr/>
+        <p:txBody>
+          <a:bodyPr/>
+          <a:lstStyle/>
+          <a:p>
+            <a:r>
+              <a:rPr lang="en-US" dirty="0"/>
+              <a:t/>
+            </a:r>
+            <a:endParaRPr lang="en-US" dirty="0"/>
+          </a:p>
+        </p:txBody>
+      </p:sp>
+      <p:sp>
+        <p:nvSpPr>
+          <p:cNvPr id="4" name="Slide Number Placeholder 3"/>
+          <p:cNvSpPr>
+            <a:spLocks noGrp="1"/>
+          </p:cNvSpPr>
+          <p:nvPr>
+            <p:ph type="sldNum" sz="quarter" idx="10"/>
+          </p:nvPr>
+        </p:nvSpPr>
+        <p:spPr/>
+        <p:txBody>
+          <a:bodyPr/>
+          <a:lstStyle/>
+          <a:p>
+            <a:fld id="{F7021451-1387-4CA6-816F-3879F97B5CBC}" type="slidenum">
+              <a:rPr lang="en-US"/>
+              <a:t>12</a:t>
+            </a:fld>
+            <a:endParaRPr lang="en-US"/>
+          </a:p>
+        </p:txBody>
+      </p:sp>
+    </p:spTree>
+    <p:extLst>
+      <p:ext uri="{BB962C8B-B14F-4D97-AF65-F5344CB8AC3E}">
+        <p14:creationId xmlns:p14="http://schemas.microsoft.com/office/powerpoint/2010/main" val="1024086991"/>
+      </p:ext>
+    </p:extLst>
+  </p:cSld>
+  <p:clrMapOvr>
+    <a:masterClrMapping/>
+  </p:clrMapOvr>
+</p:notes>
+</file>
+
+<file path=ppt/notesSlides/notesSlide13.xml><?xml version="1.0" encoding="utf-8"?>
+<p:notes xmlns:a="http://schemas.openxmlformats.org/drawingml/2006/main" xmlns:r="http://schemas.openxmlformats.org/officeDocument/2006/relationships" xmlns:p="http://schemas.openxmlformats.org/presentationml/2006/main">
+  <p:cSld>
+    <p:spTree>
+      <p:nvGrpSpPr>
+        <p:cNvPr id="1" name=""/>
+        <p:cNvGrpSpPr/>
+        <p:nvPr/>
+      </p:nvGrpSpPr>
+      <p:grpSpPr>
+        <a:xfrm>
+          <a:off x="0" y="0"/>
+          <a:ext cx="0" cy="0"/>
+          <a:chOff x="0" y="0"/>
+          <a:chExt cx="0" cy="0"/>
+        </a:xfrm>
+      </p:grpSpPr>
+      <p:sp>
+        <p:nvSpPr>
+          <p:cNvPr id="2" name="Slide Image Placeholder 1"/>
+          <p:cNvSpPr>
+            <a:spLocks noGrp="1" noRot="1" noChangeAspect="1"/>
+          </p:cNvSpPr>
+          <p:nvPr>
+            <p:ph type="sldImg"/>
+          </p:nvPr>
+        </p:nvSpPr>
+        <p:spPr/>
+      </p:sp>
+      <p:sp>
+        <p:nvSpPr>
+          <p:cNvPr id="3" name="Notes Placeholder 2"/>
+          <p:cNvSpPr>
+            <a:spLocks noGrp="1"/>
+          </p:cNvSpPr>
+          <p:nvPr>
+            <p:ph type="body" idx="1"/>
+          </p:nvPr>
+        </p:nvSpPr>
+        <p:spPr/>
+        <p:txBody>
+          <a:bodyPr/>
+          <a:lstStyle/>
+          <a:p>
+            <a:r>
+              <a:rPr lang="en-US" dirty="0"/>
+              <a:t/>
+            </a:r>
+            <a:endParaRPr lang="en-US" dirty="0"/>
+          </a:p>
+        </p:txBody>
+      </p:sp>
+      <p:sp>
+        <p:nvSpPr>
+          <p:cNvPr id="4" name="Slide Number Placeholder 3"/>
+          <p:cNvSpPr>
+            <a:spLocks noGrp="1"/>
+          </p:cNvSpPr>
+          <p:nvPr>
+            <p:ph type="sldNum" sz="quarter" idx="10"/>
+          </p:nvPr>
+        </p:nvSpPr>
+        <p:spPr/>
+        <p:txBody>
+          <a:bodyPr/>
+          <a:lstStyle/>
+          <a:p>
+            <a:fld id="{F7021451-1387-4CA6-816F-3879F97B5CBC}" type="slidenum">
+              <a:rPr lang="en-US"/>
+              <a:t>13</a:t>
+            </a:fld>
+            <a:endParaRPr lang="en-US"/>
+          </a:p>
+        </p:txBody>
+      </p:sp>
+    </p:spTree>
+    <p:extLst>
+      <p:ext uri="{BB962C8B-B14F-4D97-AF65-F5344CB8AC3E}">
+        <p14:creationId xmlns:p14="http://schemas.microsoft.com/office/powerpoint/2010/main" val="1024086991"/>
+      </p:ext>
+    </p:extLst>
+  </p:cSld>
+  <p:clrMapOvr>
+    <a:masterClrMapping/>
+  </p:clrMapOvr>
+</p:notes>
+</file>
+
+<file path=ppt/notesSlides/notesSlide14.xml><?xml version="1.0" encoding="utf-8"?>
+<p:notes xmlns:a="http://schemas.openxmlformats.org/drawingml/2006/main" xmlns:r="http://schemas.openxmlformats.org/officeDocument/2006/relationships" xmlns:p="http://schemas.openxmlformats.org/presentationml/2006/main">
+  <p:cSld>
+    <p:spTree>
+      <p:nvGrpSpPr>
+        <p:cNvPr id="1" name=""/>
+        <p:cNvGrpSpPr/>
+        <p:nvPr/>
+      </p:nvGrpSpPr>
+      <p:grpSpPr>
+        <a:xfrm>
+          <a:off x="0" y="0"/>
+          <a:ext cx="0" cy="0"/>
+          <a:chOff x="0" y="0"/>
+          <a:chExt cx="0" cy="0"/>
+        </a:xfrm>
+      </p:grpSpPr>
+      <p:sp>
+        <p:nvSpPr>
+          <p:cNvPr id="2" name="Slide Image Placeholder 1"/>
+          <p:cNvSpPr>
+            <a:spLocks noGrp="1" noRot="1" noChangeAspect="1"/>
+          </p:cNvSpPr>
+          <p:nvPr>
+            <p:ph type="sldImg"/>
+          </p:nvPr>
+        </p:nvSpPr>
+        <p:spPr/>
+      </p:sp>
+      <p:sp>
+        <p:nvSpPr>
+          <p:cNvPr id="3" name="Notes Placeholder 2"/>
+          <p:cNvSpPr>
+            <a:spLocks noGrp="1"/>
+          </p:cNvSpPr>
+          <p:nvPr>
+            <p:ph type="body" idx="1"/>
+          </p:nvPr>
+        </p:nvSpPr>
+        <p:spPr/>
+        <p:txBody>
+          <a:bodyPr/>
+          <a:lstStyle/>
+          <a:p>
+            <a:r>
+              <a:rPr lang="en-US" dirty="0"/>
+              <a:t/>
+            </a:r>
+            <a:endParaRPr lang="en-US" dirty="0"/>
+          </a:p>
+        </p:txBody>
+      </p:sp>
+      <p:sp>
+        <p:nvSpPr>
+          <p:cNvPr id="4" name="Slide Number Placeholder 3"/>
+          <p:cNvSpPr>
+            <a:spLocks noGrp="1"/>
+          </p:cNvSpPr>
+          <p:nvPr>
+            <p:ph type="sldNum" sz="quarter" idx="10"/>
+          </p:nvPr>
+        </p:nvSpPr>
+        <p:spPr/>
+        <p:txBody>
+          <a:bodyPr/>
+          <a:lstStyle/>
+          <a:p>
+            <a:fld id="{F7021451-1387-4CA6-816F-3879F97B5CBC}" type="slidenum">
+              <a:rPr lang="en-US"/>
+              <a:t>14</a:t>
+            </a:fld>
+            <a:endParaRPr lang="en-US"/>
+          </a:p>
+        </p:txBody>
+      </p:sp>
+    </p:spTree>
+    <p:extLst>
+      <p:ext uri="{BB962C8B-B14F-4D97-AF65-F5344CB8AC3E}">
+        <p14:creationId xmlns:p14="http://schemas.microsoft.com/office/powerpoint/2010/main" val="1024086991"/>
+      </p:ext>
+    </p:extLst>
+  </p:cSld>
+  <p:clrMapOvr>
+    <a:masterClrMapping/>
+  </p:clrMapOvr>
+</p:notes>
+</file>
+
+<file path=ppt/notesSlides/notesSlide15.xml><?xml version="1.0" encoding="utf-8"?>
+<p:notes xmlns:a="http://schemas.openxmlformats.org/drawingml/2006/main" xmlns:r="http://schemas.openxmlformats.org/officeDocument/2006/relationships" xmlns:p="http://schemas.openxmlformats.org/presentationml/2006/main">
+  <p:cSld>
+    <p:spTree>
+      <p:nvGrpSpPr>
+        <p:cNvPr id="1" name=""/>
+        <p:cNvGrpSpPr/>
+        <p:nvPr/>
+      </p:nvGrpSpPr>
+      <p:grpSpPr>
+        <a:xfrm>
+          <a:off x="0" y="0"/>
+          <a:ext cx="0" cy="0"/>
+          <a:chOff x="0" y="0"/>
+          <a:chExt cx="0" cy="0"/>
+        </a:xfrm>
+      </p:grpSpPr>
+      <p:sp>
+        <p:nvSpPr>
+          <p:cNvPr id="2" name="Slide Image Placeholder 1"/>
+          <p:cNvSpPr>
+            <a:spLocks noGrp="1" noRot="1" noChangeAspect="1"/>
+          </p:cNvSpPr>
+          <p:nvPr>
+            <p:ph type="sldImg"/>
+          </p:nvPr>
+        </p:nvSpPr>
+        <p:spPr/>
+      </p:sp>
+      <p:sp>
+        <p:nvSpPr>
+          <p:cNvPr id="3" name="Notes Placeholder 2"/>
+          <p:cNvSpPr>
+            <a:spLocks noGrp="1"/>
+          </p:cNvSpPr>
+          <p:nvPr>
+            <p:ph type="body" idx="1"/>
+          </p:nvPr>
+        </p:nvSpPr>
+        <p:spPr/>
+        <p:txBody>
+          <a:bodyPr/>
+          <a:lstStyle/>
+          <a:p>
+            <a:r>
+              <a:rPr lang="en-US" dirty="0"/>
+              <a:t/>
+            </a:r>
+            <a:endParaRPr lang="en-US" dirty="0"/>
+          </a:p>
+        </p:txBody>
+      </p:sp>
+      <p:sp>
+        <p:nvSpPr>
+          <p:cNvPr id="4" name="Slide Number Placeholder 3"/>
+          <p:cNvSpPr>
+            <a:spLocks noGrp="1"/>
+          </p:cNvSpPr>
+          <p:nvPr>
+            <p:ph type="sldNum" sz="quarter" idx="10"/>
+          </p:nvPr>
+        </p:nvSpPr>
+        <p:spPr/>
+        <p:txBody>
+          <a:bodyPr/>
+          <a:lstStyle/>
+          <a:p>
+            <a:fld id="{F7021451-1387-4CA6-816F-3879F97B5CBC}" type="slidenum">
+              <a:rPr lang="en-US"/>
+              <a:t>15</a:t>
+            </a:fld>
+            <a:endParaRPr lang="en-US"/>
+          </a:p>
+        </p:txBody>
+      </p:sp>
+    </p:spTree>
+    <p:extLst>
+      <p:ext uri="{BB962C8B-B14F-4D97-AF65-F5344CB8AC3E}">
+        <p14:creationId xmlns:p14="http://schemas.microsoft.com/office/powerpoint/2010/main" val="1024086991"/>
+      </p:ext>
+    </p:extLst>
+  </p:cSld>
+  <p:clrMapOvr>
+    <a:masterClrMapping/>
+  </p:clrMapOvr>
+</p:notes>
+</file>
+
+<file path=ppt/notesSlides/notesSlide16.xml><?xml version="1.0" encoding="utf-8"?>
+<p:notes xmlns:a="http://schemas.openxmlformats.org/drawingml/2006/main" xmlns:r="http://schemas.openxmlformats.org/officeDocument/2006/relationships" xmlns:p="http://schemas.openxmlformats.org/presentationml/2006/main">
+  <p:cSld>
+    <p:spTree>
+      <p:nvGrpSpPr>
+        <p:cNvPr id="1" name=""/>
+        <p:cNvGrpSpPr/>
+        <p:nvPr/>
+      </p:nvGrpSpPr>
+      <p:grpSpPr>
+        <a:xfrm>
+          <a:off x="0" y="0"/>
+          <a:ext cx="0" cy="0"/>
+          <a:chOff x="0" y="0"/>
+          <a:chExt cx="0" cy="0"/>
+        </a:xfrm>
+      </p:grpSpPr>
+      <p:sp>
+        <p:nvSpPr>
+          <p:cNvPr id="2" name="Slide Image Placeholder 1"/>
+          <p:cNvSpPr>
+            <a:spLocks noGrp="1" noRot="1" noChangeAspect="1"/>
+          </p:cNvSpPr>
+          <p:nvPr>
+            <p:ph type="sldImg"/>
+          </p:nvPr>
+        </p:nvSpPr>
+        <p:spPr/>
+      </p:sp>
+      <p:sp>
+        <p:nvSpPr>
+          <p:cNvPr id="3" name="Notes Placeholder 2"/>
+          <p:cNvSpPr>
+            <a:spLocks noGrp="1"/>
+          </p:cNvSpPr>
+          <p:nvPr>
+            <p:ph type="body" idx="1"/>
+          </p:nvPr>
+        </p:nvSpPr>
+        <p:spPr/>
+        <p:txBody>
+          <a:bodyPr/>
+          <a:lstStyle/>
+          <a:p>
+            <a:r>
+              <a:rPr lang="en-US" dirty="0"/>
+              <a:t/>
+            </a:r>
+            <a:endParaRPr lang="en-US" dirty="0"/>
+          </a:p>
+        </p:txBody>
+      </p:sp>
+      <p:sp>
+        <p:nvSpPr>
+          <p:cNvPr id="4" name="Slide Number Placeholder 3"/>
+          <p:cNvSpPr>
+            <a:spLocks noGrp="1"/>
+          </p:cNvSpPr>
+          <p:nvPr>
+            <p:ph type="sldNum" sz="quarter" idx="10"/>
+          </p:nvPr>
+        </p:nvSpPr>
+        <p:spPr/>
+        <p:txBody>
+          <a:bodyPr/>
+          <a:lstStyle/>
+          <a:p>
+            <a:fld id="{F7021451-1387-4CA6-816F-3879F97B5CBC}" type="slidenum">
+              <a:rPr lang="en-US"/>
+              <a:t>16</a:t>
+            </a:fld>
+            <a:endParaRPr lang="en-US"/>
+          </a:p>
+        </p:txBody>
+      </p:sp>
+    </p:spTree>
+    <p:extLst>
+      <p:ext uri="{BB962C8B-B14F-4D97-AF65-F5344CB8AC3E}">
+        <p14:creationId xmlns:p14="http://schemas.microsoft.com/office/powerpoint/2010/main" val="1024086991"/>
+      </p:ext>
+    </p:extLst>
+  </p:cSld>
+  <p:clrMapOvr>
+    <a:masterClrMapping/>
+  </p:clrMapOvr>
+</p:notes>
+</file>
+
+<file path=ppt/notesSlides/notesSlide17.xml><?xml version="1.0" encoding="utf-8"?>
+<p:notes xmlns:a="http://schemas.openxmlformats.org/drawingml/2006/main" xmlns:r="http://schemas.openxmlformats.org/officeDocument/2006/relationships" xmlns:p="http://schemas.openxmlformats.org/presentationml/2006/main">
+  <p:cSld>
+    <p:spTree>
+      <p:nvGrpSpPr>
+        <p:cNvPr id="1" name=""/>
+        <p:cNvGrpSpPr/>
+        <p:nvPr/>
+      </p:nvGrpSpPr>
+      <p:grpSpPr>
+        <a:xfrm>
+          <a:off x="0" y="0"/>
+          <a:ext cx="0" cy="0"/>
+          <a:chOff x="0" y="0"/>
+          <a:chExt cx="0" cy="0"/>
+        </a:xfrm>
+      </p:grpSpPr>
+      <p:sp>
+        <p:nvSpPr>
+          <p:cNvPr id="2" name="Slide Image Placeholder 1"/>
+          <p:cNvSpPr>
+            <a:spLocks noGrp="1" noRot="1" noChangeAspect="1"/>
+          </p:cNvSpPr>
+          <p:nvPr>
+            <p:ph type="sldImg"/>
+          </p:nvPr>
+        </p:nvSpPr>
+        <p:spPr/>
+      </p:sp>
+      <p:sp>
+        <p:nvSpPr>
+          <p:cNvPr id="3" name="Notes Placeholder 2"/>
+          <p:cNvSpPr>
+            <a:spLocks noGrp="1"/>
+          </p:cNvSpPr>
+          <p:nvPr>
+            <p:ph type="body" idx="1"/>
+          </p:nvPr>
+        </p:nvSpPr>
+        <p:spPr/>
+        <p:txBody>
+          <a:bodyPr/>
+          <a:lstStyle/>
+          <a:p>
+            <a:r>
+              <a:rPr lang="en-US" dirty="0"/>
+              <a:t/>
+            </a:r>
+            <a:endParaRPr lang="en-US" dirty="0"/>
+          </a:p>
+        </p:txBody>
+      </p:sp>
+      <p:sp>
+        <p:nvSpPr>
+          <p:cNvPr id="4" name="Slide Number Placeholder 3"/>
+          <p:cNvSpPr>
+            <a:spLocks noGrp="1"/>
+          </p:cNvSpPr>
+          <p:nvPr>
+            <p:ph type="sldNum" sz="quarter" idx="10"/>
+          </p:nvPr>
+        </p:nvSpPr>
+        <p:spPr/>
+        <p:txBody>
+          <a:bodyPr/>
+          <a:lstStyle/>
+          <a:p>
+            <a:fld id="{F7021451-1387-4CA6-816F-3879F97B5CBC}" type="slidenum">
+              <a:rPr lang="en-US"/>
+              <a:t>17</a:t>
+            </a:fld>
+            <a:endParaRPr lang="en-US"/>
+          </a:p>
+        </p:txBody>
+      </p:sp>
+    </p:spTree>
+    <p:extLst>
+      <p:ext uri="{BB962C8B-B14F-4D97-AF65-F5344CB8AC3E}">
+        <p14:creationId xmlns:p14="http://schemas.microsoft.com/office/powerpoint/2010/main" val="1024086991"/>
+      </p:ext>
+    </p:extLst>
+  </p:cSld>
+  <p:clrMapOvr>
+    <a:masterClrMapping/>
+  </p:clrMapOvr>
+</p:notes>
+</file>
+
+<file path=ppt/notesSlides/notesSlide18.xml><?xml version="1.0" encoding="utf-8"?>
+<p:notes xmlns:a="http://schemas.openxmlformats.org/drawingml/2006/main" xmlns:r="http://schemas.openxmlformats.org/officeDocument/2006/relationships" xmlns:p="http://schemas.openxmlformats.org/presentationml/2006/main">
+  <p:cSld>
+    <p:spTree>
+      <p:nvGrpSpPr>
+        <p:cNvPr id="1" name=""/>
+        <p:cNvGrpSpPr/>
+        <p:nvPr/>
+      </p:nvGrpSpPr>
+      <p:grpSpPr>
+        <a:xfrm>
+          <a:off x="0" y="0"/>
+          <a:ext cx="0" cy="0"/>
+          <a:chOff x="0" y="0"/>
+          <a:chExt cx="0" cy="0"/>
+        </a:xfrm>
+      </p:grpSpPr>
+      <p:sp>
+        <p:nvSpPr>
+          <p:cNvPr id="2" name="Slide Image Placeholder 1"/>
+          <p:cNvSpPr>
+            <a:spLocks noGrp="1" noRot="1" noChangeAspect="1"/>
+          </p:cNvSpPr>
+          <p:nvPr>
+            <p:ph type="sldImg"/>
+          </p:nvPr>
+        </p:nvSpPr>
+        <p:spPr/>
+      </p:sp>
+      <p:sp>
+        <p:nvSpPr>
+          <p:cNvPr id="3" name="Notes Placeholder 2"/>
+          <p:cNvSpPr>
+            <a:spLocks noGrp="1"/>
+          </p:cNvSpPr>
+          <p:nvPr>
+            <p:ph type="body" idx="1"/>
+          </p:nvPr>
+        </p:nvSpPr>
+        <p:spPr/>
+        <p:txBody>
+          <a:bodyPr/>
+          <a:lstStyle/>
+          <a:p>
+            <a:r>
+              <a:rPr lang="en-US" dirty="0"/>
+              <a:t/>
+            </a:r>
+            <a:endParaRPr lang="en-US" dirty="0"/>
+          </a:p>
+        </p:txBody>
+      </p:sp>
+      <p:sp>
+        <p:nvSpPr>
+          <p:cNvPr id="4" name="Slide Number Placeholder 3"/>
+          <p:cNvSpPr>
+            <a:spLocks noGrp="1"/>
+          </p:cNvSpPr>
+          <p:nvPr>
+            <p:ph type="sldNum" sz="quarter" idx="10"/>
+          </p:nvPr>
+        </p:nvSpPr>
+        <p:spPr/>
+        <p:txBody>
+          <a:bodyPr/>
+          <a:lstStyle/>
+          <a:p>
+            <a:fld id="{F7021451-1387-4CA6-816F-3879F97B5CBC}" type="slidenum">
+              <a:rPr lang="en-US"/>
+              <a:t>18</a:t>
+            </a:fld>
+            <a:endParaRPr lang="en-US"/>
+          </a:p>
+        </p:txBody>
+      </p:sp>
+    </p:spTree>
+    <p:extLst>
+      <p:ext uri="{BB962C8B-B14F-4D97-AF65-F5344CB8AC3E}">
+        <p14:creationId xmlns:p14="http://schemas.microsoft.com/office/powerpoint/2010/main" val="1024086991"/>
+      </p:ext>
+    </p:extLst>
+  </p:cSld>
+  <p:clrMapOvr>
+    <a:masterClrMapping/>
+  </p:clrMapOvr>
+</p:notes>
+</file>
+
+<file path=ppt/notesSlides/notesSlide19.xml><?xml version="1.0" encoding="utf-8"?>
+<p:notes xmlns:a="http://schemas.openxmlformats.org/drawingml/2006/main" xmlns:r="http://schemas.openxmlformats.org/officeDocument/2006/relationships" xmlns:p="http://schemas.openxmlformats.org/presentationml/2006/main">
+  <p:cSld>
+    <p:spTree>
+      <p:nvGrpSpPr>
+        <p:cNvPr id="1" name=""/>
+        <p:cNvGrpSpPr/>
+        <p:nvPr/>
+      </p:nvGrpSpPr>
+      <p:grpSpPr>
+        <a:xfrm>
+          <a:off x="0" y="0"/>
+          <a:ext cx="0" cy="0"/>
+          <a:chOff x="0" y="0"/>
+          <a:chExt cx="0" cy="0"/>
+        </a:xfrm>
+      </p:grpSpPr>
+      <p:sp>
+        <p:nvSpPr>
+          <p:cNvPr id="2" name="Slide Image Placeholder 1"/>
+          <p:cNvSpPr>
+            <a:spLocks noGrp="1" noRot="1" noChangeAspect="1"/>
+          </p:cNvSpPr>
+          <p:nvPr>
+            <p:ph type="sldImg"/>
+          </p:nvPr>
+        </p:nvSpPr>
+        <p:spPr/>
+      </p:sp>
+      <p:sp>
+        <p:nvSpPr>
+          <p:cNvPr id="3" name="Notes Placeholder 2"/>
+          <p:cNvSpPr>
+            <a:spLocks noGrp="1"/>
+          </p:cNvSpPr>
+          <p:nvPr>
+            <p:ph type="body" idx="1"/>
+          </p:nvPr>
+        </p:nvSpPr>
+        <p:spPr/>
+        <p:txBody>
+          <a:bodyPr/>
+          <a:lstStyle/>
+          <a:p>
+            <a:r>
+              <a:rPr lang="en-US" dirty="0"/>
+              <a:t/>
+            </a:r>
+            <a:endParaRPr lang="en-US" dirty="0"/>
+          </a:p>
+        </p:txBody>
+      </p:sp>
+      <p:sp>
+        <p:nvSpPr>
+          <p:cNvPr id="4" name="Slide Number Placeholder 3"/>
+          <p:cNvSpPr>
+            <a:spLocks noGrp="1"/>
+          </p:cNvSpPr>
+          <p:nvPr>
+            <p:ph type="sldNum" sz="quarter" idx="10"/>
+          </p:nvPr>
+        </p:nvSpPr>
+        <p:spPr/>
+        <p:txBody>
+          <a:bodyPr/>
+          <a:lstStyle/>
+          <a:p>
+            <a:fld id="{F7021451-1387-4CA6-816F-3879F97B5CBC}" type="slidenum">
+              <a:rPr lang="en-US"/>
+              <a:t>19</a:t>
+            </a:fld>
+            <a:endParaRPr lang="en-US"/>
+          </a:p>
+        </p:txBody>
+      </p:sp>
+    </p:spTree>
+    <p:extLst>
+      <p:ext uri="{BB962C8B-B14F-4D97-AF65-F5344CB8AC3E}">
+        <p14:creationId xmlns:p14="http://schemas.microsoft.com/office/powerpoint/2010/main" val="1024086991"/>
+      </p:ext>
+    </p:extLst>
+  </p:cSld>
+  <p:clrMapOvr>
+    <a:masterClrMapping/>
+  </p:clrMapOvr>
+</p:notes>
+</file>
+
 <file path=ppt/notesSlides/notesSlide2.xml><?xml version="1.0" encoding="utf-8"?>
 <p:notes xmlns:a="http://schemas.openxmlformats.org/drawingml/2006/main" xmlns:r="http://schemas.openxmlformats.org/officeDocument/2006/relationships" xmlns:p="http://schemas.openxmlformats.org/presentationml/2006/main">
   <p:cSld>
@@ -1908,6 +2798,3269 @@
 </p:sld>
 </file>
 
+<file path=ppt/slides/slide10.xml><?xml version="1.0" encoding="utf-8"?>
+<p:sld xmlns:a="http://schemas.openxmlformats.org/drawingml/2006/main" xmlns:r="http://schemas.openxmlformats.org/officeDocument/2006/relationships" xmlns:p="http://schemas.openxmlformats.org/presentationml/2006/main">
+  <p:cSld name="Slide 10">
+    <p:bg>
+      <p:bgPr>
+        <a:solidFill>
+          <a:srgbClr val="FFFFFF"/>
+        </a:solidFill>
+      </p:bgPr>
+    </p:bg>
+    <p:spTree>
+      <p:nvGrpSpPr>
+        <p:cNvPr id="1" name=""/>
+        <p:cNvGrpSpPr/>
+        <p:nvPr/>
+      </p:nvGrpSpPr>
+      <p:grpSpPr>
+        <a:xfrm>
+          <a:off x="0" y="0"/>
+          <a:ext cx="0" cy="0"/>
+          <a:chOff x="0" y="0"/>
+          <a:chExt cx="0" cy="0"/>
+        </a:xfrm>
+      </p:grpSpPr>
+      <p:sp>
+        <p:nvSpPr>
+          <p:cNvPr id="2" name="Shape 0"/>
+          <p:cNvSpPr/>
+          <p:nvPr/>
+        </p:nvSpPr>
+        <p:spPr>
+          <a:xfrm>
+            <a:off x="0" y="0"/>
+            <a:ext cx="12161520" cy="1188720"/>
+          </a:xfrm>
+          <a:prstGeom prst="rect">
+            <a:avLst/>
+          </a:prstGeom>
+          <a:solidFill>
+            <a:srgbClr val="4338CA"/>
+          </a:solidFill>
+          <a:ln/>
+        </p:spPr>
+      </p:sp>
+      <p:sp>
+        <p:nvSpPr>
+          <p:cNvPr id="3" name="Shape 1"/>
+          <p:cNvSpPr/>
+          <p:nvPr/>
+        </p:nvSpPr>
+        <p:spPr>
+          <a:xfrm>
+            <a:off x="8961120" y="0"/>
+            <a:ext cx="3200400" cy="1188720"/>
+          </a:xfrm>
+          <a:prstGeom prst="rtTriangle">
+            <a:avLst/>
+          </a:prstGeom>
+          <a:solidFill>
+            <a:srgbClr val="3730A3"/>
+          </a:solidFill>
+          <a:ln/>
+        </p:spPr>
+      </p:sp>
+      <p:sp>
+        <p:nvSpPr>
+          <p:cNvPr id="4" name="Text 2"/>
+          <p:cNvSpPr/>
+          <p:nvPr/>
+        </p:nvSpPr>
+        <p:spPr>
+          <a:xfrm>
+            <a:off x="731520" y="228600"/>
+            <a:ext cx="7589520" cy="731520"/>
+          </a:xfrm>
+          <a:prstGeom prst="rect">
+            <a:avLst/>
+          </a:prstGeom>
+          <a:noFill/>
+          <a:ln/>
+        </p:spPr>
+        <p:txBody>
+          <a:bodyPr wrap="square" lIns="0" tIns="0" rIns="0" bIns="0" rtlCol="0" anchor="ctr"/>
+          <a:lstStyle/>
+          <a:p>
+            <a:pPr indent="0" marL="0">
+              <a:buNone/>
+            </a:pPr>
+            <a:r>
+              <a:rPr lang="en-US" sz="2800" b="1" dirty="0">
+                <a:solidFill>
+                  <a:srgbClr val="FFFFFF"/>
+                </a:solidFill>
+                <a:latin typeface="Calibri" pitchFamily="34" charset="0"/>
+                <a:ea typeface="Calibri" pitchFamily="34" charset="-122"/>
+                <a:cs typeface="Calibri" pitchFamily="34" charset="-120"/>
+              </a:rPr>
+              <a:t>Meta Ads — Top Ads</a:t>
+            </a:r>
+            <a:endParaRPr lang="en-US" sz="2800" dirty="0"/>
+          </a:p>
+        </p:txBody>
+      </p:sp>
+      <p:sp>
+        <p:nvSpPr>
+          <p:cNvPr id="5" name="Shape 3"/>
+          <p:cNvSpPr/>
+          <p:nvPr/>
+        </p:nvSpPr>
+        <p:spPr>
+          <a:xfrm>
+            <a:off x="731520" y="1463040"/>
+            <a:ext cx="10698480" cy="3657600"/>
+          </a:xfrm>
+          <a:prstGeom prst="roundRect">
+            <a:avLst>
+              <a:gd name="adj" fmla="val 2500"/>
+            </a:avLst>
+          </a:prstGeom>
+          <a:solidFill>
+            <a:srgbClr val="FFFFFF"/>
+          </a:solidFill>
+          <a:ln/>
+          <a:effectLst>
+            <a:outerShdw sx="100000" sy="100000" kx="0" ky="0" algn="bl" rotWithShape="0" blurRad="76200" dist="25400" dir="8100000">
+              <a:srgbClr val="000000">
+                <a:alpha val="8000"/>
+              </a:srgbClr>
+            </a:outerShdw>
+          </a:effectLst>
+        </p:spPr>
+      </p:sp>
+      <p:sp>
+        <p:nvSpPr>
+          <p:cNvPr id="6" name="Text 4"/>
+          <p:cNvSpPr/>
+          <p:nvPr/>
+        </p:nvSpPr>
+        <p:spPr>
+          <a:xfrm>
+            <a:off x="731520" y="1463040"/>
+            <a:ext cx="10698480" cy="3657600"/>
+          </a:xfrm>
+          <a:prstGeom prst="rect">
+            <a:avLst/>
+          </a:prstGeom>
+          <a:noFill/>
+          <a:ln/>
+        </p:spPr>
+        <p:txBody>
+          <a:bodyPr wrap="square" rtlCol="0" anchor="ctr"/>
+          <a:lstStyle/>
+          <a:p>
+            <a:pPr algn="ctr" indent="0" marL="0">
+              <a:buNone/>
+            </a:pPr>
+            <a:r>
+              <a:rPr lang="en-US" sz="1000" dirty="0">
+                <a:solidFill>
+                  <a:srgbClr val="94A3B8"/>
+                </a:solidFill>
+                <a:latin typeface="Calibri" pitchFamily="34" charset="0"/>
+                <a:ea typeface="Calibri" pitchFamily="34" charset="-122"/>
+                <a:cs typeface="Calibri" pitchFamily="34" charset="-120"/>
+              </a:rPr>
+              <a:t>{{chart_campaigns}}</a:t>
+            </a:r>
+            <a:endParaRPr lang="en-US" sz="1000" dirty="0"/>
+          </a:p>
+        </p:txBody>
+      </p:sp>
+      <p:sp>
+        <p:nvSpPr>
+          <p:cNvPr id="7" name="Text 5"/>
+          <p:cNvSpPr/>
+          <p:nvPr/>
+        </p:nvSpPr>
+        <p:spPr>
+          <a:xfrm>
+            <a:off x="731520" y="5394960"/>
+            <a:ext cx="10698480" cy="1097280"/>
+          </a:xfrm>
+          <a:prstGeom prst="rect">
+            <a:avLst/>
+          </a:prstGeom>
+          <a:noFill/>
+          <a:ln/>
+        </p:spPr>
+        <p:txBody>
+          <a:bodyPr wrap="square" rtlCol="0" anchor="t"/>
+          <a:lstStyle/>
+          <a:p>
+            <a:pPr indent="0" marL="0">
+              <a:lnSpc>
+                <a:spcPct val="135000"/>
+              </a:lnSpc>
+              <a:buNone/>
+            </a:pPr>
+            <a:r>
+              <a:rPr lang="en-US" sz="1200" dirty="0">
+                <a:solidFill>
+                  <a:srgbClr val="334155"/>
+                </a:solidFill>
+                <a:latin typeface="Calibri" pitchFamily="34" charset="0"/>
+                <a:ea typeface="Calibri" pitchFamily="34" charset="-122"/>
+                <a:cs typeface="Calibri" pitchFamily="34" charset="-120"/>
+              </a:rPr>
+              <a:t>{{ads_narrative}}</a:t>
+            </a:r>
+            <a:endParaRPr lang="en-US" sz="1200" dirty="0"/>
+          </a:p>
+        </p:txBody>
+      </p:sp>
+      <p:sp>
+        <p:nvSpPr>
+          <p:cNvPr id="8" name="Text 6"/>
+          <p:cNvSpPr/>
+          <p:nvPr/>
+        </p:nvSpPr>
+        <p:spPr>
+          <a:xfrm>
+            <a:off x="731520" y="6510528"/>
+            <a:ext cx="10698480" cy="256032"/>
+          </a:xfrm>
+          <a:prstGeom prst="rect">
+            <a:avLst/>
+          </a:prstGeom>
+          <a:noFill/>
+          <a:ln/>
+        </p:spPr>
+        <p:txBody>
+          <a:bodyPr wrap="square" rtlCol="0" anchor="ctr"/>
+          <a:lstStyle/>
+          <a:p>
+            <a:pPr indent="0" marL="0">
+              <a:buNone/>
+            </a:pPr>
+            <a:r>
+              <a:rPr lang="en-US" sz="800" dirty="0">
+                <a:solidFill>
+                  <a:srgbClr val="94A3B8"/>
+                </a:solidFill>
+                <a:latin typeface="Calibri" pitchFamily="34" charset="0"/>
+                <a:ea typeface="Calibri" pitchFamily="34" charset="-122"/>
+                <a:cs typeface="Calibri" pitchFamily="34" charset="-120"/>
+              </a:rPr>
+              <a:t>{{agency_name}}  •  Confidential  •  Page 10</a:t>
+            </a:r>
+            <a:endParaRPr lang="en-US" sz="800" dirty="0"/>
+          </a:p>
+        </p:txBody>
+      </p:sp>
+    </p:spTree>
+  </p:cSld>
+  <p:clrMapOvr>
+    <a:masterClrMapping/>
+  </p:clrMapOvr>
+</p:sld>
+</file>
+
+<file path=ppt/slides/slide11.xml><?xml version="1.0" encoding="utf-8"?>
+<p:sld xmlns:a="http://schemas.openxmlformats.org/drawingml/2006/main" xmlns:r="http://schemas.openxmlformats.org/officeDocument/2006/relationships" xmlns:p="http://schemas.openxmlformats.org/presentationml/2006/main">
+  <p:cSld name="Slide 11">
+    <p:bg>
+      <p:bgPr>
+        <a:solidFill>
+          <a:srgbClr val="FFFFFF"/>
+        </a:solidFill>
+      </p:bgPr>
+    </p:bg>
+    <p:spTree>
+      <p:nvGrpSpPr>
+        <p:cNvPr id="1" name=""/>
+        <p:cNvGrpSpPr/>
+        <p:nvPr/>
+      </p:nvGrpSpPr>
+      <p:grpSpPr>
+        <a:xfrm>
+          <a:off x="0" y="0"/>
+          <a:ext cx="0" cy="0"/>
+          <a:chOff x="0" y="0"/>
+          <a:chExt cx="0" cy="0"/>
+        </a:xfrm>
+      </p:grpSpPr>
+      <p:sp>
+        <p:nvSpPr>
+          <p:cNvPr id="2" name="Shape 0"/>
+          <p:cNvSpPr/>
+          <p:nvPr/>
+        </p:nvSpPr>
+        <p:spPr>
+          <a:xfrm>
+            <a:off x="0" y="0"/>
+            <a:ext cx="12161520" cy="1188720"/>
+          </a:xfrm>
+          <a:prstGeom prst="rect">
+            <a:avLst/>
+          </a:prstGeom>
+          <a:solidFill>
+            <a:srgbClr val="4338CA"/>
+          </a:solidFill>
+          <a:ln/>
+        </p:spPr>
+      </p:sp>
+      <p:sp>
+        <p:nvSpPr>
+          <p:cNvPr id="3" name="Shape 1"/>
+          <p:cNvSpPr/>
+          <p:nvPr/>
+        </p:nvSpPr>
+        <p:spPr>
+          <a:xfrm>
+            <a:off x="8961120" y="0"/>
+            <a:ext cx="3200400" cy="1188720"/>
+          </a:xfrm>
+          <a:prstGeom prst="rtTriangle">
+            <a:avLst/>
+          </a:prstGeom>
+          <a:solidFill>
+            <a:srgbClr val="3730A3"/>
+          </a:solidFill>
+          <a:ln/>
+        </p:spPr>
+      </p:sp>
+      <p:sp>
+        <p:nvSpPr>
+          <p:cNvPr id="4" name="Text 2"/>
+          <p:cNvSpPr/>
+          <p:nvPr/>
+        </p:nvSpPr>
+        <p:spPr>
+          <a:xfrm>
+            <a:off x="731520" y="228600"/>
+            <a:ext cx="7589520" cy="731520"/>
+          </a:xfrm>
+          <a:prstGeom prst="rect">
+            <a:avLst/>
+          </a:prstGeom>
+          <a:noFill/>
+          <a:ln/>
+        </p:spPr>
+        <p:txBody>
+          <a:bodyPr wrap="square" lIns="0" tIns="0" rIns="0" bIns="0" rtlCol="0" anchor="ctr"/>
+          <a:lstStyle/>
+          <a:p>
+            <a:pPr indent="0" marL="0">
+              <a:buNone/>
+            </a:pPr>
+            <a:r>
+              <a:rPr lang="en-US" sz="2800" b="1" dirty="0">
+                <a:solidFill>
+                  <a:srgbClr val="FFFFFF"/>
+                </a:solidFill>
+                <a:latin typeface="Calibri" pitchFamily="34" charset="0"/>
+                <a:ea typeface="Calibri" pitchFamily="34" charset="-122"/>
+                <a:cs typeface="Calibri" pitchFamily="34" charset="-120"/>
+              </a:rPr>
+              <a:t>Search Advertising — Google Ads</a:t>
+            </a:r>
+            <a:endParaRPr lang="en-US" sz="2800" dirty="0"/>
+          </a:p>
+        </p:txBody>
+      </p:sp>
+      <p:sp>
+        <p:nvSpPr>
+          <p:cNvPr id="5" name="Shape 3"/>
+          <p:cNvSpPr/>
+          <p:nvPr/>
+        </p:nvSpPr>
+        <p:spPr>
+          <a:xfrm>
+            <a:off x="731520" y="1463040"/>
+            <a:ext cx="5120640" cy="2743200"/>
+          </a:xfrm>
+          <a:prstGeom prst="roundRect">
+            <a:avLst>
+              <a:gd name="adj" fmla="val 3333"/>
+            </a:avLst>
+          </a:prstGeom>
+          <a:solidFill>
+            <a:srgbClr val="FFFFFF"/>
+          </a:solidFill>
+          <a:ln/>
+          <a:effectLst>
+            <a:outerShdw sx="100000" sy="100000" kx="0" ky="0" algn="bl" rotWithShape="0" blurRad="76200" dist="25400" dir="8100000">
+              <a:srgbClr val="000000">
+                <a:alpha val="8000"/>
+              </a:srgbClr>
+            </a:outerShdw>
+          </a:effectLst>
+        </p:spPr>
+      </p:sp>
+      <p:sp>
+        <p:nvSpPr>
+          <p:cNvPr id="6" name="Text 4"/>
+          <p:cNvSpPr/>
+          <p:nvPr/>
+        </p:nvSpPr>
+        <p:spPr>
+          <a:xfrm>
+            <a:off x="731520" y="1463040"/>
+            <a:ext cx="5120640" cy="2743200"/>
+          </a:xfrm>
+          <a:prstGeom prst="rect">
+            <a:avLst/>
+          </a:prstGeom>
+          <a:noFill/>
+          <a:ln/>
+        </p:spPr>
+        <p:txBody>
+          <a:bodyPr wrap="square" rtlCol="0" anchor="ctr"/>
+          <a:lstStyle/>
+          <a:p>
+            <a:pPr algn="ctr" indent="0" marL="0">
+              <a:buNone/>
+            </a:pPr>
+            <a:r>
+              <a:rPr lang="en-US" sz="1000" dirty="0">
+                <a:solidFill>
+                  <a:srgbClr val="94A3B8"/>
+                </a:solidFill>
+                <a:latin typeface="Calibri" pitchFamily="34" charset="0"/>
+                <a:ea typeface="Calibri" pitchFamily="34" charset="-122"/>
+                <a:cs typeface="Calibri" pitchFamily="34" charset="-120"/>
+              </a:rPr>
+              <a:t>{{chart_gads_spend}}</a:t>
+            </a:r>
+            <a:endParaRPr lang="en-US" sz="1000" dirty="0"/>
+          </a:p>
+        </p:txBody>
+      </p:sp>
+      <p:sp>
+        <p:nvSpPr>
+          <p:cNvPr id="7" name="Shape 5"/>
+          <p:cNvSpPr/>
+          <p:nvPr/>
+        </p:nvSpPr>
+        <p:spPr>
+          <a:xfrm>
+            <a:off x="6217920" y="1463040"/>
+            <a:ext cx="5212080" cy="2743200"/>
+          </a:xfrm>
+          <a:prstGeom prst="roundRect">
+            <a:avLst>
+              <a:gd name="adj" fmla="val 3333"/>
+            </a:avLst>
+          </a:prstGeom>
+          <a:solidFill>
+            <a:srgbClr val="FFFFFF"/>
+          </a:solidFill>
+          <a:ln/>
+          <a:effectLst>
+            <a:outerShdw sx="100000" sy="100000" kx="0" ky="0" algn="bl" rotWithShape="0" blurRad="76200" dist="25400" dir="8100000">
+              <a:srgbClr val="000000">
+                <a:alpha val="8000"/>
+              </a:srgbClr>
+            </a:outerShdw>
+          </a:effectLst>
+        </p:spPr>
+      </p:sp>
+      <p:sp>
+        <p:nvSpPr>
+          <p:cNvPr id="8" name="Text 6"/>
+          <p:cNvSpPr/>
+          <p:nvPr/>
+        </p:nvSpPr>
+        <p:spPr>
+          <a:xfrm>
+            <a:off x="6217920" y="1463040"/>
+            <a:ext cx="5212080" cy="2743200"/>
+          </a:xfrm>
+          <a:prstGeom prst="rect">
+            <a:avLst/>
+          </a:prstGeom>
+          <a:noFill/>
+          <a:ln/>
+        </p:spPr>
+        <p:txBody>
+          <a:bodyPr wrap="square" rtlCol="0" anchor="ctr"/>
+          <a:lstStyle/>
+          <a:p>
+            <a:pPr algn="ctr" indent="0" marL="0">
+              <a:buNone/>
+            </a:pPr>
+            <a:r>
+              <a:rPr lang="en-US" sz="1000" dirty="0">
+                <a:solidFill>
+                  <a:srgbClr val="94A3B8"/>
+                </a:solidFill>
+                <a:latin typeface="Calibri" pitchFamily="34" charset="0"/>
+                <a:ea typeface="Calibri" pitchFamily="34" charset="-122"/>
+                <a:cs typeface="Calibri" pitchFamily="34" charset="-120"/>
+              </a:rPr>
+              <a:t>{{chart_gads_campaigns}}</a:t>
+            </a:r>
+            <a:endParaRPr lang="en-US" sz="1000" dirty="0"/>
+          </a:p>
+        </p:txBody>
+      </p:sp>
+      <p:sp>
+        <p:nvSpPr>
+          <p:cNvPr id="9" name="Text 7"/>
+          <p:cNvSpPr/>
+          <p:nvPr/>
+        </p:nvSpPr>
+        <p:spPr>
+          <a:xfrm>
+            <a:off x="731520" y="4480560"/>
+            <a:ext cx="10698480" cy="1737360"/>
+          </a:xfrm>
+          <a:prstGeom prst="rect">
+            <a:avLst/>
+          </a:prstGeom>
+          <a:noFill/>
+          <a:ln/>
+        </p:spPr>
+        <p:txBody>
+          <a:bodyPr wrap="square" rtlCol="0" anchor="t"/>
+          <a:lstStyle/>
+          <a:p>
+            <a:pPr indent="0" marL="0">
+              <a:lnSpc>
+                <a:spcPct val="135000"/>
+              </a:lnSpc>
+              <a:buNone/>
+            </a:pPr>
+            <a:r>
+              <a:rPr lang="en-US" sz="1200" dirty="0">
+                <a:solidFill>
+                  <a:srgbClr val="334155"/>
+                </a:solidFill>
+                <a:latin typeface="Calibri" pitchFamily="34" charset="0"/>
+                <a:ea typeface="Calibri" pitchFamily="34" charset="-122"/>
+                <a:cs typeface="Calibri" pitchFamily="34" charset="-120"/>
+              </a:rPr>
+              <a:t>{{google_ads_narrative}}</a:t>
+            </a:r>
+            <a:endParaRPr lang="en-US" sz="1200" dirty="0"/>
+          </a:p>
+        </p:txBody>
+      </p:sp>
+      <p:sp>
+        <p:nvSpPr>
+          <p:cNvPr id="10" name="Text 8"/>
+          <p:cNvSpPr/>
+          <p:nvPr/>
+        </p:nvSpPr>
+        <p:spPr>
+          <a:xfrm>
+            <a:off x="731520" y="6510528"/>
+            <a:ext cx="10698480" cy="256032"/>
+          </a:xfrm>
+          <a:prstGeom prst="rect">
+            <a:avLst/>
+          </a:prstGeom>
+          <a:noFill/>
+          <a:ln/>
+        </p:spPr>
+        <p:txBody>
+          <a:bodyPr wrap="square" rtlCol="0" anchor="ctr"/>
+          <a:lstStyle/>
+          <a:p>
+            <a:pPr indent="0" marL="0">
+              <a:buNone/>
+            </a:pPr>
+            <a:r>
+              <a:rPr lang="en-US" sz="800" dirty="0">
+                <a:solidFill>
+                  <a:srgbClr val="94A3B8"/>
+                </a:solidFill>
+                <a:latin typeface="Calibri" pitchFamily="34" charset="0"/>
+                <a:ea typeface="Calibri" pitchFamily="34" charset="-122"/>
+                <a:cs typeface="Calibri" pitchFamily="34" charset="-120"/>
+              </a:rPr>
+              <a:t>{{agency_name}}  •  Confidential  •  Page 11</a:t>
+            </a:r>
+            <a:endParaRPr lang="en-US" sz="800" dirty="0"/>
+          </a:p>
+        </p:txBody>
+      </p:sp>
+    </p:spTree>
+  </p:cSld>
+  <p:clrMapOvr>
+    <a:masterClrMapping/>
+  </p:clrMapOvr>
+</p:sld>
+</file>
+
+<file path=ppt/slides/slide12.xml><?xml version="1.0" encoding="utf-8"?>
+<p:sld xmlns:a="http://schemas.openxmlformats.org/drawingml/2006/main" xmlns:r="http://schemas.openxmlformats.org/officeDocument/2006/relationships" xmlns:p="http://schemas.openxmlformats.org/presentationml/2006/main">
+  <p:cSld name="Slide 12">
+    <p:bg>
+      <p:bgPr>
+        <a:solidFill>
+          <a:srgbClr val="FFFFFF"/>
+        </a:solidFill>
+      </p:bgPr>
+    </p:bg>
+    <p:spTree>
+      <p:nvGrpSpPr>
+        <p:cNvPr id="1" name=""/>
+        <p:cNvGrpSpPr/>
+        <p:nvPr/>
+      </p:nvGrpSpPr>
+      <p:grpSpPr>
+        <a:xfrm>
+          <a:off x="0" y="0"/>
+          <a:ext cx="0" cy="0"/>
+          <a:chOff x="0" y="0"/>
+          <a:chExt cx="0" cy="0"/>
+        </a:xfrm>
+      </p:grpSpPr>
+      <p:sp>
+        <p:nvSpPr>
+          <p:cNvPr id="2" name="Shape 0"/>
+          <p:cNvSpPr/>
+          <p:nvPr/>
+        </p:nvSpPr>
+        <p:spPr>
+          <a:xfrm>
+            <a:off x="0" y="0"/>
+            <a:ext cx="12161520" cy="1188720"/>
+          </a:xfrm>
+          <a:prstGeom prst="rect">
+            <a:avLst/>
+          </a:prstGeom>
+          <a:solidFill>
+            <a:srgbClr val="4338CA"/>
+          </a:solidFill>
+          <a:ln/>
+        </p:spPr>
+      </p:sp>
+      <p:sp>
+        <p:nvSpPr>
+          <p:cNvPr id="3" name="Shape 1"/>
+          <p:cNvSpPr/>
+          <p:nvPr/>
+        </p:nvSpPr>
+        <p:spPr>
+          <a:xfrm>
+            <a:off x="8961120" y="0"/>
+            <a:ext cx="3200400" cy="1188720"/>
+          </a:xfrm>
+          <a:prstGeom prst="rtTriangle">
+            <a:avLst/>
+          </a:prstGeom>
+          <a:solidFill>
+            <a:srgbClr val="3730A3"/>
+          </a:solidFill>
+          <a:ln/>
+        </p:spPr>
+      </p:sp>
+      <p:sp>
+        <p:nvSpPr>
+          <p:cNvPr id="4" name="Text 2"/>
+          <p:cNvSpPr/>
+          <p:nvPr/>
+        </p:nvSpPr>
+        <p:spPr>
+          <a:xfrm>
+            <a:off x="731520" y="228600"/>
+            <a:ext cx="7589520" cy="731520"/>
+          </a:xfrm>
+          <a:prstGeom prst="rect">
+            <a:avLst/>
+          </a:prstGeom>
+          <a:noFill/>
+          <a:ln/>
+        </p:spPr>
+        <p:txBody>
+          <a:bodyPr wrap="square" lIns="0" tIns="0" rIns="0" bIns="0" rtlCol="0" anchor="ctr"/>
+          <a:lstStyle/>
+          <a:p>
+            <a:pPr indent="0" marL="0">
+              <a:buNone/>
+            </a:pPr>
+            <a:r>
+              <a:rPr lang="en-US" sz="2800" b="1" dirty="0">
+                <a:solidFill>
+                  <a:srgbClr val="FFFFFF"/>
+                </a:solidFill>
+                <a:latin typeface="Calibri" pitchFamily="34" charset="0"/>
+                <a:ea typeface="Calibri" pitchFamily="34" charset="-122"/>
+                <a:cs typeface="Calibri" pitchFamily="34" charset="-120"/>
+              </a:rPr>
+              <a:t>Search Terms Performance</a:t>
+            </a:r>
+            <a:endParaRPr lang="en-US" sz="2800" dirty="0"/>
+          </a:p>
+        </p:txBody>
+      </p:sp>
+      <p:sp>
+        <p:nvSpPr>
+          <p:cNvPr id="5" name="Shape 3"/>
+          <p:cNvSpPr/>
+          <p:nvPr/>
+        </p:nvSpPr>
+        <p:spPr>
+          <a:xfrm>
+            <a:off x="731520" y="1463040"/>
+            <a:ext cx="10698480" cy="3657600"/>
+          </a:xfrm>
+          <a:prstGeom prst="roundRect">
+            <a:avLst>
+              <a:gd name="adj" fmla="val 2500"/>
+            </a:avLst>
+          </a:prstGeom>
+          <a:solidFill>
+            <a:srgbClr val="FFFFFF"/>
+          </a:solidFill>
+          <a:ln/>
+          <a:effectLst>
+            <a:outerShdw sx="100000" sy="100000" kx="0" ky="0" algn="bl" rotWithShape="0" blurRad="76200" dist="25400" dir="8100000">
+              <a:srgbClr val="000000">
+                <a:alpha val="8000"/>
+              </a:srgbClr>
+            </a:outerShdw>
+          </a:effectLst>
+        </p:spPr>
+      </p:sp>
+      <p:sp>
+        <p:nvSpPr>
+          <p:cNvPr id="6" name="Text 4"/>
+          <p:cNvSpPr/>
+          <p:nvPr/>
+        </p:nvSpPr>
+        <p:spPr>
+          <a:xfrm>
+            <a:off x="731520" y="1463040"/>
+            <a:ext cx="10698480" cy="3657600"/>
+          </a:xfrm>
+          <a:prstGeom prst="rect">
+            <a:avLst/>
+          </a:prstGeom>
+          <a:noFill/>
+          <a:ln/>
+        </p:spPr>
+        <p:txBody>
+          <a:bodyPr wrap="square" rtlCol="0" anchor="ctr"/>
+          <a:lstStyle/>
+          <a:p>
+            <a:pPr algn="ctr" indent="0" marL="0">
+              <a:buNone/>
+            </a:pPr>
+            <a:r>
+              <a:rPr lang="en-US" sz="1000" dirty="0">
+                <a:solidFill>
+                  <a:srgbClr val="94A3B8"/>
+                </a:solidFill>
+                <a:latin typeface="Calibri" pitchFamily="34" charset="0"/>
+                <a:ea typeface="Calibri" pitchFamily="34" charset="-122"/>
+                <a:cs typeface="Calibri" pitchFamily="34" charset="-120"/>
+              </a:rPr>
+              <a:t>{{chart_search_terms}}</a:t>
+            </a:r>
+            <a:endParaRPr lang="en-US" sz="1000" dirty="0"/>
+          </a:p>
+        </p:txBody>
+      </p:sp>
+      <p:sp>
+        <p:nvSpPr>
+          <p:cNvPr id="7" name="Text 5"/>
+          <p:cNvSpPr/>
+          <p:nvPr/>
+        </p:nvSpPr>
+        <p:spPr>
+          <a:xfrm>
+            <a:off x="731520" y="5394960"/>
+            <a:ext cx="10698480" cy="1097280"/>
+          </a:xfrm>
+          <a:prstGeom prst="rect">
+            <a:avLst/>
+          </a:prstGeom>
+          <a:noFill/>
+          <a:ln/>
+        </p:spPr>
+        <p:txBody>
+          <a:bodyPr wrap="square" rtlCol="0" anchor="t"/>
+          <a:lstStyle/>
+          <a:p>
+            <a:pPr indent="0" marL="0">
+              <a:lnSpc>
+                <a:spcPct val="135000"/>
+              </a:lnSpc>
+              <a:buNone/>
+            </a:pPr>
+            <a:r>
+              <a:rPr lang="en-US" sz="1200" dirty="0">
+                <a:solidFill>
+                  <a:srgbClr val="334155"/>
+                </a:solidFill>
+                <a:latin typeface="Calibri" pitchFamily="34" charset="0"/>
+                <a:ea typeface="Calibri" pitchFamily="34" charset="-122"/>
+                <a:cs typeface="Calibri" pitchFamily="34" charset="-120"/>
+              </a:rPr>
+              <a:t>{{google_ads_narrative}}</a:t>
+            </a:r>
+            <a:endParaRPr lang="en-US" sz="1200" dirty="0"/>
+          </a:p>
+        </p:txBody>
+      </p:sp>
+      <p:sp>
+        <p:nvSpPr>
+          <p:cNvPr id="8" name="Text 6"/>
+          <p:cNvSpPr/>
+          <p:nvPr/>
+        </p:nvSpPr>
+        <p:spPr>
+          <a:xfrm>
+            <a:off x="731520" y="6510528"/>
+            <a:ext cx="10698480" cy="256032"/>
+          </a:xfrm>
+          <a:prstGeom prst="rect">
+            <a:avLst/>
+          </a:prstGeom>
+          <a:noFill/>
+          <a:ln/>
+        </p:spPr>
+        <p:txBody>
+          <a:bodyPr wrap="square" rtlCol="0" anchor="ctr"/>
+          <a:lstStyle/>
+          <a:p>
+            <a:pPr indent="0" marL="0">
+              <a:buNone/>
+            </a:pPr>
+            <a:r>
+              <a:rPr lang="en-US" sz="800" dirty="0">
+                <a:solidFill>
+                  <a:srgbClr val="94A3B8"/>
+                </a:solidFill>
+                <a:latin typeface="Calibri" pitchFamily="34" charset="0"/>
+                <a:ea typeface="Calibri" pitchFamily="34" charset="-122"/>
+                <a:cs typeface="Calibri" pitchFamily="34" charset="-120"/>
+              </a:rPr>
+              <a:t>{{agency_name}}  •  Confidential  •  Page 12</a:t>
+            </a:r>
+            <a:endParaRPr lang="en-US" sz="800" dirty="0"/>
+          </a:p>
+        </p:txBody>
+      </p:sp>
+    </p:spTree>
+  </p:cSld>
+  <p:clrMapOvr>
+    <a:masterClrMapping/>
+  </p:clrMapOvr>
+</p:sld>
+</file>
+
+<file path=ppt/slides/slide13.xml><?xml version="1.0" encoding="utf-8"?>
+<p:sld xmlns:a="http://schemas.openxmlformats.org/drawingml/2006/main" xmlns:r="http://schemas.openxmlformats.org/officeDocument/2006/relationships" xmlns:p="http://schemas.openxmlformats.org/presentationml/2006/main">
+  <p:cSld name="Slide 13">
+    <p:bg>
+      <p:bgPr>
+        <a:solidFill>
+          <a:srgbClr val="FFFFFF"/>
+        </a:solidFill>
+      </p:bgPr>
+    </p:bg>
+    <p:spTree>
+      <p:nvGrpSpPr>
+        <p:cNvPr id="1" name=""/>
+        <p:cNvGrpSpPr/>
+        <p:nvPr/>
+      </p:nvGrpSpPr>
+      <p:grpSpPr>
+        <a:xfrm>
+          <a:off x="0" y="0"/>
+          <a:ext cx="0" cy="0"/>
+          <a:chOff x="0" y="0"/>
+          <a:chExt cx="0" cy="0"/>
+        </a:xfrm>
+      </p:grpSpPr>
+      <p:sp>
+        <p:nvSpPr>
+          <p:cNvPr id="2" name="Shape 0"/>
+          <p:cNvSpPr/>
+          <p:nvPr/>
+        </p:nvSpPr>
+        <p:spPr>
+          <a:xfrm>
+            <a:off x="0" y="0"/>
+            <a:ext cx="12161520" cy="1188720"/>
+          </a:xfrm>
+          <a:prstGeom prst="rect">
+            <a:avLst/>
+          </a:prstGeom>
+          <a:solidFill>
+            <a:srgbClr val="4338CA"/>
+          </a:solidFill>
+          <a:ln/>
+        </p:spPr>
+      </p:sp>
+      <p:sp>
+        <p:nvSpPr>
+          <p:cNvPr id="3" name="Shape 1"/>
+          <p:cNvSpPr/>
+          <p:nvPr/>
+        </p:nvSpPr>
+        <p:spPr>
+          <a:xfrm>
+            <a:off x="8961120" y="0"/>
+            <a:ext cx="3200400" cy="1188720"/>
+          </a:xfrm>
+          <a:prstGeom prst="rtTriangle">
+            <a:avLst/>
+          </a:prstGeom>
+          <a:solidFill>
+            <a:srgbClr val="3730A3"/>
+          </a:solidFill>
+          <a:ln/>
+        </p:spPr>
+      </p:sp>
+      <p:sp>
+        <p:nvSpPr>
+          <p:cNvPr id="4" name="Text 2"/>
+          <p:cNvSpPr/>
+          <p:nvPr/>
+        </p:nvSpPr>
+        <p:spPr>
+          <a:xfrm>
+            <a:off x="731520" y="228600"/>
+            <a:ext cx="7589520" cy="731520"/>
+          </a:xfrm>
+          <a:prstGeom prst="rect">
+            <a:avLst/>
+          </a:prstGeom>
+          <a:noFill/>
+          <a:ln/>
+        </p:spPr>
+        <p:txBody>
+          <a:bodyPr wrap="square" lIns="0" tIns="0" rIns="0" bIns="0" rtlCol="0" anchor="ctr"/>
+          <a:lstStyle/>
+          <a:p>
+            <a:pPr indent="0" marL="0">
+              <a:buNone/>
+            </a:pPr>
+            <a:r>
+              <a:rPr lang="en-US" sz="2800" b="1" dirty="0">
+                <a:solidFill>
+                  <a:srgbClr val="FFFFFF"/>
+                </a:solidFill>
+                <a:latin typeface="Calibri" pitchFamily="34" charset="0"/>
+                <a:ea typeface="Calibri" pitchFamily="34" charset="-122"/>
+                <a:cs typeface="Calibri" pitchFamily="34" charset="-120"/>
+              </a:rPr>
+              <a:t>Organic Search — SEO</a:t>
+            </a:r>
+            <a:endParaRPr lang="en-US" sz="2800" dirty="0"/>
+          </a:p>
+        </p:txBody>
+      </p:sp>
+      <p:sp>
+        <p:nvSpPr>
+          <p:cNvPr id="5" name="Shape 3"/>
+          <p:cNvSpPr/>
+          <p:nvPr/>
+        </p:nvSpPr>
+        <p:spPr>
+          <a:xfrm>
+            <a:off x="731520" y="1463040"/>
+            <a:ext cx="5120640" cy="2743200"/>
+          </a:xfrm>
+          <a:prstGeom prst="roundRect">
+            <a:avLst>
+              <a:gd name="adj" fmla="val 3333"/>
+            </a:avLst>
+          </a:prstGeom>
+          <a:solidFill>
+            <a:srgbClr val="FFFFFF"/>
+          </a:solidFill>
+          <a:ln/>
+          <a:effectLst>
+            <a:outerShdw sx="100000" sy="100000" kx="0" ky="0" algn="bl" rotWithShape="0" blurRad="76200" dist="25400" dir="8100000">
+              <a:srgbClr val="000000">
+                <a:alpha val="8000"/>
+              </a:srgbClr>
+            </a:outerShdw>
+          </a:effectLst>
+        </p:spPr>
+      </p:sp>
+      <p:sp>
+        <p:nvSpPr>
+          <p:cNvPr id="6" name="Text 4"/>
+          <p:cNvSpPr/>
+          <p:nvPr/>
+        </p:nvSpPr>
+        <p:spPr>
+          <a:xfrm>
+            <a:off x="731520" y="1463040"/>
+            <a:ext cx="5120640" cy="2743200"/>
+          </a:xfrm>
+          <a:prstGeom prst="rect">
+            <a:avLst/>
+          </a:prstGeom>
+          <a:noFill/>
+          <a:ln/>
+        </p:spPr>
+        <p:txBody>
+          <a:bodyPr wrap="square" rtlCol="0" anchor="ctr"/>
+          <a:lstStyle/>
+          <a:p>
+            <a:pPr algn="ctr" indent="0" marL="0">
+              <a:buNone/>
+            </a:pPr>
+            <a:r>
+              <a:rPr lang="en-US" sz="1000" dirty="0">
+                <a:solidFill>
+                  <a:srgbClr val="94A3B8"/>
+                </a:solidFill>
+                <a:latin typeface="Calibri" pitchFamily="34" charset="0"/>
+                <a:ea typeface="Calibri" pitchFamily="34" charset="-122"/>
+                <a:cs typeface="Calibri" pitchFamily="34" charset="-120"/>
+              </a:rPr>
+              <a:t>{{chart_seo_trend}}</a:t>
+            </a:r>
+            <a:endParaRPr lang="en-US" sz="1000" dirty="0"/>
+          </a:p>
+        </p:txBody>
+      </p:sp>
+      <p:sp>
+        <p:nvSpPr>
+          <p:cNvPr id="7" name="Shape 5"/>
+          <p:cNvSpPr/>
+          <p:nvPr/>
+        </p:nvSpPr>
+        <p:spPr>
+          <a:xfrm>
+            <a:off x="6217920" y="1463040"/>
+            <a:ext cx="5212080" cy="2743200"/>
+          </a:xfrm>
+          <a:prstGeom prst="roundRect">
+            <a:avLst>
+              <a:gd name="adj" fmla="val 3333"/>
+            </a:avLst>
+          </a:prstGeom>
+          <a:solidFill>
+            <a:srgbClr val="FFFFFF"/>
+          </a:solidFill>
+          <a:ln/>
+          <a:effectLst>
+            <a:outerShdw sx="100000" sy="100000" kx="0" ky="0" algn="bl" rotWithShape="0" blurRad="76200" dist="25400" dir="8100000">
+              <a:srgbClr val="000000">
+                <a:alpha val="8000"/>
+              </a:srgbClr>
+            </a:outerShdw>
+          </a:effectLst>
+        </p:spPr>
+      </p:sp>
+      <p:sp>
+        <p:nvSpPr>
+          <p:cNvPr id="8" name="Text 6"/>
+          <p:cNvSpPr/>
+          <p:nvPr/>
+        </p:nvSpPr>
+        <p:spPr>
+          <a:xfrm>
+            <a:off x="6217920" y="1463040"/>
+            <a:ext cx="5212080" cy="2743200"/>
+          </a:xfrm>
+          <a:prstGeom prst="rect">
+            <a:avLst/>
+          </a:prstGeom>
+          <a:noFill/>
+          <a:ln/>
+        </p:spPr>
+        <p:txBody>
+          <a:bodyPr wrap="square" rtlCol="0" anchor="ctr"/>
+          <a:lstStyle/>
+          <a:p>
+            <a:pPr algn="ctr" indent="0" marL="0">
+              <a:buNone/>
+            </a:pPr>
+            <a:r>
+              <a:rPr lang="en-US" sz="1000" dirty="0">
+                <a:solidFill>
+                  <a:srgbClr val="94A3B8"/>
+                </a:solidFill>
+                <a:latin typeface="Calibri" pitchFamily="34" charset="0"/>
+                <a:ea typeface="Calibri" pitchFamily="34" charset="-122"/>
+                <a:cs typeface="Calibri" pitchFamily="34" charset="-120"/>
+              </a:rPr>
+              <a:t>{{chart_top_queries}}</a:t>
+            </a:r>
+            <a:endParaRPr lang="en-US" sz="1000" dirty="0"/>
+          </a:p>
+        </p:txBody>
+      </p:sp>
+      <p:sp>
+        <p:nvSpPr>
+          <p:cNvPr id="9" name="Text 7"/>
+          <p:cNvSpPr/>
+          <p:nvPr/>
+        </p:nvSpPr>
+        <p:spPr>
+          <a:xfrm>
+            <a:off x="731520" y="4480560"/>
+            <a:ext cx="10698480" cy="1737360"/>
+          </a:xfrm>
+          <a:prstGeom prst="rect">
+            <a:avLst/>
+          </a:prstGeom>
+          <a:noFill/>
+          <a:ln/>
+        </p:spPr>
+        <p:txBody>
+          <a:bodyPr wrap="square" rtlCol="0" anchor="t"/>
+          <a:lstStyle/>
+          <a:p>
+            <a:pPr indent="0" marL="0">
+              <a:lnSpc>
+                <a:spcPct val="135000"/>
+              </a:lnSpc>
+              <a:buNone/>
+            </a:pPr>
+            <a:r>
+              <a:rPr lang="en-US" sz="1200" dirty="0">
+                <a:solidFill>
+                  <a:srgbClr val="334155"/>
+                </a:solidFill>
+                <a:latin typeface="Calibri" pitchFamily="34" charset="0"/>
+                <a:ea typeface="Calibri" pitchFamily="34" charset="-122"/>
+                <a:cs typeface="Calibri" pitchFamily="34" charset="-120"/>
+              </a:rPr>
+              <a:t>{{seo_narrative}}</a:t>
+            </a:r>
+            <a:endParaRPr lang="en-US" sz="1200" dirty="0"/>
+          </a:p>
+        </p:txBody>
+      </p:sp>
+      <p:sp>
+        <p:nvSpPr>
+          <p:cNvPr id="10" name="Text 8"/>
+          <p:cNvSpPr/>
+          <p:nvPr/>
+        </p:nvSpPr>
+        <p:spPr>
+          <a:xfrm>
+            <a:off x="731520" y="6510528"/>
+            <a:ext cx="10698480" cy="256032"/>
+          </a:xfrm>
+          <a:prstGeom prst="rect">
+            <a:avLst/>
+          </a:prstGeom>
+          <a:noFill/>
+          <a:ln/>
+        </p:spPr>
+        <p:txBody>
+          <a:bodyPr wrap="square" rtlCol="0" anchor="ctr"/>
+          <a:lstStyle/>
+          <a:p>
+            <a:pPr indent="0" marL="0">
+              <a:buNone/>
+            </a:pPr>
+            <a:r>
+              <a:rPr lang="en-US" sz="800" dirty="0">
+                <a:solidFill>
+                  <a:srgbClr val="94A3B8"/>
+                </a:solidFill>
+                <a:latin typeface="Calibri" pitchFamily="34" charset="0"/>
+                <a:ea typeface="Calibri" pitchFamily="34" charset="-122"/>
+                <a:cs typeface="Calibri" pitchFamily="34" charset="-120"/>
+              </a:rPr>
+              <a:t>{{agency_name}}  •  Confidential  •  Page 13</a:t>
+            </a:r>
+            <a:endParaRPr lang="en-US" sz="800" dirty="0"/>
+          </a:p>
+        </p:txBody>
+      </p:sp>
+    </p:spTree>
+  </p:cSld>
+  <p:clrMapOvr>
+    <a:masterClrMapping/>
+  </p:clrMapOvr>
+</p:sld>
+</file>
+
+<file path=ppt/slides/slide14.xml><?xml version="1.0" encoding="utf-8"?>
+<p:sld xmlns:a="http://schemas.openxmlformats.org/drawingml/2006/main" xmlns:r="http://schemas.openxmlformats.org/officeDocument/2006/relationships" xmlns:p="http://schemas.openxmlformats.org/presentationml/2006/main">
+  <p:cSld name="Slide 14">
+    <p:bg>
+      <p:bgPr>
+        <a:solidFill>
+          <a:srgbClr val="FFFFFF"/>
+        </a:solidFill>
+      </p:bgPr>
+    </p:bg>
+    <p:spTree>
+      <p:nvGrpSpPr>
+        <p:cNvPr id="1" name=""/>
+        <p:cNvGrpSpPr/>
+        <p:nvPr/>
+      </p:nvGrpSpPr>
+      <p:grpSpPr>
+        <a:xfrm>
+          <a:off x="0" y="0"/>
+          <a:ext cx="0" cy="0"/>
+          <a:chOff x="0" y="0"/>
+          <a:chExt cx="0" cy="0"/>
+        </a:xfrm>
+      </p:grpSpPr>
+      <p:sp>
+        <p:nvSpPr>
+          <p:cNvPr id="2" name="Shape 0"/>
+          <p:cNvSpPr/>
+          <p:nvPr/>
+        </p:nvSpPr>
+        <p:spPr>
+          <a:xfrm>
+            <a:off x="0" y="0"/>
+            <a:ext cx="12161520" cy="1188720"/>
+          </a:xfrm>
+          <a:prstGeom prst="rect">
+            <a:avLst/>
+          </a:prstGeom>
+          <a:solidFill>
+            <a:srgbClr val="4338CA"/>
+          </a:solidFill>
+          <a:ln/>
+        </p:spPr>
+      </p:sp>
+      <p:sp>
+        <p:nvSpPr>
+          <p:cNvPr id="3" name="Shape 1"/>
+          <p:cNvSpPr/>
+          <p:nvPr/>
+        </p:nvSpPr>
+        <p:spPr>
+          <a:xfrm>
+            <a:off x="8961120" y="0"/>
+            <a:ext cx="3200400" cy="1188720"/>
+          </a:xfrm>
+          <a:prstGeom prst="rtTriangle">
+            <a:avLst/>
+          </a:prstGeom>
+          <a:solidFill>
+            <a:srgbClr val="3730A3"/>
+          </a:solidFill>
+          <a:ln/>
+        </p:spPr>
+      </p:sp>
+      <p:sp>
+        <p:nvSpPr>
+          <p:cNvPr id="4" name="Text 2"/>
+          <p:cNvSpPr/>
+          <p:nvPr/>
+        </p:nvSpPr>
+        <p:spPr>
+          <a:xfrm>
+            <a:off x="731520" y="228600"/>
+            <a:ext cx="7589520" cy="731520"/>
+          </a:xfrm>
+          <a:prstGeom prst="rect">
+            <a:avLst/>
+          </a:prstGeom>
+          <a:noFill/>
+          <a:ln/>
+        </p:spPr>
+        <p:txBody>
+          <a:bodyPr wrap="square" lIns="0" tIns="0" rIns="0" bIns="0" rtlCol="0" anchor="ctr"/>
+          <a:lstStyle/>
+          <a:p>
+            <a:pPr indent="0" marL="0">
+              <a:buNone/>
+            </a:pPr>
+            <a:r>
+              <a:rPr lang="en-US" sz="2800" b="1" dirty="0">
+                <a:solidFill>
+                  <a:srgbClr val="FFFFFF"/>
+                </a:solidFill>
+                <a:latin typeface="Calibri" pitchFamily="34" charset="0"/>
+                <a:ea typeface="Calibri" pitchFamily="34" charset="-122"/>
+                <a:cs typeface="Calibri" pitchFamily="34" charset="-120"/>
+              </a:rPr>
+              <a:t>{{csv_source_name}}</a:t>
+            </a:r>
+            <a:endParaRPr lang="en-US" sz="2800" dirty="0"/>
+          </a:p>
+        </p:txBody>
+      </p:sp>
+      <p:sp>
+        <p:nvSpPr>
+          <p:cNvPr id="5" name="Shape 3"/>
+          <p:cNvSpPr/>
+          <p:nvPr/>
+        </p:nvSpPr>
+        <p:spPr>
+          <a:xfrm>
+            <a:off x="731520" y="1463040"/>
+            <a:ext cx="5029200" cy="685800"/>
+          </a:xfrm>
+          <a:prstGeom prst="roundRect">
+            <a:avLst>
+              <a:gd name="adj" fmla="val 13333"/>
+            </a:avLst>
+          </a:prstGeom>
+          <a:solidFill>
+            <a:srgbClr val="FFFFFF"/>
+          </a:solidFill>
+          <a:ln/>
+          <a:effectLst>
+            <a:outerShdw sx="100000" sy="100000" kx="0" ky="0" algn="bl" rotWithShape="0" blurRad="76200" dist="25400" dir="8100000">
+              <a:srgbClr val="000000">
+                <a:alpha val="8000"/>
+              </a:srgbClr>
+            </a:outerShdw>
+          </a:effectLst>
+        </p:spPr>
+      </p:sp>
+      <p:sp>
+        <p:nvSpPr>
+          <p:cNvPr id="6" name="Shape 4"/>
+          <p:cNvSpPr/>
+          <p:nvPr/>
+        </p:nvSpPr>
+        <p:spPr>
+          <a:xfrm>
+            <a:off x="731520" y="1463040"/>
+            <a:ext cx="73152" cy="685800"/>
+          </a:xfrm>
+          <a:prstGeom prst="rect">
+            <a:avLst/>
+          </a:prstGeom>
+          <a:solidFill>
+            <a:srgbClr val="4338CA"/>
+          </a:solidFill>
+          <a:ln/>
+        </p:spPr>
+      </p:sp>
+      <p:sp>
+        <p:nvSpPr>
+          <p:cNvPr id="7" name="Text 5"/>
+          <p:cNvSpPr/>
+          <p:nvPr/>
+        </p:nvSpPr>
+        <p:spPr>
+          <a:xfrm>
+            <a:off x="932688" y="1508760"/>
+            <a:ext cx="4736592" cy="228600"/>
+          </a:xfrm>
+          <a:prstGeom prst="rect">
+            <a:avLst/>
+          </a:prstGeom>
+          <a:noFill/>
+          <a:ln/>
+        </p:spPr>
+        <p:txBody>
+          <a:bodyPr wrap="square" rtlCol="0" anchor="ctr"/>
+          <a:lstStyle/>
+          <a:p>
+            <a:pPr indent="0" marL="0">
+              <a:buNone/>
+            </a:pPr>
+            <a:r>
+              <a:rPr lang="en-US" sz="900" b="1" spc="100" kern="0" dirty="0">
+                <a:solidFill>
+                  <a:srgbClr val="64748B"/>
+                </a:solidFill>
+                <a:latin typeface="Calibri" pitchFamily="34" charset="0"/>
+                <a:ea typeface="Calibri" pitchFamily="34" charset="-122"/>
+                <a:cs typeface="Calibri" pitchFamily="34" charset="-120"/>
+              </a:rPr>
+              <a:t>{{csv_kpi_0_label}}</a:t>
+            </a:r>
+            <a:endParaRPr lang="en-US" sz="900" dirty="0"/>
+          </a:p>
+        </p:txBody>
+      </p:sp>
+      <p:sp>
+        <p:nvSpPr>
+          <p:cNvPr id="8" name="Text 6"/>
+          <p:cNvSpPr/>
+          <p:nvPr/>
+        </p:nvSpPr>
+        <p:spPr>
+          <a:xfrm>
+            <a:off x="932688" y="1737360"/>
+            <a:ext cx="4736592" cy="347472"/>
+          </a:xfrm>
+          <a:prstGeom prst="rect">
+            <a:avLst/>
+          </a:prstGeom>
+          <a:noFill/>
+          <a:ln/>
+        </p:spPr>
+        <p:txBody>
+          <a:bodyPr wrap="square" rtlCol="0" anchor="ctr"/>
+          <a:lstStyle/>
+          <a:p>
+            <a:pPr indent="0" marL="0">
+              <a:buNone/>
+            </a:pPr>
+            <a:r>
+              <a:rPr lang="en-US" sz="2000" b="1" dirty="0">
+                <a:solidFill>
+                  <a:srgbClr val="0F172A"/>
+                </a:solidFill>
+                <a:latin typeface="Calibri" pitchFamily="34" charset="0"/>
+                <a:ea typeface="Calibri" pitchFamily="34" charset="-122"/>
+                <a:cs typeface="Calibri" pitchFamily="34" charset="-120"/>
+              </a:rPr>
+              <a:t>{{csv_kpi_0_value}}</a:t>
+            </a:r>
+            <a:endParaRPr lang="en-US" sz="2000" dirty="0"/>
+          </a:p>
+        </p:txBody>
+      </p:sp>
+      <p:sp>
+        <p:nvSpPr>
+          <p:cNvPr id="9" name="Shape 7"/>
+          <p:cNvSpPr/>
+          <p:nvPr/>
+        </p:nvSpPr>
+        <p:spPr>
+          <a:xfrm>
+            <a:off x="6583680" y="1463040"/>
+            <a:ext cx="5029200" cy="685800"/>
+          </a:xfrm>
+          <a:prstGeom prst="roundRect">
+            <a:avLst>
+              <a:gd name="adj" fmla="val 13333"/>
+            </a:avLst>
+          </a:prstGeom>
+          <a:solidFill>
+            <a:srgbClr val="FFFFFF"/>
+          </a:solidFill>
+          <a:ln/>
+          <a:effectLst>
+            <a:outerShdw sx="100000" sy="100000" kx="0" ky="0" algn="bl" rotWithShape="0" blurRad="76200" dist="25400" dir="8100000">
+              <a:srgbClr val="000000">
+                <a:alpha val="8000"/>
+              </a:srgbClr>
+            </a:outerShdw>
+          </a:effectLst>
+        </p:spPr>
+      </p:sp>
+      <p:sp>
+        <p:nvSpPr>
+          <p:cNvPr id="10" name="Shape 8"/>
+          <p:cNvSpPr/>
+          <p:nvPr/>
+        </p:nvSpPr>
+        <p:spPr>
+          <a:xfrm>
+            <a:off x="6583680" y="1463040"/>
+            <a:ext cx="73152" cy="685800"/>
+          </a:xfrm>
+          <a:prstGeom prst="rect">
+            <a:avLst/>
+          </a:prstGeom>
+          <a:solidFill>
+            <a:srgbClr val="4338CA"/>
+          </a:solidFill>
+          <a:ln/>
+        </p:spPr>
+      </p:sp>
+      <p:sp>
+        <p:nvSpPr>
+          <p:cNvPr id="11" name="Text 9"/>
+          <p:cNvSpPr/>
+          <p:nvPr/>
+        </p:nvSpPr>
+        <p:spPr>
+          <a:xfrm>
+            <a:off x="6784848" y="1508760"/>
+            <a:ext cx="4736592" cy="228600"/>
+          </a:xfrm>
+          <a:prstGeom prst="rect">
+            <a:avLst/>
+          </a:prstGeom>
+          <a:noFill/>
+          <a:ln/>
+        </p:spPr>
+        <p:txBody>
+          <a:bodyPr wrap="square" rtlCol="0" anchor="ctr"/>
+          <a:lstStyle/>
+          <a:p>
+            <a:pPr indent="0" marL="0">
+              <a:buNone/>
+            </a:pPr>
+            <a:r>
+              <a:rPr lang="en-US" sz="900" b="1" spc="100" kern="0" dirty="0">
+                <a:solidFill>
+                  <a:srgbClr val="64748B"/>
+                </a:solidFill>
+                <a:latin typeface="Calibri" pitchFamily="34" charset="0"/>
+                <a:ea typeface="Calibri" pitchFamily="34" charset="-122"/>
+                <a:cs typeface="Calibri" pitchFamily="34" charset="-120"/>
+              </a:rPr>
+              <a:t>{{csv_kpi_1_label}}</a:t>
+            </a:r>
+            <a:endParaRPr lang="en-US" sz="900" dirty="0"/>
+          </a:p>
+        </p:txBody>
+      </p:sp>
+      <p:sp>
+        <p:nvSpPr>
+          <p:cNvPr id="12" name="Text 10"/>
+          <p:cNvSpPr/>
+          <p:nvPr/>
+        </p:nvSpPr>
+        <p:spPr>
+          <a:xfrm>
+            <a:off x="6784848" y="1737360"/>
+            <a:ext cx="4736592" cy="347472"/>
+          </a:xfrm>
+          <a:prstGeom prst="rect">
+            <a:avLst/>
+          </a:prstGeom>
+          <a:noFill/>
+          <a:ln/>
+        </p:spPr>
+        <p:txBody>
+          <a:bodyPr wrap="square" rtlCol="0" anchor="ctr"/>
+          <a:lstStyle/>
+          <a:p>
+            <a:pPr indent="0" marL="0">
+              <a:buNone/>
+            </a:pPr>
+            <a:r>
+              <a:rPr lang="en-US" sz="2000" b="1" dirty="0">
+                <a:solidFill>
+                  <a:srgbClr val="0F172A"/>
+                </a:solidFill>
+                <a:latin typeface="Calibri" pitchFamily="34" charset="0"/>
+                <a:ea typeface="Calibri" pitchFamily="34" charset="-122"/>
+                <a:cs typeface="Calibri" pitchFamily="34" charset="-120"/>
+              </a:rPr>
+              <a:t>{{csv_kpi_1_value}}</a:t>
+            </a:r>
+            <a:endParaRPr lang="en-US" sz="2000" dirty="0"/>
+          </a:p>
+        </p:txBody>
+      </p:sp>
+      <p:sp>
+        <p:nvSpPr>
+          <p:cNvPr id="13" name="Shape 11"/>
+          <p:cNvSpPr/>
+          <p:nvPr/>
+        </p:nvSpPr>
+        <p:spPr>
+          <a:xfrm>
+            <a:off x="731520" y="2286000"/>
+            <a:ext cx="5029200" cy="685800"/>
+          </a:xfrm>
+          <a:prstGeom prst="roundRect">
+            <a:avLst>
+              <a:gd name="adj" fmla="val 13333"/>
+            </a:avLst>
+          </a:prstGeom>
+          <a:solidFill>
+            <a:srgbClr val="FFFFFF"/>
+          </a:solidFill>
+          <a:ln/>
+          <a:effectLst>
+            <a:outerShdw sx="100000" sy="100000" kx="0" ky="0" algn="bl" rotWithShape="0" blurRad="76200" dist="25400" dir="8100000">
+              <a:srgbClr val="000000">
+                <a:alpha val="8000"/>
+              </a:srgbClr>
+            </a:outerShdw>
+          </a:effectLst>
+        </p:spPr>
+      </p:sp>
+      <p:sp>
+        <p:nvSpPr>
+          <p:cNvPr id="14" name="Shape 12"/>
+          <p:cNvSpPr/>
+          <p:nvPr/>
+        </p:nvSpPr>
+        <p:spPr>
+          <a:xfrm>
+            <a:off x="731520" y="2286000"/>
+            <a:ext cx="73152" cy="685800"/>
+          </a:xfrm>
+          <a:prstGeom prst="rect">
+            <a:avLst/>
+          </a:prstGeom>
+          <a:solidFill>
+            <a:srgbClr val="4338CA"/>
+          </a:solidFill>
+          <a:ln/>
+        </p:spPr>
+      </p:sp>
+      <p:sp>
+        <p:nvSpPr>
+          <p:cNvPr id="15" name="Text 13"/>
+          <p:cNvSpPr/>
+          <p:nvPr/>
+        </p:nvSpPr>
+        <p:spPr>
+          <a:xfrm>
+            <a:off x="932688" y="2331720"/>
+            <a:ext cx="4736592" cy="228600"/>
+          </a:xfrm>
+          <a:prstGeom prst="rect">
+            <a:avLst/>
+          </a:prstGeom>
+          <a:noFill/>
+          <a:ln/>
+        </p:spPr>
+        <p:txBody>
+          <a:bodyPr wrap="square" rtlCol="0" anchor="ctr"/>
+          <a:lstStyle/>
+          <a:p>
+            <a:pPr indent="0" marL="0">
+              <a:buNone/>
+            </a:pPr>
+            <a:r>
+              <a:rPr lang="en-US" sz="900" b="1" spc="100" kern="0" dirty="0">
+                <a:solidFill>
+                  <a:srgbClr val="64748B"/>
+                </a:solidFill>
+                <a:latin typeface="Calibri" pitchFamily="34" charset="0"/>
+                <a:ea typeface="Calibri" pitchFamily="34" charset="-122"/>
+                <a:cs typeface="Calibri" pitchFamily="34" charset="-120"/>
+              </a:rPr>
+              <a:t>{{csv_kpi_2_label}}</a:t>
+            </a:r>
+            <a:endParaRPr lang="en-US" sz="900" dirty="0"/>
+          </a:p>
+        </p:txBody>
+      </p:sp>
+      <p:sp>
+        <p:nvSpPr>
+          <p:cNvPr id="16" name="Text 14"/>
+          <p:cNvSpPr/>
+          <p:nvPr/>
+        </p:nvSpPr>
+        <p:spPr>
+          <a:xfrm>
+            <a:off x="932688" y="2560320"/>
+            <a:ext cx="4736592" cy="347472"/>
+          </a:xfrm>
+          <a:prstGeom prst="rect">
+            <a:avLst/>
+          </a:prstGeom>
+          <a:noFill/>
+          <a:ln/>
+        </p:spPr>
+        <p:txBody>
+          <a:bodyPr wrap="square" rtlCol="0" anchor="ctr"/>
+          <a:lstStyle/>
+          <a:p>
+            <a:pPr indent="0" marL="0">
+              <a:buNone/>
+            </a:pPr>
+            <a:r>
+              <a:rPr lang="en-US" sz="2000" b="1" dirty="0">
+                <a:solidFill>
+                  <a:srgbClr val="0F172A"/>
+                </a:solidFill>
+                <a:latin typeface="Calibri" pitchFamily="34" charset="0"/>
+                <a:ea typeface="Calibri" pitchFamily="34" charset="-122"/>
+                <a:cs typeface="Calibri" pitchFamily="34" charset="-120"/>
+              </a:rPr>
+              <a:t>{{csv_kpi_2_value}}</a:t>
+            </a:r>
+            <a:endParaRPr lang="en-US" sz="2000" dirty="0"/>
+          </a:p>
+        </p:txBody>
+      </p:sp>
+      <p:sp>
+        <p:nvSpPr>
+          <p:cNvPr id="17" name="Shape 15"/>
+          <p:cNvSpPr/>
+          <p:nvPr/>
+        </p:nvSpPr>
+        <p:spPr>
+          <a:xfrm>
+            <a:off x="6583680" y="2286000"/>
+            <a:ext cx="5029200" cy="685800"/>
+          </a:xfrm>
+          <a:prstGeom prst="roundRect">
+            <a:avLst>
+              <a:gd name="adj" fmla="val 13333"/>
+            </a:avLst>
+          </a:prstGeom>
+          <a:solidFill>
+            <a:srgbClr val="FFFFFF"/>
+          </a:solidFill>
+          <a:ln/>
+          <a:effectLst>
+            <a:outerShdw sx="100000" sy="100000" kx="0" ky="0" algn="bl" rotWithShape="0" blurRad="76200" dist="25400" dir="8100000">
+              <a:srgbClr val="000000">
+                <a:alpha val="8000"/>
+              </a:srgbClr>
+            </a:outerShdw>
+          </a:effectLst>
+        </p:spPr>
+      </p:sp>
+      <p:sp>
+        <p:nvSpPr>
+          <p:cNvPr id="18" name="Shape 16"/>
+          <p:cNvSpPr/>
+          <p:nvPr/>
+        </p:nvSpPr>
+        <p:spPr>
+          <a:xfrm>
+            <a:off x="6583680" y="2286000"/>
+            <a:ext cx="73152" cy="685800"/>
+          </a:xfrm>
+          <a:prstGeom prst="rect">
+            <a:avLst/>
+          </a:prstGeom>
+          <a:solidFill>
+            <a:srgbClr val="4338CA"/>
+          </a:solidFill>
+          <a:ln/>
+        </p:spPr>
+      </p:sp>
+      <p:sp>
+        <p:nvSpPr>
+          <p:cNvPr id="19" name="Text 17"/>
+          <p:cNvSpPr/>
+          <p:nvPr/>
+        </p:nvSpPr>
+        <p:spPr>
+          <a:xfrm>
+            <a:off x="6784848" y="2331720"/>
+            <a:ext cx="4736592" cy="228600"/>
+          </a:xfrm>
+          <a:prstGeom prst="rect">
+            <a:avLst/>
+          </a:prstGeom>
+          <a:noFill/>
+          <a:ln/>
+        </p:spPr>
+        <p:txBody>
+          <a:bodyPr wrap="square" rtlCol="0" anchor="ctr"/>
+          <a:lstStyle/>
+          <a:p>
+            <a:pPr indent="0" marL="0">
+              <a:buNone/>
+            </a:pPr>
+            <a:r>
+              <a:rPr lang="en-US" sz="900" b="1" spc="100" kern="0" dirty="0">
+                <a:solidFill>
+                  <a:srgbClr val="64748B"/>
+                </a:solidFill>
+                <a:latin typeface="Calibri" pitchFamily="34" charset="0"/>
+                <a:ea typeface="Calibri" pitchFamily="34" charset="-122"/>
+                <a:cs typeface="Calibri" pitchFamily="34" charset="-120"/>
+              </a:rPr>
+              <a:t>{{csv_kpi_3_label}}</a:t>
+            </a:r>
+            <a:endParaRPr lang="en-US" sz="900" dirty="0"/>
+          </a:p>
+        </p:txBody>
+      </p:sp>
+      <p:sp>
+        <p:nvSpPr>
+          <p:cNvPr id="20" name="Text 18"/>
+          <p:cNvSpPr/>
+          <p:nvPr/>
+        </p:nvSpPr>
+        <p:spPr>
+          <a:xfrm>
+            <a:off x="6784848" y="2560320"/>
+            <a:ext cx="4736592" cy="347472"/>
+          </a:xfrm>
+          <a:prstGeom prst="rect">
+            <a:avLst/>
+          </a:prstGeom>
+          <a:noFill/>
+          <a:ln/>
+        </p:spPr>
+        <p:txBody>
+          <a:bodyPr wrap="square" rtlCol="0" anchor="ctr"/>
+          <a:lstStyle/>
+          <a:p>
+            <a:pPr indent="0" marL="0">
+              <a:buNone/>
+            </a:pPr>
+            <a:r>
+              <a:rPr lang="en-US" sz="2000" b="1" dirty="0">
+                <a:solidFill>
+                  <a:srgbClr val="0F172A"/>
+                </a:solidFill>
+                <a:latin typeface="Calibri" pitchFamily="34" charset="0"/>
+                <a:ea typeface="Calibri" pitchFamily="34" charset="-122"/>
+                <a:cs typeface="Calibri" pitchFamily="34" charset="-120"/>
+              </a:rPr>
+              <a:t>{{csv_kpi_3_value}}</a:t>
+            </a:r>
+            <a:endParaRPr lang="en-US" sz="2000" dirty="0"/>
+          </a:p>
+        </p:txBody>
+      </p:sp>
+      <p:sp>
+        <p:nvSpPr>
+          <p:cNvPr id="21" name="Shape 19"/>
+          <p:cNvSpPr/>
+          <p:nvPr/>
+        </p:nvSpPr>
+        <p:spPr>
+          <a:xfrm>
+            <a:off x="731520" y="3108960"/>
+            <a:ext cx="5029200" cy="685800"/>
+          </a:xfrm>
+          <a:prstGeom prst="roundRect">
+            <a:avLst>
+              <a:gd name="adj" fmla="val 13333"/>
+            </a:avLst>
+          </a:prstGeom>
+          <a:solidFill>
+            <a:srgbClr val="FFFFFF"/>
+          </a:solidFill>
+          <a:ln/>
+          <a:effectLst>
+            <a:outerShdw sx="100000" sy="100000" kx="0" ky="0" algn="bl" rotWithShape="0" blurRad="76200" dist="25400" dir="8100000">
+              <a:srgbClr val="000000">
+                <a:alpha val="8000"/>
+              </a:srgbClr>
+            </a:outerShdw>
+          </a:effectLst>
+        </p:spPr>
+      </p:sp>
+      <p:sp>
+        <p:nvSpPr>
+          <p:cNvPr id="22" name="Shape 20"/>
+          <p:cNvSpPr/>
+          <p:nvPr/>
+        </p:nvSpPr>
+        <p:spPr>
+          <a:xfrm>
+            <a:off x="731520" y="3108960"/>
+            <a:ext cx="73152" cy="685800"/>
+          </a:xfrm>
+          <a:prstGeom prst="rect">
+            <a:avLst/>
+          </a:prstGeom>
+          <a:solidFill>
+            <a:srgbClr val="4338CA"/>
+          </a:solidFill>
+          <a:ln/>
+        </p:spPr>
+      </p:sp>
+      <p:sp>
+        <p:nvSpPr>
+          <p:cNvPr id="23" name="Text 21"/>
+          <p:cNvSpPr/>
+          <p:nvPr/>
+        </p:nvSpPr>
+        <p:spPr>
+          <a:xfrm>
+            <a:off x="932688" y="3154680"/>
+            <a:ext cx="4736592" cy="228600"/>
+          </a:xfrm>
+          <a:prstGeom prst="rect">
+            <a:avLst/>
+          </a:prstGeom>
+          <a:noFill/>
+          <a:ln/>
+        </p:spPr>
+        <p:txBody>
+          <a:bodyPr wrap="square" rtlCol="0" anchor="ctr"/>
+          <a:lstStyle/>
+          <a:p>
+            <a:pPr indent="0" marL="0">
+              <a:buNone/>
+            </a:pPr>
+            <a:r>
+              <a:rPr lang="en-US" sz="900" b="1" spc="100" kern="0" dirty="0">
+                <a:solidFill>
+                  <a:srgbClr val="64748B"/>
+                </a:solidFill>
+                <a:latin typeface="Calibri" pitchFamily="34" charset="0"/>
+                <a:ea typeface="Calibri" pitchFamily="34" charset="-122"/>
+                <a:cs typeface="Calibri" pitchFamily="34" charset="-120"/>
+              </a:rPr>
+              <a:t>{{csv_kpi_4_label}}</a:t>
+            </a:r>
+            <a:endParaRPr lang="en-US" sz="900" dirty="0"/>
+          </a:p>
+        </p:txBody>
+      </p:sp>
+      <p:sp>
+        <p:nvSpPr>
+          <p:cNvPr id="24" name="Text 22"/>
+          <p:cNvSpPr/>
+          <p:nvPr/>
+        </p:nvSpPr>
+        <p:spPr>
+          <a:xfrm>
+            <a:off x="932688" y="3383280"/>
+            <a:ext cx="4736592" cy="347472"/>
+          </a:xfrm>
+          <a:prstGeom prst="rect">
+            <a:avLst/>
+          </a:prstGeom>
+          <a:noFill/>
+          <a:ln/>
+        </p:spPr>
+        <p:txBody>
+          <a:bodyPr wrap="square" rtlCol="0" anchor="ctr"/>
+          <a:lstStyle/>
+          <a:p>
+            <a:pPr indent="0" marL="0">
+              <a:buNone/>
+            </a:pPr>
+            <a:r>
+              <a:rPr lang="en-US" sz="2000" b="1" dirty="0">
+                <a:solidFill>
+                  <a:srgbClr val="0F172A"/>
+                </a:solidFill>
+                <a:latin typeface="Calibri" pitchFamily="34" charset="0"/>
+                <a:ea typeface="Calibri" pitchFamily="34" charset="-122"/>
+                <a:cs typeface="Calibri" pitchFamily="34" charset="-120"/>
+              </a:rPr>
+              <a:t>{{csv_kpi_4_value}}</a:t>
+            </a:r>
+            <a:endParaRPr lang="en-US" sz="2000" dirty="0"/>
+          </a:p>
+        </p:txBody>
+      </p:sp>
+      <p:sp>
+        <p:nvSpPr>
+          <p:cNvPr id="25" name="Shape 23"/>
+          <p:cNvSpPr/>
+          <p:nvPr/>
+        </p:nvSpPr>
+        <p:spPr>
+          <a:xfrm>
+            <a:off x="6583680" y="3108960"/>
+            <a:ext cx="5029200" cy="685800"/>
+          </a:xfrm>
+          <a:prstGeom prst="roundRect">
+            <a:avLst>
+              <a:gd name="adj" fmla="val 13333"/>
+            </a:avLst>
+          </a:prstGeom>
+          <a:solidFill>
+            <a:srgbClr val="FFFFFF"/>
+          </a:solidFill>
+          <a:ln/>
+          <a:effectLst>
+            <a:outerShdw sx="100000" sy="100000" kx="0" ky="0" algn="bl" rotWithShape="0" blurRad="76200" dist="25400" dir="8100000">
+              <a:srgbClr val="000000">
+                <a:alpha val="8000"/>
+              </a:srgbClr>
+            </a:outerShdw>
+          </a:effectLst>
+        </p:spPr>
+      </p:sp>
+      <p:sp>
+        <p:nvSpPr>
+          <p:cNvPr id="26" name="Shape 24"/>
+          <p:cNvSpPr/>
+          <p:nvPr/>
+        </p:nvSpPr>
+        <p:spPr>
+          <a:xfrm>
+            <a:off x="6583680" y="3108960"/>
+            <a:ext cx="73152" cy="685800"/>
+          </a:xfrm>
+          <a:prstGeom prst="rect">
+            <a:avLst/>
+          </a:prstGeom>
+          <a:solidFill>
+            <a:srgbClr val="4338CA"/>
+          </a:solidFill>
+          <a:ln/>
+        </p:spPr>
+      </p:sp>
+      <p:sp>
+        <p:nvSpPr>
+          <p:cNvPr id="27" name="Text 25"/>
+          <p:cNvSpPr/>
+          <p:nvPr/>
+        </p:nvSpPr>
+        <p:spPr>
+          <a:xfrm>
+            <a:off x="6784848" y="3154680"/>
+            <a:ext cx="4736592" cy="228600"/>
+          </a:xfrm>
+          <a:prstGeom prst="rect">
+            <a:avLst/>
+          </a:prstGeom>
+          <a:noFill/>
+          <a:ln/>
+        </p:spPr>
+        <p:txBody>
+          <a:bodyPr wrap="square" rtlCol="0" anchor="ctr"/>
+          <a:lstStyle/>
+          <a:p>
+            <a:pPr indent="0" marL="0">
+              <a:buNone/>
+            </a:pPr>
+            <a:r>
+              <a:rPr lang="en-US" sz="900" b="1" spc="100" kern="0" dirty="0">
+                <a:solidFill>
+                  <a:srgbClr val="64748B"/>
+                </a:solidFill>
+                <a:latin typeface="Calibri" pitchFamily="34" charset="0"/>
+                <a:ea typeface="Calibri" pitchFamily="34" charset="-122"/>
+                <a:cs typeface="Calibri" pitchFamily="34" charset="-120"/>
+              </a:rPr>
+              <a:t>{{csv_kpi_5_label}}</a:t>
+            </a:r>
+            <a:endParaRPr lang="en-US" sz="900" dirty="0"/>
+          </a:p>
+        </p:txBody>
+      </p:sp>
+      <p:sp>
+        <p:nvSpPr>
+          <p:cNvPr id="28" name="Text 26"/>
+          <p:cNvSpPr/>
+          <p:nvPr/>
+        </p:nvSpPr>
+        <p:spPr>
+          <a:xfrm>
+            <a:off x="6784848" y="3383280"/>
+            <a:ext cx="4736592" cy="347472"/>
+          </a:xfrm>
+          <a:prstGeom prst="rect">
+            <a:avLst/>
+          </a:prstGeom>
+          <a:noFill/>
+          <a:ln/>
+        </p:spPr>
+        <p:txBody>
+          <a:bodyPr wrap="square" rtlCol="0" anchor="ctr"/>
+          <a:lstStyle/>
+          <a:p>
+            <a:pPr indent="0" marL="0">
+              <a:buNone/>
+            </a:pPr>
+            <a:r>
+              <a:rPr lang="en-US" sz="2000" b="1" dirty="0">
+                <a:solidFill>
+                  <a:srgbClr val="0F172A"/>
+                </a:solidFill>
+                <a:latin typeface="Calibri" pitchFamily="34" charset="0"/>
+                <a:ea typeface="Calibri" pitchFamily="34" charset="-122"/>
+                <a:cs typeface="Calibri" pitchFamily="34" charset="-120"/>
+              </a:rPr>
+              <a:t>{{csv_kpi_5_value}}</a:t>
+            </a:r>
+            <a:endParaRPr lang="en-US" sz="2000" dirty="0"/>
+          </a:p>
+        </p:txBody>
+      </p:sp>
+      <p:sp>
+        <p:nvSpPr>
+          <p:cNvPr id="29" name="Shape 27"/>
+          <p:cNvSpPr/>
+          <p:nvPr/>
+        </p:nvSpPr>
+        <p:spPr>
+          <a:xfrm>
+            <a:off x="731520" y="3749040"/>
+            <a:ext cx="10698480" cy="2286000"/>
+          </a:xfrm>
+          <a:prstGeom prst="roundRect">
+            <a:avLst>
+              <a:gd name="adj" fmla="val 4000"/>
+            </a:avLst>
+          </a:prstGeom>
+          <a:solidFill>
+            <a:srgbClr val="FFFFFF"/>
+          </a:solidFill>
+          <a:ln/>
+          <a:effectLst>
+            <a:outerShdw sx="100000" sy="100000" kx="0" ky="0" algn="bl" rotWithShape="0" blurRad="76200" dist="25400" dir="8100000">
+              <a:srgbClr val="000000">
+                <a:alpha val="8000"/>
+              </a:srgbClr>
+            </a:outerShdw>
+          </a:effectLst>
+        </p:spPr>
+      </p:sp>
+      <p:sp>
+        <p:nvSpPr>
+          <p:cNvPr id="30" name="Text 28"/>
+          <p:cNvSpPr/>
+          <p:nvPr/>
+        </p:nvSpPr>
+        <p:spPr>
+          <a:xfrm>
+            <a:off x="731520" y="3749040"/>
+            <a:ext cx="10698480" cy="2286000"/>
+          </a:xfrm>
+          <a:prstGeom prst="rect">
+            <a:avLst/>
+          </a:prstGeom>
+          <a:noFill/>
+          <a:ln/>
+        </p:spPr>
+        <p:txBody>
+          <a:bodyPr wrap="square" rtlCol="0" anchor="ctr"/>
+          <a:lstStyle/>
+          <a:p>
+            <a:pPr algn="ctr" indent="0" marL="0">
+              <a:buNone/>
+            </a:pPr>
+            <a:r>
+              <a:rPr lang="en-US" sz="1000" dirty="0">
+                <a:solidFill>
+                  <a:srgbClr val="94A3B8"/>
+                </a:solidFill>
+                <a:latin typeface="Calibri" pitchFamily="34" charset="0"/>
+                <a:ea typeface="Calibri" pitchFamily="34" charset="-122"/>
+                <a:cs typeface="Calibri" pitchFamily="34" charset="-120"/>
+              </a:rPr>
+              <a:t>{{chart_csv_data}}</a:t>
+            </a:r>
+            <a:endParaRPr lang="en-US" sz="1000" dirty="0"/>
+          </a:p>
+        </p:txBody>
+      </p:sp>
+      <p:sp>
+        <p:nvSpPr>
+          <p:cNvPr id="31" name="Text 29"/>
+          <p:cNvSpPr/>
+          <p:nvPr/>
+        </p:nvSpPr>
+        <p:spPr>
+          <a:xfrm>
+            <a:off x="731520" y="6510528"/>
+            <a:ext cx="10698480" cy="256032"/>
+          </a:xfrm>
+          <a:prstGeom prst="rect">
+            <a:avLst/>
+          </a:prstGeom>
+          <a:noFill/>
+          <a:ln/>
+        </p:spPr>
+        <p:txBody>
+          <a:bodyPr wrap="square" rtlCol="0" anchor="ctr"/>
+          <a:lstStyle/>
+          <a:p>
+            <a:pPr indent="0" marL="0">
+              <a:buNone/>
+            </a:pPr>
+            <a:r>
+              <a:rPr lang="en-US" sz="800" dirty="0">
+                <a:solidFill>
+                  <a:srgbClr val="94A3B8"/>
+                </a:solidFill>
+                <a:latin typeface="Calibri" pitchFamily="34" charset="0"/>
+                <a:ea typeface="Calibri" pitchFamily="34" charset="-122"/>
+                <a:cs typeface="Calibri" pitchFamily="34" charset="-120"/>
+              </a:rPr>
+              <a:t>{{agency_name}}  •  Confidential  •  Page 14</a:t>
+            </a:r>
+            <a:endParaRPr lang="en-US" sz="800" dirty="0"/>
+          </a:p>
+        </p:txBody>
+      </p:sp>
+    </p:spTree>
+  </p:cSld>
+  <p:clrMapOvr>
+    <a:masterClrMapping/>
+  </p:clrMapOvr>
+</p:sld>
+</file>
+
+<file path=ppt/slides/slide15.xml><?xml version="1.0" encoding="utf-8"?>
+<p:sld xmlns:a="http://schemas.openxmlformats.org/drawingml/2006/main" xmlns:r="http://schemas.openxmlformats.org/officeDocument/2006/relationships" xmlns:p="http://schemas.openxmlformats.org/presentationml/2006/main">
+  <p:cSld name="Slide 15">
+    <p:bg>
+      <p:bgPr>
+        <a:solidFill>
+          <a:srgbClr val="FFFFFF"/>
+        </a:solidFill>
+      </p:bgPr>
+    </p:bg>
+    <p:spTree>
+      <p:nvGrpSpPr>
+        <p:cNvPr id="1" name=""/>
+        <p:cNvGrpSpPr/>
+        <p:nvPr/>
+      </p:nvGrpSpPr>
+      <p:grpSpPr>
+        <a:xfrm>
+          <a:off x="0" y="0"/>
+          <a:ext cx="0" cy="0"/>
+          <a:chOff x="0" y="0"/>
+          <a:chExt cx="0" cy="0"/>
+        </a:xfrm>
+      </p:grpSpPr>
+      <p:sp>
+        <p:nvSpPr>
+          <p:cNvPr id="2" name="Shape 0"/>
+          <p:cNvSpPr/>
+          <p:nvPr/>
+        </p:nvSpPr>
+        <p:spPr>
+          <a:xfrm>
+            <a:off x="0" y="0"/>
+            <a:ext cx="12161520" cy="1188720"/>
+          </a:xfrm>
+          <a:prstGeom prst="rect">
+            <a:avLst/>
+          </a:prstGeom>
+          <a:solidFill>
+            <a:srgbClr val="4338CA"/>
+          </a:solidFill>
+          <a:ln/>
+        </p:spPr>
+      </p:sp>
+      <p:sp>
+        <p:nvSpPr>
+          <p:cNvPr id="3" name="Shape 1"/>
+          <p:cNvSpPr/>
+          <p:nvPr/>
+        </p:nvSpPr>
+        <p:spPr>
+          <a:xfrm>
+            <a:off x="8961120" y="0"/>
+            <a:ext cx="3200400" cy="1188720"/>
+          </a:xfrm>
+          <a:prstGeom prst="rtTriangle">
+            <a:avLst/>
+          </a:prstGeom>
+          <a:solidFill>
+            <a:srgbClr val="3730A3"/>
+          </a:solidFill>
+          <a:ln/>
+        </p:spPr>
+      </p:sp>
+      <p:sp>
+        <p:nvSpPr>
+          <p:cNvPr id="4" name="Text 2"/>
+          <p:cNvSpPr/>
+          <p:nvPr/>
+        </p:nvSpPr>
+        <p:spPr>
+          <a:xfrm>
+            <a:off x="731520" y="228600"/>
+            <a:ext cx="7589520" cy="731520"/>
+          </a:xfrm>
+          <a:prstGeom prst="rect">
+            <a:avLst/>
+          </a:prstGeom>
+          <a:noFill/>
+          <a:ln/>
+        </p:spPr>
+        <p:txBody>
+          <a:bodyPr wrap="square" lIns="0" tIns="0" rIns="0" bIns="0" rtlCol="0" anchor="ctr"/>
+          <a:lstStyle/>
+          <a:p>
+            <a:pPr indent="0" marL="0">
+              <a:buNone/>
+            </a:pPr>
+            <a:r>
+              <a:rPr lang="en-US" sz="2800" b="1" dirty="0">
+                <a:solidFill>
+                  <a:srgbClr val="FFFFFF"/>
+                </a:solidFill>
+                <a:latin typeface="Calibri" pitchFamily="34" charset="0"/>
+                <a:ea typeface="Calibri" pitchFamily="34" charset="-122"/>
+                <a:cs typeface="Calibri" pitchFamily="34" charset="-120"/>
+              </a:rPr>
+              <a:t>Conversion Funnel</a:t>
+            </a:r>
+            <a:endParaRPr lang="en-US" sz="2800" dirty="0"/>
+          </a:p>
+        </p:txBody>
+      </p:sp>
+      <p:sp>
+        <p:nvSpPr>
+          <p:cNvPr id="5" name="Shape 3"/>
+          <p:cNvSpPr/>
+          <p:nvPr/>
+        </p:nvSpPr>
+        <p:spPr>
+          <a:xfrm>
+            <a:off x="731520" y="1463040"/>
+            <a:ext cx="10698480" cy="3657600"/>
+          </a:xfrm>
+          <a:prstGeom prst="roundRect">
+            <a:avLst>
+              <a:gd name="adj" fmla="val 2500"/>
+            </a:avLst>
+          </a:prstGeom>
+          <a:solidFill>
+            <a:srgbClr val="FFFFFF"/>
+          </a:solidFill>
+          <a:ln/>
+          <a:effectLst>
+            <a:outerShdw sx="100000" sy="100000" kx="0" ky="0" algn="bl" rotWithShape="0" blurRad="76200" dist="25400" dir="8100000">
+              <a:srgbClr val="000000">
+                <a:alpha val="8000"/>
+              </a:srgbClr>
+            </a:outerShdw>
+          </a:effectLst>
+        </p:spPr>
+      </p:sp>
+      <p:sp>
+        <p:nvSpPr>
+          <p:cNvPr id="6" name="Text 4"/>
+          <p:cNvSpPr/>
+          <p:nvPr/>
+        </p:nvSpPr>
+        <p:spPr>
+          <a:xfrm>
+            <a:off x="731520" y="1463040"/>
+            <a:ext cx="10698480" cy="3657600"/>
+          </a:xfrm>
+          <a:prstGeom prst="rect">
+            <a:avLst/>
+          </a:prstGeom>
+          <a:noFill/>
+          <a:ln/>
+        </p:spPr>
+        <p:txBody>
+          <a:bodyPr wrap="square" rtlCol="0" anchor="ctr"/>
+          <a:lstStyle/>
+          <a:p>
+            <a:pPr algn="ctr" indent="0" marL="0">
+              <a:buNone/>
+            </a:pPr>
+            <a:r>
+              <a:rPr lang="en-US" sz="1000" dirty="0">
+                <a:solidFill>
+                  <a:srgbClr val="94A3B8"/>
+                </a:solidFill>
+                <a:latin typeface="Calibri" pitchFamily="34" charset="0"/>
+                <a:ea typeface="Calibri" pitchFamily="34" charset="-122"/>
+                <a:cs typeface="Calibri" pitchFamily="34" charset="-120"/>
+              </a:rPr>
+              <a:t>{{chart_conversion_funnel}}</a:t>
+            </a:r>
+            <a:endParaRPr lang="en-US" sz="1000" dirty="0"/>
+          </a:p>
+        </p:txBody>
+      </p:sp>
+      <p:sp>
+        <p:nvSpPr>
+          <p:cNvPr id="7" name="Text 5"/>
+          <p:cNvSpPr/>
+          <p:nvPr/>
+        </p:nvSpPr>
+        <p:spPr>
+          <a:xfrm>
+            <a:off x="731520" y="5394960"/>
+            <a:ext cx="10698480" cy="1097280"/>
+          </a:xfrm>
+          <a:prstGeom prst="rect">
+            <a:avLst/>
+          </a:prstGeom>
+          <a:noFill/>
+          <a:ln/>
+        </p:spPr>
+        <p:txBody>
+          <a:bodyPr wrap="square" rtlCol="0" anchor="t"/>
+          <a:lstStyle/>
+          <a:p>
+            <a:pPr indent="0" marL="0">
+              <a:lnSpc>
+                <a:spcPct val="135000"/>
+              </a:lnSpc>
+              <a:buNone/>
+            </a:pPr>
+            <a:r>
+              <a:rPr lang="en-US" sz="1200" dirty="0">
+                <a:solidFill>
+                  <a:srgbClr val="334155"/>
+                </a:solidFill>
+                <a:latin typeface="Calibri" pitchFamily="34" charset="0"/>
+                <a:ea typeface="Calibri" pitchFamily="34" charset="-122"/>
+                <a:cs typeface="Calibri" pitchFamily="34" charset="-120"/>
+              </a:rPr>
+              <a:t>{{website_narrative}}</a:t>
+            </a:r>
+            <a:endParaRPr lang="en-US" sz="1200" dirty="0"/>
+          </a:p>
+        </p:txBody>
+      </p:sp>
+      <p:sp>
+        <p:nvSpPr>
+          <p:cNvPr id="8" name="Text 6"/>
+          <p:cNvSpPr/>
+          <p:nvPr/>
+        </p:nvSpPr>
+        <p:spPr>
+          <a:xfrm>
+            <a:off x="731520" y="6510528"/>
+            <a:ext cx="10698480" cy="256032"/>
+          </a:xfrm>
+          <a:prstGeom prst="rect">
+            <a:avLst/>
+          </a:prstGeom>
+          <a:noFill/>
+          <a:ln/>
+        </p:spPr>
+        <p:txBody>
+          <a:bodyPr wrap="square" rtlCol="0" anchor="ctr"/>
+          <a:lstStyle/>
+          <a:p>
+            <a:pPr indent="0" marL="0">
+              <a:buNone/>
+            </a:pPr>
+            <a:r>
+              <a:rPr lang="en-US" sz="800" dirty="0">
+                <a:solidFill>
+                  <a:srgbClr val="94A3B8"/>
+                </a:solidFill>
+                <a:latin typeface="Calibri" pitchFamily="34" charset="0"/>
+                <a:ea typeface="Calibri" pitchFamily="34" charset="-122"/>
+                <a:cs typeface="Calibri" pitchFamily="34" charset="-120"/>
+              </a:rPr>
+              <a:t>{{agency_name}}  •  Confidential  •  Page 15</a:t>
+            </a:r>
+            <a:endParaRPr lang="en-US" sz="800" dirty="0"/>
+          </a:p>
+        </p:txBody>
+      </p:sp>
+    </p:spTree>
+  </p:cSld>
+  <p:clrMapOvr>
+    <a:masterClrMapping/>
+  </p:clrMapOvr>
+</p:sld>
+</file>
+
+<file path=ppt/slides/slide16.xml><?xml version="1.0" encoding="utf-8"?>
+<p:sld xmlns:a="http://schemas.openxmlformats.org/drawingml/2006/main" xmlns:r="http://schemas.openxmlformats.org/officeDocument/2006/relationships" xmlns:p="http://schemas.openxmlformats.org/presentationml/2006/main">
+  <p:cSld name="Slide 16">
+    <p:bg>
+      <p:bgPr>
+        <a:solidFill>
+          <a:srgbClr val="FFFFFF"/>
+        </a:solidFill>
+      </p:bgPr>
+    </p:bg>
+    <p:spTree>
+      <p:nvGrpSpPr>
+        <p:cNvPr id="1" name=""/>
+        <p:cNvGrpSpPr/>
+        <p:nvPr/>
+      </p:nvGrpSpPr>
+      <p:grpSpPr>
+        <a:xfrm>
+          <a:off x="0" y="0"/>
+          <a:ext cx="0" cy="0"/>
+          <a:chOff x="0" y="0"/>
+          <a:chExt cx="0" cy="0"/>
+        </a:xfrm>
+      </p:grpSpPr>
+      <p:sp>
+        <p:nvSpPr>
+          <p:cNvPr id="2" name="Shape 0"/>
+          <p:cNvSpPr/>
+          <p:nvPr/>
+        </p:nvSpPr>
+        <p:spPr>
+          <a:xfrm>
+            <a:off x="0" y="0"/>
+            <a:ext cx="12161520" cy="1188720"/>
+          </a:xfrm>
+          <a:prstGeom prst="rect">
+            <a:avLst/>
+          </a:prstGeom>
+          <a:solidFill>
+            <a:srgbClr val="059669"/>
+          </a:solidFill>
+          <a:ln/>
+        </p:spPr>
+      </p:sp>
+      <p:sp>
+        <p:nvSpPr>
+          <p:cNvPr id="3" name="Shape 1"/>
+          <p:cNvSpPr/>
+          <p:nvPr/>
+        </p:nvSpPr>
+        <p:spPr>
+          <a:xfrm>
+            <a:off x="8961120" y="0"/>
+            <a:ext cx="3200400" cy="1188720"/>
+          </a:xfrm>
+          <a:prstGeom prst="rtTriangle">
+            <a:avLst/>
+          </a:prstGeom>
+          <a:solidFill>
+            <a:srgbClr val="047857"/>
+          </a:solidFill>
+          <a:ln/>
+        </p:spPr>
+      </p:sp>
+      <p:sp>
+        <p:nvSpPr>
+          <p:cNvPr id="4" name="Text 2"/>
+          <p:cNvSpPr/>
+          <p:nvPr/>
+        </p:nvSpPr>
+        <p:spPr>
+          <a:xfrm>
+            <a:off x="731520" y="228600"/>
+            <a:ext cx="7589520" cy="731520"/>
+          </a:xfrm>
+          <a:prstGeom prst="rect">
+            <a:avLst/>
+          </a:prstGeom>
+          <a:noFill/>
+          <a:ln/>
+        </p:spPr>
+        <p:txBody>
+          <a:bodyPr wrap="square" lIns="0" tIns="0" rIns="0" bIns="0" rtlCol="0" anchor="ctr"/>
+          <a:lstStyle/>
+          <a:p>
+            <a:pPr indent="0" marL="0">
+              <a:buNone/>
+            </a:pPr>
+            <a:r>
+              <a:rPr lang="en-US" sz="2800" b="1" dirty="0">
+                <a:solidFill>
+                  <a:srgbClr val="FFFFFF"/>
+                </a:solidFill>
+                <a:latin typeface="Calibri" pitchFamily="34" charset="0"/>
+                <a:ea typeface="Calibri" pitchFamily="34" charset="-122"/>
+                <a:cs typeface="Calibri" pitchFamily="34" charset="-120"/>
+              </a:rPr>
+              <a:t>Key Wins &amp; Highlights</a:t>
+            </a:r>
+            <a:endParaRPr lang="en-US" sz="2800" dirty="0"/>
+          </a:p>
+        </p:txBody>
+      </p:sp>
+      <p:sp>
+        <p:nvSpPr>
+          <p:cNvPr id="5" name="Text 3"/>
+          <p:cNvSpPr/>
+          <p:nvPr/>
+        </p:nvSpPr>
+        <p:spPr>
+          <a:xfrm>
+            <a:off x="731520" y="1463040"/>
+            <a:ext cx="10698480" cy="4572000"/>
+          </a:xfrm>
+          <a:prstGeom prst="rect">
+            <a:avLst/>
+          </a:prstGeom>
+          <a:noFill/>
+          <a:ln/>
+        </p:spPr>
+        <p:txBody>
+          <a:bodyPr wrap="square" rtlCol="0" anchor="t"/>
+          <a:lstStyle/>
+          <a:p>
+            <a:pPr indent="0" marL="0">
+              <a:lnSpc>
+                <a:spcPct val="150000"/>
+              </a:lnSpc>
+              <a:buNone/>
+            </a:pPr>
+            <a:r>
+              <a:rPr lang="en-US" sz="1300" dirty="0">
+                <a:solidFill>
+                  <a:srgbClr val="334155"/>
+                </a:solidFill>
+                <a:latin typeface="Calibri" pitchFamily="34" charset="0"/>
+                <a:ea typeface="Calibri" pitchFamily="34" charset="-122"/>
+                <a:cs typeface="Calibri" pitchFamily="34" charset="-120"/>
+              </a:rPr>
+              <a:t>{{key_wins}}</a:t>
+            </a:r>
+            <a:endParaRPr lang="en-US" sz="1300" dirty="0"/>
+          </a:p>
+        </p:txBody>
+      </p:sp>
+      <p:sp>
+        <p:nvSpPr>
+          <p:cNvPr id="6" name="Text 4"/>
+          <p:cNvSpPr/>
+          <p:nvPr/>
+        </p:nvSpPr>
+        <p:spPr>
+          <a:xfrm>
+            <a:off x="731520" y="6510528"/>
+            <a:ext cx="10698480" cy="256032"/>
+          </a:xfrm>
+          <a:prstGeom prst="rect">
+            <a:avLst/>
+          </a:prstGeom>
+          <a:noFill/>
+          <a:ln/>
+        </p:spPr>
+        <p:txBody>
+          <a:bodyPr wrap="square" rtlCol="0" anchor="ctr"/>
+          <a:lstStyle/>
+          <a:p>
+            <a:pPr indent="0" marL="0">
+              <a:buNone/>
+            </a:pPr>
+            <a:r>
+              <a:rPr lang="en-US" sz="800" dirty="0">
+                <a:solidFill>
+                  <a:srgbClr val="94A3B8"/>
+                </a:solidFill>
+                <a:latin typeface="Calibri" pitchFamily="34" charset="0"/>
+                <a:ea typeface="Calibri" pitchFamily="34" charset="-122"/>
+                <a:cs typeface="Calibri" pitchFamily="34" charset="-120"/>
+              </a:rPr>
+              <a:t>{{agency_name}}  •  Confidential  •  Page 16</a:t>
+            </a:r>
+            <a:endParaRPr lang="en-US" sz="800" dirty="0"/>
+          </a:p>
+        </p:txBody>
+      </p:sp>
+    </p:spTree>
+  </p:cSld>
+  <p:clrMapOvr>
+    <a:masterClrMapping/>
+  </p:clrMapOvr>
+</p:sld>
+</file>
+
+<file path=ppt/slides/slide17.xml><?xml version="1.0" encoding="utf-8"?>
+<p:sld xmlns:a="http://schemas.openxmlformats.org/drawingml/2006/main" xmlns:r="http://schemas.openxmlformats.org/officeDocument/2006/relationships" xmlns:p="http://schemas.openxmlformats.org/presentationml/2006/main">
+  <p:cSld name="Slide 17">
+    <p:bg>
+      <p:bgPr>
+        <a:solidFill>
+          <a:srgbClr val="FFFFFF"/>
+        </a:solidFill>
+      </p:bgPr>
+    </p:bg>
+    <p:spTree>
+      <p:nvGrpSpPr>
+        <p:cNvPr id="1" name=""/>
+        <p:cNvGrpSpPr/>
+        <p:nvPr/>
+      </p:nvGrpSpPr>
+      <p:grpSpPr>
+        <a:xfrm>
+          <a:off x="0" y="0"/>
+          <a:ext cx="0" cy="0"/>
+          <a:chOff x="0" y="0"/>
+          <a:chExt cx="0" cy="0"/>
+        </a:xfrm>
+      </p:grpSpPr>
+      <p:sp>
+        <p:nvSpPr>
+          <p:cNvPr id="2" name="Shape 0"/>
+          <p:cNvSpPr/>
+          <p:nvPr/>
+        </p:nvSpPr>
+        <p:spPr>
+          <a:xfrm>
+            <a:off x="0" y="0"/>
+            <a:ext cx="12161520" cy="1188720"/>
+          </a:xfrm>
+          <a:prstGeom prst="rect">
+            <a:avLst/>
+          </a:prstGeom>
+          <a:solidFill>
+            <a:srgbClr val="D97706"/>
+          </a:solidFill>
+          <a:ln/>
+        </p:spPr>
+      </p:sp>
+      <p:sp>
+        <p:nvSpPr>
+          <p:cNvPr id="3" name="Shape 1"/>
+          <p:cNvSpPr/>
+          <p:nvPr/>
+        </p:nvSpPr>
+        <p:spPr>
+          <a:xfrm>
+            <a:off x="8961120" y="0"/>
+            <a:ext cx="3200400" cy="1188720"/>
+          </a:xfrm>
+          <a:prstGeom prst="rtTriangle">
+            <a:avLst/>
+          </a:prstGeom>
+          <a:solidFill>
+            <a:srgbClr val="B45309"/>
+          </a:solidFill>
+          <a:ln/>
+        </p:spPr>
+      </p:sp>
+      <p:sp>
+        <p:nvSpPr>
+          <p:cNvPr id="4" name="Text 2"/>
+          <p:cNvSpPr/>
+          <p:nvPr/>
+        </p:nvSpPr>
+        <p:spPr>
+          <a:xfrm>
+            <a:off x="731520" y="228600"/>
+            <a:ext cx="7589520" cy="731520"/>
+          </a:xfrm>
+          <a:prstGeom prst="rect">
+            <a:avLst/>
+          </a:prstGeom>
+          <a:noFill/>
+          <a:ln/>
+        </p:spPr>
+        <p:txBody>
+          <a:bodyPr wrap="square" lIns="0" tIns="0" rIns="0" bIns="0" rtlCol="0" anchor="ctr"/>
+          <a:lstStyle/>
+          <a:p>
+            <a:pPr indent="0" marL="0">
+              <a:buNone/>
+            </a:pPr>
+            <a:r>
+              <a:rPr lang="en-US" sz="2800" b="1" dirty="0">
+                <a:solidFill>
+                  <a:srgbClr val="FFFFFF"/>
+                </a:solidFill>
+                <a:latin typeface="Calibri" pitchFamily="34" charset="0"/>
+                <a:ea typeface="Calibri" pitchFamily="34" charset="-122"/>
+                <a:cs typeface="Calibri" pitchFamily="34" charset="-120"/>
+              </a:rPr>
+              <a:t>Concerns &amp; Recommendations</a:t>
+            </a:r>
+            <a:endParaRPr lang="en-US" sz="2800" dirty="0"/>
+          </a:p>
+        </p:txBody>
+      </p:sp>
+      <p:sp>
+        <p:nvSpPr>
+          <p:cNvPr id="5" name="Text 3"/>
+          <p:cNvSpPr/>
+          <p:nvPr/>
+        </p:nvSpPr>
+        <p:spPr>
+          <a:xfrm>
+            <a:off x="731520" y="1463040"/>
+            <a:ext cx="10698480" cy="4572000"/>
+          </a:xfrm>
+          <a:prstGeom prst="rect">
+            <a:avLst/>
+          </a:prstGeom>
+          <a:noFill/>
+          <a:ln/>
+        </p:spPr>
+        <p:txBody>
+          <a:bodyPr wrap="square" rtlCol="0" anchor="t"/>
+          <a:lstStyle/>
+          <a:p>
+            <a:pPr indent="0" marL="0">
+              <a:lnSpc>
+                <a:spcPct val="150000"/>
+              </a:lnSpc>
+              <a:buNone/>
+            </a:pPr>
+            <a:r>
+              <a:rPr lang="en-US" sz="1300" dirty="0">
+                <a:solidFill>
+                  <a:srgbClr val="334155"/>
+                </a:solidFill>
+                <a:latin typeface="Calibri" pitchFamily="34" charset="0"/>
+                <a:ea typeface="Calibri" pitchFamily="34" charset="-122"/>
+                <a:cs typeface="Calibri" pitchFamily="34" charset="-120"/>
+              </a:rPr>
+              <a:t>{{concerns}}</a:t>
+            </a:r>
+            <a:endParaRPr lang="en-US" sz="1300" dirty="0"/>
+          </a:p>
+        </p:txBody>
+      </p:sp>
+      <p:sp>
+        <p:nvSpPr>
+          <p:cNvPr id="6" name="Text 4"/>
+          <p:cNvSpPr/>
+          <p:nvPr/>
+        </p:nvSpPr>
+        <p:spPr>
+          <a:xfrm>
+            <a:off x="731520" y="6510528"/>
+            <a:ext cx="10698480" cy="256032"/>
+          </a:xfrm>
+          <a:prstGeom prst="rect">
+            <a:avLst/>
+          </a:prstGeom>
+          <a:noFill/>
+          <a:ln/>
+        </p:spPr>
+        <p:txBody>
+          <a:bodyPr wrap="square" rtlCol="0" anchor="ctr"/>
+          <a:lstStyle/>
+          <a:p>
+            <a:pPr indent="0" marL="0">
+              <a:buNone/>
+            </a:pPr>
+            <a:r>
+              <a:rPr lang="en-US" sz="800" dirty="0">
+                <a:solidFill>
+                  <a:srgbClr val="94A3B8"/>
+                </a:solidFill>
+                <a:latin typeface="Calibri" pitchFamily="34" charset="0"/>
+                <a:ea typeface="Calibri" pitchFamily="34" charset="-122"/>
+                <a:cs typeface="Calibri" pitchFamily="34" charset="-120"/>
+              </a:rPr>
+              <a:t>{{agency_name}}  •  Confidential  •  Page 17</a:t>
+            </a:r>
+            <a:endParaRPr lang="en-US" sz="800" dirty="0"/>
+          </a:p>
+        </p:txBody>
+      </p:sp>
+    </p:spTree>
+  </p:cSld>
+  <p:clrMapOvr>
+    <a:masterClrMapping/>
+  </p:clrMapOvr>
+</p:sld>
+</file>
+
+<file path=ppt/slides/slide18.xml><?xml version="1.0" encoding="utf-8"?>
+<p:sld xmlns:a="http://schemas.openxmlformats.org/drawingml/2006/main" xmlns:r="http://schemas.openxmlformats.org/officeDocument/2006/relationships" xmlns:p="http://schemas.openxmlformats.org/presentationml/2006/main">
+  <p:cSld name="Slide 18">
+    <p:bg>
+      <p:bgPr>
+        <a:solidFill>
+          <a:srgbClr val="FFFFFF"/>
+        </a:solidFill>
+      </p:bgPr>
+    </p:bg>
+    <p:spTree>
+      <p:nvGrpSpPr>
+        <p:cNvPr id="1" name=""/>
+        <p:cNvGrpSpPr/>
+        <p:nvPr/>
+      </p:nvGrpSpPr>
+      <p:grpSpPr>
+        <a:xfrm>
+          <a:off x="0" y="0"/>
+          <a:ext cx="0" cy="0"/>
+          <a:chOff x="0" y="0"/>
+          <a:chExt cx="0" cy="0"/>
+        </a:xfrm>
+      </p:grpSpPr>
+      <p:sp>
+        <p:nvSpPr>
+          <p:cNvPr id="2" name="Shape 0"/>
+          <p:cNvSpPr/>
+          <p:nvPr/>
+        </p:nvSpPr>
+        <p:spPr>
+          <a:xfrm>
+            <a:off x="0" y="0"/>
+            <a:ext cx="12161520" cy="1188720"/>
+          </a:xfrm>
+          <a:prstGeom prst="rect">
+            <a:avLst/>
+          </a:prstGeom>
+          <a:solidFill>
+            <a:srgbClr val="4338CA"/>
+          </a:solidFill>
+          <a:ln/>
+        </p:spPr>
+      </p:sp>
+      <p:sp>
+        <p:nvSpPr>
+          <p:cNvPr id="3" name="Shape 1"/>
+          <p:cNvSpPr/>
+          <p:nvPr/>
+        </p:nvSpPr>
+        <p:spPr>
+          <a:xfrm>
+            <a:off x="8961120" y="0"/>
+            <a:ext cx="3200400" cy="1188720"/>
+          </a:xfrm>
+          <a:prstGeom prst="rtTriangle">
+            <a:avLst/>
+          </a:prstGeom>
+          <a:solidFill>
+            <a:srgbClr val="3730A3"/>
+          </a:solidFill>
+          <a:ln/>
+        </p:spPr>
+      </p:sp>
+      <p:sp>
+        <p:nvSpPr>
+          <p:cNvPr id="4" name="Text 2"/>
+          <p:cNvSpPr/>
+          <p:nvPr/>
+        </p:nvSpPr>
+        <p:spPr>
+          <a:xfrm>
+            <a:off x="731520" y="228600"/>
+            <a:ext cx="7589520" cy="731520"/>
+          </a:xfrm>
+          <a:prstGeom prst="rect">
+            <a:avLst/>
+          </a:prstGeom>
+          <a:noFill/>
+          <a:ln/>
+        </p:spPr>
+        <p:txBody>
+          <a:bodyPr wrap="square" lIns="0" tIns="0" rIns="0" bIns="0" rtlCol="0" anchor="ctr"/>
+          <a:lstStyle/>
+          <a:p>
+            <a:pPr indent="0" marL="0">
+              <a:buNone/>
+            </a:pPr>
+            <a:r>
+              <a:rPr lang="en-US" sz="2800" b="1" dirty="0">
+                <a:solidFill>
+                  <a:srgbClr val="FFFFFF"/>
+                </a:solidFill>
+                <a:latin typeface="Calibri" pitchFamily="34" charset="0"/>
+                <a:ea typeface="Calibri" pitchFamily="34" charset="-122"/>
+                <a:cs typeface="Calibri" pitchFamily="34" charset="-120"/>
+              </a:rPr>
+              <a:t>Next Steps &amp; Action Items</a:t>
+            </a:r>
+            <a:endParaRPr lang="en-US" sz="2800" dirty="0"/>
+          </a:p>
+        </p:txBody>
+      </p:sp>
+      <p:sp>
+        <p:nvSpPr>
+          <p:cNvPr id="5" name="Text 3"/>
+          <p:cNvSpPr/>
+          <p:nvPr/>
+        </p:nvSpPr>
+        <p:spPr>
+          <a:xfrm>
+            <a:off x="731520" y="1463040"/>
+            <a:ext cx="10698480" cy="3657600"/>
+          </a:xfrm>
+          <a:prstGeom prst="rect">
+            <a:avLst/>
+          </a:prstGeom>
+          <a:noFill/>
+          <a:ln/>
+        </p:spPr>
+        <p:txBody>
+          <a:bodyPr wrap="square" rtlCol="0" anchor="t"/>
+          <a:lstStyle/>
+          <a:p>
+            <a:pPr indent="0" marL="0">
+              <a:lnSpc>
+                <a:spcPct val="150000"/>
+              </a:lnSpc>
+              <a:buNone/>
+            </a:pPr>
+            <a:r>
+              <a:rPr lang="en-US" sz="1300" dirty="0">
+                <a:solidFill>
+                  <a:srgbClr val="334155"/>
+                </a:solidFill>
+                <a:latin typeface="Calibri" pitchFamily="34" charset="0"/>
+                <a:ea typeface="Calibri" pitchFamily="34" charset="-122"/>
+                <a:cs typeface="Calibri" pitchFamily="34" charset="-120"/>
+              </a:rPr>
+              <a:t>{{next_steps}}</a:t>
+            </a:r>
+            <a:endParaRPr lang="en-US" sz="1300" dirty="0"/>
+          </a:p>
+        </p:txBody>
+      </p:sp>
+      <p:sp>
+        <p:nvSpPr>
+          <p:cNvPr id="6" name="Shape 4"/>
+          <p:cNvSpPr/>
+          <p:nvPr/>
+        </p:nvSpPr>
+        <p:spPr>
+          <a:xfrm>
+            <a:off x="0" y="5760720"/>
+            <a:ext cx="12161520" cy="1097280"/>
+          </a:xfrm>
+          <a:prstGeom prst="rect">
+            <a:avLst/>
+          </a:prstGeom>
+          <a:solidFill>
+            <a:srgbClr val="4338CA"/>
+          </a:solidFill>
+          <a:ln/>
+        </p:spPr>
+      </p:sp>
+      <p:sp>
+        <p:nvSpPr>
+          <p:cNvPr id="7" name="Shape 5"/>
+          <p:cNvSpPr/>
+          <p:nvPr/>
+        </p:nvSpPr>
+        <p:spPr>
+          <a:xfrm>
+            <a:off x="9418320" y="5760720"/>
+            <a:ext cx="2743200" cy="1097280"/>
+          </a:xfrm>
+          <a:prstGeom prst="rtTriangle">
+            <a:avLst/>
+          </a:prstGeom>
+          <a:solidFill>
+            <a:srgbClr val="3730A3"/>
+          </a:solidFill>
+          <a:ln/>
+        </p:spPr>
+      </p:sp>
+      <p:sp>
+        <p:nvSpPr>
+          <p:cNvPr id="8" name="Text 6"/>
+          <p:cNvSpPr/>
+          <p:nvPr/>
+        </p:nvSpPr>
+        <p:spPr>
+          <a:xfrm>
+            <a:off x="731520" y="5806440"/>
+            <a:ext cx="10698480" cy="411480"/>
+          </a:xfrm>
+          <a:prstGeom prst="rect">
+            <a:avLst/>
+          </a:prstGeom>
+          <a:noFill/>
+          <a:ln/>
+        </p:spPr>
+        <p:txBody>
+          <a:bodyPr wrap="square" rtlCol="0" anchor="ctr"/>
+          <a:lstStyle/>
+          <a:p>
+            <a:pPr indent="0" marL="0">
+              <a:buNone/>
+            </a:pPr>
+            <a:r>
+              <a:rPr lang="en-US" sz="1300" b="1" dirty="0">
+                <a:solidFill>
+                  <a:srgbClr val="FFFFFF"/>
+                </a:solidFill>
+                <a:latin typeface="Calibri" pitchFamily="34" charset="0"/>
+                <a:ea typeface="Calibri" pitchFamily="34" charset="-122"/>
+                <a:cs typeface="Calibri" pitchFamily="34" charset="-120"/>
+              </a:rPr>
+              <a:t>Questions? Reply to this email or schedule a call.</a:t>
+            </a:r>
+            <a:endParaRPr lang="en-US" sz="1300" dirty="0"/>
+          </a:p>
+        </p:txBody>
+      </p:sp>
+      <p:sp>
+        <p:nvSpPr>
+          <p:cNvPr id="9" name="Text 7"/>
+          <p:cNvSpPr/>
+          <p:nvPr/>
+        </p:nvSpPr>
+        <p:spPr>
+          <a:xfrm>
+            <a:off x="731520" y="6263640"/>
+            <a:ext cx="10698480" cy="320040"/>
+          </a:xfrm>
+          <a:prstGeom prst="rect">
+            <a:avLst/>
+          </a:prstGeom>
+          <a:noFill/>
+          <a:ln/>
+        </p:spPr>
+        <p:txBody>
+          <a:bodyPr wrap="square" rtlCol="0" anchor="ctr"/>
+          <a:lstStyle/>
+          <a:p>
+            <a:pPr indent="0" marL="0">
+              <a:buNone/>
+            </a:pPr>
+            <a:r>
+              <a:rPr lang="en-US" sz="1100" dirty="0">
+                <a:solidFill>
+                  <a:srgbClr val="C7D2FE"/>
+                </a:solidFill>
+                <a:latin typeface="Calibri" pitchFamily="34" charset="0"/>
+                <a:ea typeface="Calibri" pitchFamily="34" charset="-122"/>
+                <a:cs typeface="Calibri" pitchFamily="34" charset="-120"/>
+              </a:rPr>
+              <a:t>{{agency_name}}  •  {{agency_email}}</a:t>
+            </a:r>
+            <a:endParaRPr lang="en-US" sz="1100" dirty="0"/>
+          </a:p>
+        </p:txBody>
+      </p:sp>
+    </p:spTree>
+  </p:cSld>
+  <p:clrMapOvr>
+    <a:masterClrMapping/>
+  </p:clrMapOvr>
+</p:sld>
+</file>
+
+<file path=ppt/slides/slide19.xml><?xml version="1.0" encoding="utf-8"?>
+<p:sld xmlns:a="http://schemas.openxmlformats.org/drawingml/2006/main" xmlns:r="http://schemas.openxmlformats.org/officeDocument/2006/relationships" xmlns:p="http://schemas.openxmlformats.org/presentationml/2006/main">
+  <p:cSld name="Slide 19">
+    <p:bg>
+      <p:bgPr>
+        <a:solidFill>
+          <a:srgbClr val="FFFFFF"/>
+        </a:solidFill>
+      </p:bgPr>
+    </p:bg>
+    <p:spTree>
+      <p:nvGrpSpPr>
+        <p:cNvPr id="1" name=""/>
+        <p:cNvGrpSpPr/>
+        <p:nvPr/>
+      </p:nvGrpSpPr>
+      <p:grpSpPr>
+        <a:xfrm>
+          <a:off x="0" y="0"/>
+          <a:ext cx="0" cy="0"/>
+          <a:chOff x="0" y="0"/>
+          <a:chExt cx="0" cy="0"/>
+        </a:xfrm>
+      </p:grpSpPr>
+      <p:sp>
+        <p:nvSpPr>
+          <p:cNvPr id="2" name="Shape 0"/>
+          <p:cNvSpPr/>
+          <p:nvPr/>
+        </p:nvSpPr>
+        <p:spPr>
+          <a:xfrm>
+            <a:off x="0" y="0"/>
+            <a:ext cx="12161520" cy="1188720"/>
+          </a:xfrm>
+          <a:prstGeom prst="rect">
+            <a:avLst/>
+          </a:prstGeom>
+          <a:solidFill>
+            <a:srgbClr val="4338CA"/>
+          </a:solidFill>
+          <a:ln/>
+        </p:spPr>
+      </p:sp>
+      <p:sp>
+        <p:nvSpPr>
+          <p:cNvPr id="3" name="Shape 1"/>
+          <p:cNvSpPr/>
+          <p:nvPr/>
+        </p:nvSpPr>
+        <p:spPr>
+          <a:xfrm>
+            <a:off x="8961120" y="0"/>
+            <a:ext cx="3200400" cy="1188720"/>
+          </a:xfrm>
+          <a:prstGeom prst="rtTriangle">
+            <a:avLst/>
+          </a:prstGeom>
+          <a:solidFill>
+            <a:srgbClr val="3730A3"/>
+          </a:solidFill>
+          <a:ln/>
+        </p:spPr>
+      </p:sp>
+      <p:sp>
+        <p:nvSpPr>
+          <p:cNvPr id="4" name="Text 2"/>
+          <p:cNvSpPr/>
+          <p:nvPr/>
+        </p:nvSpPr>
+        <p:spPr>
+          <a:xfrm>
+            <a:off x="731520" y="228600"/>
+            <a:ext cx="7589520" cy="731520"/>
+          </a:xfrm>
+          <a:prstGeom prst="rect">
+            <a:avLst/>
+          </a:prstGeom>
+          <a:noFill/>
+          <a:ln/>
+        </p:spPr>
+        <p:txBody>
+          <a:bodyPr wrap="square" lIns="0" tIns="0" rIns="0" bIns="0" rtlCol="0" anchor="ctr"/>
+          <a:lstStyle/>
+          <a:p>
+            <a:pPr indent="0" marL="0">
+              <a:buNone/>
+            </a:pPr>
+            <a:r>
+              <a:rPr lang="en-US" sz="2800" b="1" dirty="0">
+                <a:solidFill>
+                  <a:srgbClr val="FFFFFF"/>
+                </a:solidFill>
+                <a:latin typeface="Calibri" pitchFamily="34" charset="0"/>
+                <a:ea typeface="Calibri" pitchFamily="34" charset="-122"/>
+                <a:cs typeface="Calibri" pitchFamily="34" charset="-120"/>
+              </a:rPr>
+              <a:t>{{custom_section_title}}</a:t>
+            </a:r>
+            <a:endParaRPr lang="en-US" sz="2800" dirty="0"/>
+          </a:p>
+        </p:txBody>
+      </p:sp>
+      <p:sp>
+        <p:nvSpPr>
+          <p:cNvPr id="5" name="Text 3"/>
+          <p:cNvSpPr/>
+          <p:nvPr/>
+        </p:nvSpPr>
+        <p:spPr>
+          <a:xfrm>
+            <a:off x="731520" y="1463040"/>
+            <a:ext cx="10698480" cy="4572000"/>
+          </a:xfrm>
+          <a:prstGeom prst="rect">
+            <a:avLst/>
+          </a:prstGeom>
+          <a:noFill/>
+          <a:ln/>
+        </p:spPr>
+        <p:txBody>
+          <a:bodyPr wrap="square" rtlCol="0" anchor="t"/>
+          <a:lstStyle/>
+          <a:p>
+            <a:pPr indent="0" marL="0">
+              <a:lnSpc>
+                <a:spcPct val="140000"/>
+              </a:lnSpc>
+              <a:buNone/>
+            </a:pPr>
+            <a:r>
+              <a:rPr lang="en-US" sz="1300" dirty="0">
+                <a:solidFill>
+                  <a:srgbClr val="334155"/>
+                </a:solidFill>
+                <a:latin typeface="Calibri" pitchFamily="34" charset="0"/>
+                <a:ea typeface="Calibri" pitchFamily="34" charset="-122"/>
+                <a:cs typeface="Calibri" pitchFamily="34" charset="-120"/>
+              </a:rPr>
+              <a:t>{{custom_section_text}}</a:t>
+            </a:r>
+            <a:endParaRPr lang="en-US" sz="1300" dirty="0"/>
+          </a:p>
+        </p:txBody>
+      </p:sp>
+      <p:sp>
+        <p:nvSpPr>
+          <p:cNvPr id="6" name="Text 4"/>
+          <p:cNvSpPr/>
+          <p:nvPr/>
+        </p:nvSpPr>
+        <p:spPr>
+          <a:xfrm>
+            <a:off x="731520" y="6510528"/>
+            <a:ext cx="10698480" cy="256032"/>
+          </a:xfrm>
+          <a:prstGeom prst="rect">
+            <a:avLst/>
+          </a:prstGeom>
+          <a:noFill/>
+          <a:ln/>
+        </p:spPr>
+        <p:txBody>
+          <a:bodyPr wrap="square" rtlCol="0" anchor="ctr"/>
+          <a:lstStyle/>
+          <a:p>
+            <a:pPr indent="0" marL="0">
+              <a:buNone/>
+            </a:pPr>
+            <a:r>
+              <a:rPr lang="en-US" sz="800" dirty="0">
+                <a:solidFill>
+                  <a:srgbClr val="94A3B8"/>
+                </a:solidFill>
+                <a:latin typeface="Calibri" pitchFamily="34" charset="0"/>
+                <a:ea typeface="Calibri" pitchFamily="34" charset="-122"/>
+                <a:cs typeface="Calibri" pitchFamily="34" charset="-120"/>
+              </a:rPr>
+              <a:t>{{agency_name}}  •  Confidential  •  Page 19</a:t>
+            </a:r>
+            <a:endParaRPr lang="en-US" sz="800" dirty="0"/>
+          </a:p>
+        </p:txBody>
+      </p:sp>
+    </p:spTree>
+  </p:cSld>
+  <p:clrMapOvr>
+    <a:masterClrMapping/>
+  </p:clrMapOvr>
+</p:sld>
+</file>
+
 <file path=ppt/slides/slide2.xml><?xml version="1.0" encoding="utf-8"?>
 <p:sld xmlns:a="http://schemas.openxmlformats.org/drawingml/2006/main" xmlns:r="http://schemas.openxmlformats.org/officeDocument/2006/relationships" xmlns:p="http://schemas.openxmlformats.org/presentationml/2006/main">
   <p:cSld name="Slide 2">
@@ -3659,7 +7812,7 @@
                 <a:ea typeface="Calibri" pitchFamily="34" charset="-122"/>
                 <a:cs typeface="Calibri" pitchFamily="34" charset="-120"/>
               </a:rPr>
-              <a:t>Paid Advertising — Meta Ads</a:t>
+              <a:t>Website Engagement</a:t>
             </a:r>
             <a:endParaRPr lang="en-US" sz="2800" dirty="0"/>
           </a:p>
@@ -3727,7 +7880,7 @@
                 <a:ea typeface="Calibri" pitchFamily="34" charset="-122"/>
                 <a:cs typeface="Calibri" pitchFamily="34" charset="-120"/>
               </a:rPr>
-              <a:t>{{chart_spend}}</a:t>
+              <a:t>{{chart_device_breakdown}}</a:t>
             </a:r>
             <a:endParaRPr lang="en-US" sz="1000" dirty="0"/>
           </a:p>
@@ -3795,7 +7948,7 @@
                 <a:ea typeface="Calibri" pitchFamily="34" charset="-122"/>
                 <a:cs typeface="Calibri" pitchFamily="34" charset="-120"/>
               </a:rPr>
-              <a:t>{{chart_campaigns}}</a:t>
+              <a:t>{{chart_top_pages}}</a:t>
             </a:r>
             <a:endParaRPr lang="en-US" sz="1000" dirty="0"/>
           </a:p>
@@ -3837,7 +7990,7 @@
                 <a:ea typeface="Calibri" pitchFamily="34" charset="-122"/>
                 <a:cs typeface="Calibri" pitchFamily="34" charset="-120"/>
               </a:rPr>
-              <a:t>{{ads_narrative}}</a:t>
+              <a:t>{{website_narrative}}</a:t>
             </a:r>
             <a:endParaRPr lang="en-US" sz="1200" dirty="0"/>
           </a:p>
@@ -3929,7 +8082,7 @@
             <a:avLst/>
           </a:prstGeom>
           <a:solidFill>
-            <a:srgbClr val="059669"/>
+            <a:srgbClr val="4338CA"/>
           </a:solidFill>
           <a:ln/>
         </p:spPr>
@@ -3949,7 +8102,7 @@
             <a:avLst/>
           </a:prstGeom>
           <a:solidFill>
-            <a:srgbClr val="047857"/>
+            <a:srgbClr val="3730A3"/>
           </a:solidFill>
           <a:ln/>
         </p:spPr>
@@ -3987,7 +8140,7 @@
                 <a:ea typeface="Calibri" pitchFamily="34" charset="-122"/>
                 <a:cs typeface="Calibri" pitchFamily="34" charset="-120"/>
               </a:rPr>
-              <a:t>Key Wins &amp; Highlights</a:t>
+              <a:t>Audience Insights</a:t>
             </a:r>
             <a:endParaRPr lang="en-US" sz="2800" dirty="0"/>
           </a:p>
@@ -3995,14 +8148,150 @@
       </p:sp>
       <p:sp>
         <p:nvSpPr>
-          <p:cNvPr id="5" name="Text 3"/>
+          <p:cNvPr id="5" name="Shape 3"/>
           <p:cNvSpPr/>
           <p:nvPr/>
         </p:nvSpPr>
         <p:spPr>
           <a:xfrm>
             <a:off x="731520" y="1463040"/>
-            <a:ext cx="10698480" cy="4572000"/>
+            <a:ext cx="5120640" cy="2743200"/>
+          </a:xfrm>
+          <a:prstGeom prst="roundRect">
+            <a:avLst>
+              <a:gd name="adj" fmla="val 3333"/>
+            </a:avLst>
+          </a:prstGeom>
+          <a:solidFill>
+            <a:srgbClr val="FFFFFF"/>
+          </a:solidFill>
+          <a:ln/>
+          <a:effectLst>
+            <a:outerShdw sx="100000" sy="100000" kx="0" ky="0" algn="bl" rotWithShape="0" blurRad="76200" dist="25400" dir="8100000">
+              <a:srgbClr val="000000">
+                <a:alpha val="8000"/>
+              </a:srgbClr>
+            </a:outerShdw>
+          </a:effectLst>
+        </p:spPr>
+      </p:sp>
+      <p:sp>
+        <p:nvSpPr>
+          <p:cNvPr id="6" name="Text 4"/>
+          <p:cNvSpPr/>
+          <p:nvPr/>
+        </p:nvSpPr>
+        <p:spPr>
+          <a:xfrm>
+            <a:off x="731520" y="1463040"/>
+            <a:ext cx="5120640" cy="2743200"/>
+          </a:xfrm>
+          <a:prstGeom prst="rect">
+            <a:avLst/>
+          </a:prstGeom>
+          <a:noFill/>
+          <a:ln/>
+        </p:spPr>
+        <p:txBody>
+          <a:bodyPr wrap="square" rtlCol="0" anchor="ctr"/>
+          <a:lstStyle/>
+          <a:p>
+            <a:pPr algn="ctr" indent="0" marL="0">
+              <a:buNone/>
+            </a:pPr>
+            <a:r>
+              <a:rPr lang="en-US" sz="1000" dirty="0">
+                <a:solidFill>
+                  <a:srgbClr val="94A3B8"/>
+                </a:solidFill>
+                <a:latin typeface="Calibri" pitchFamily="34" charset="0"/>
+                <a:ea typeface="Calibri" pitchFamily="34" charset="-122"/>
+                <a:cs typeface="Calibri" pitchFamily="34" charset="-120"/>
+              </a:rPr>
+              <a:t>{{chart_new_vs_returning}}</a:t>
+            </a:r>
+            <a:endParaRPr lang="en-US" sz="1000" dirty="0"/>
+          </a:p>
+        </p:txBody>
+      </p:sp>
+      <p:sp>
+        <p:nvSpPr>
+          <p:cNvPr id="7" name="Shape 5"/>
+          <p:cNvSpPr/>
+          <p:nvPr/>
+        </p:nvSpPr>
+        <p:spPr>
+          <a:xfrm>
+            <a:off x="6217920" y="1463040"/>
+            <a:ext cx="5212080" cy="2743200"/>
+          </a:xfrm>
+          <a:prstGeom prst="roundRect">
+            <a:avLst>
+              <a:gd name="adj" fmla="val 3333"/>
+            </a:avLst>
+          </a:prstGeom>
+          <a:solidFill>
+            <a:srgbClr val="FFFFFF"/>
+          </a:solidFill>
+          <a:ln/>
+          <a:effectLst>
+            <a:outerShdw sx="100000" sy="100000" kx="0" ky="0" algn="bl" rotWithShape="0" blurRad="76200" dist="25400" dir="8100000">
+              <a:srgbClr val="000000">
+                <a:alpha val="8000"/>
+              </a:srgbClr>
+            </a:outerShdw>
+          </a:effectLst>
+        </p:spPr>
+      </p:sp>
+      <p:sp>
+        <p:nvSpPr>
+          <p:cNvPr id="8" name="Text 6"/>
+          <p:cNvSpPr/>
+          <p:nvPr/>
+        </p:nvSpPr>
+        <p:spPr>
+          <a:xfrm>
+            <a:off x="6217920" y="1463040"/>
+            <a:ext cx="5212080" cy="2743200"/>
+          </a:xfrm>
+          <a:prstGeom prst="rect">
+            <a:avLst/>
+          </a:prstGeom>
+          <a:noFill/>
+          <a:ln/>
+        </p:spPr>
+        <p:txBody>
+          <a:bodyPr wrap="square" rtlCol="0" anchor="ctr"/>
+          <a:lstStyle/>
+          <a:p>
+            <a:pPr algn="ctr" indent="0" marL="0">
+              <a:buNone/>
+            </a:pPr>
+            <a:r>
+              <a:rPr lang="en-US" sz="1000" dirty="0">
+                <a:solidFill>
+                  <a:srgbClr val="94A3B8"/>
+                </a:solidFill>
+                <a:latin typeface="Calibri" pitchFamily="34" charset="0"/>
+                <a:ea typeface="Calibri" pitchFamily="34" charset="-122"/>
+                <a:cs typeface="Calibri" pitchFamily="34" charset="-120"/>
+              </a:rPr>
+              <a:t>{{chart_top_countries}}</a:t>
+            </a:r>
+            <a:endParaRPr lang="en-US" sz="1000" dirty="0"/>
+          </a:p>
+        </p:txBody>
+      </p:sp>
+      <p:sp>
+        <p:nvSpPr>
+          <p:cNvPr id="9" name="Text 7"/>
+          <p:cNvSpPr/>
+          <p:nvPr/>
+        </p:nvSpPr>
+        <p:spPr>
+          <a:xfrm>
+            <a:off x="731520" y="4480560"/>
+            <a:ext cx="10698480" cy="1737360"/>
           </a:xfrm>
           <a:prstGeom prst="rect">
             <a:avLst/>
@@ -4016,12 +8305,12 @@
           <a:p>
             <a:pPr indent="0" marL="0">
               <a:lnSpc>
-                <a:spcPct val="150000"/>
+                <a:spcPct val="135000"/>
               </a:lnSpc>
               <a:buNone/>
             </a:pPr>
             <a:r>
-              <a:rPr lang="en-US" sz="1300" dirty="0">
+              <a:rPr lang="en-US" sz="1200" dirty="0">
                 <a:solidFill>
                   <a:srgbClr val="334155"/>
                 </a:solidFill>
@@ -4029,15 +8318,15 @@
                 <a:ea typeface="Calibri" pitchFamily="34" charset="-122"/>
                 <a:cs typeface="Calibri" pitchFamily="34" charset="-120"/>
               </a:rPr>
-              <a:t>{{key_wins}}</a:t>
-            </a:r>
-            <a:endParaRPr lang="en-US" sz="1300" dirty="0"/>
-          </a:p>
-        </p:txBody>
-      </p:sp>
-      <p:sp>
-        <p:nvSpPr>
-          <p:cNvPr id="6" name="Text 4"/>
+              <a:t>{{website_narrative}}</a:t>
+            </a:r>
+            <a:endParaRPr lang="en-US" sz="1200" dirty="0"/>
+          </a:p>
+        </p:txBody>
+      </p:sp>
+      <p:sp>
+        <p:nvSpPr>
+          <p:cNvPr id="10" name="Text 8"/>
           <p:cNvSpPr/>
           <p:nvPr/>
         </p:nvSpPr>
@@ -4121,7 +8410,7 @@
             <a:avLst/>
           </a:prstGeom>
           <a:solidFill>
-            <a:srgbClr val="D97706"/>
+            <a:srgbClr val="4338CA"/>
           </a:solidFill>
           <a:ln/>
         </p:spPr>
@@ -4141,7 +8430,7 @@
             <a:avLst/>
           </a:prstGeom>
           <a:solidFill>
-            <a:srgbClr val="B45309"/>
+            <a:srgbClr val="3730A3"/>
           </a:solidFill>
           <a:ln/>
         </p:spPr>
@@ -4179,7 +8468,7 @@
                 <a:ea typeface="Calibri" pitchFamily="34" charset="-122"/>
                 <a:cs typeface="Calibri" pitchFamily="34" charset="-120"/>
               </a:rPr>
-              <a:t>Concerns &amp; Recommendations</a:t>
+              <a:t>Bounce Rate Analysis</a:t>
             </a:r>
             <a:endParaRPr lang="en-US" sz="2800" dirty="0"/>
           </a:p>
@@ -4187,14 +8476,82 @@
       </p:sp>
       <p:sp>
         <p:nvSpPr>
-          <p:cNvPr id="5" name="Text 3"/>
+          <p:cNvPr id="5" name="Shape 3"/>
           <p:cNvSpPr/>
           <p:nvPr/>
         </p:nvSpPr>
         <p:spPr>
           <a:xfrm>
             <a:off x="731520" y="1463040"/>
-            <a:ext cx="10698480" cy="4572000"/>
+            <a:ext cx="10698480" cy="3657600"/>
+          </a:xfrm>
+          <a:prstGeom prst="roundRect">
+            <a:avLst>
+              <a:gd name="adj" fmla="val 2500"/>
+            </a:avLst>
+          </a:prstGeom>
+          <a:solidFill>
+            <a:srgbClr val="FFFFFF"/>
+          </a:solidFill>
+          <a:ln/>
+          <a:effectLst>
+            <a:outerShdw sx="100000" sy="100000" kx="0" ky="0" algn="bl" rotWithShape="0" blurRad="76200" dist="25400" dir="8100000">
+              <a:srgbClr val="000000">
+                <a:alpha val="8000"/>
+              </a:srgbClr>
+            </a:outerShdw>
+          </a:effectLst>
+        </p:spPr>
+      </p:sp>
+      <p:sp>
+        <p:nvSpPr>
+          <p:cNvPr id="6" name="Text 4"/>
+          <p:cNvSpPr/>
+          <p:nvPr/>
+        </p:nvSpPr>
+        <p:spPr>
+          <a:xfrm>
+            <a:off x="731520" y="1463040"/>
+            <a:ext cx="10698480" cy="3657600"/>
+          </a:xfrm>
+          <a:prstGeom prst="rect">
+            <a:avLst/>
+          </a:prstGeom>
+          <a:noFill/>
+          <a:ln/>
+        </p:spPr>
+        <p:txBody>
+          <a:bodyPr wrap="square" rtlCol="0" anchor="ctr"/>
+          <a:lstStyle/>
+          <a:p>
+            <a:pPr algn="ctr" indent="0" marL="0">
+              <a:buNone/>
+            </a:pPr>
+            <a:r>
+              <a:rPr lang="en-US" sz="1000" dirty="0">
+                <a:solidFill>
+                  <a:srgbClr val="94A3B8"/>
+                </a:solidFill>
+                <a:latin typeface="Calibri" pitchFamily="34" charset="0"/>
+                <a:ea typeface="Calibri" pitchFamily="34" charset="-122"/>
+                <a:cs typeface="Calibri" pitchFamily="34" charset="-120"/>
+              </a:rPr>
+              <a:t>{{chart_bounce_rate}}</a:t>
+            </a:r>
+            <a:endParaRPr lang="en-US" sz="1000" dirty="0"/>
+          </a:p>
+        </p:txBody>
+      </p:sp>
+      <p:sp>
+        <p:nvSpPr>
+          <p:cNvPr id="7" name="Text 5"/>
+          <p:cNvSpPr/>
+          <p:nvPr/>
+        </p:nvSpPr>
+        <p:spPr>
+          <a:xfrm>
+            <a:off x="731520" y="5394960"/>
+            <a:ext cx="10698480" cy="1097280"/>
           </a:xfrm>
           <a:prstGeom prst="rect">
             <a:avLst/>
@@ -4208,12 +8565,12 @@
           <a:p>
             <a:pPr indent="0" marL="0">
               <a:lnSpc>
-                <a:spcPct val="150000"/>
+                <a:spcPct val="135000"/>
               </a:lnSpc>
               <a:buNone/>
             </a:pPr>
             <a:r>
-              <a:rPr lang="en-US" sz="1300" dirty="0">
+              <a:rPr lang="en-US" sz="1200" dirty="0">
                 <a:solidFill>
                   <a:srgbClr val="334155"/>
                 </a:solidFill>
@@ -4221,15 +8578,15 @@
                 <a:ea typeface="Calibri" pitchFamily="34" charset="-122"/>
                 <a:cs typeface="Calibri" pitchFamily="34" charset="-120"/>
               </a:rPr>
-              <a:t>{{concerns}}</a:t>
-            </a:r>
-            <a:endParaRPr lang="en-US" sz="1300" dirty="0"/>
-          </a:p>
-        </p:txBody>
-      </p:sp>
-      <p:sp>
-        <p:nvSpPr>
-          <p:cNvPr id="6" name="Text 4"/>
+              <a:t>{{website_narrative}}</a:t>
+            </a:r>
+            <a:endParaRPr lang="en-US" sz="1200" dirty="0"/>
+          </a:p>
+        </p:txBody>
+      </p:sp>
+      <p:sp>
+        <p:nvSpPr>
+          <p:cNvPr id="8" name="Text 6"/>
           <p:cNvSpPr/>
           <p:nvPr/>
         </p:nvSpPr>
@@ -4371,7 +8728,7 @@
                 <a:ea typeface="Calibri" pitchFamily="34" charset="-122"/>
                 <a:cs typeface="Calibri" pitchFamily="34" charset="-120"/>
               </a:rPr>
-              <a:t>Next Steps &amp; Action Items</a:t>
+              <a:t>Paid Advertising — Meta Ads</a:t>
             </a:r>
             <a:endParaRPr lang="en-US" sz="2800" dirty="0"/>
           </a:p>
@@ -4379,14 +8736,150 @@
       </p:sp>
       <p:sp>
         <p:nvSpPr>
-          <p:cNvPr id="5" name="Text 3"/>
+          <p:cNvPr id="5" name="Shape 3"/>
           <p:cNvSpPr/>
           <p:nvPr/>
         </p:nvSpPr>
         <p:spPr>
           <a:xfrm>
             <a:off x="731520" y="1463040"/>
-            <a:ext cx="10698480" cy="3657600"/>
+            <a:ext cx="5120640" cy="2743200"/>
+          </a:xfrm>
+          <a:prstGeom prst="roundRect">
+            <a:avLst>
+              <a:gd name="adj" fmla="val 3333"/>
+            </a:avLst>
+          </a:prstGeom>
+          <a:solidFill>
+            <a:srgbClr val="FFFFFF"/>
+          </a:solidFill>
+          <a:ln/>
+          <a:effectLst>
+            <a:outerShdw sx="100000" sy="100000" kx="0" ky="0" algn="bl" rotWithShape="0" blurRad="76200" dist="25400" dir="8100000">
+              <a:srgbClr val="000000">
+                <a:alpha val="8000"/>
+              </a:srgbClr>
+            </a:outerShdw>
+          </a:effectLst>
+        </p:spPr>
+      </p:sp>
+      <p:sp>
+        <p:nvSpPr>
+          <p:cNvPr id="6" name="Text 4"/>
+          <p:cNvSpPr/>
+          <p:nvPr/>
+        </p:nvSpPr>
+        <p:spPr>
+          <a:xfrm>
+            <a:off x="731520" y="1463040"/>
+            <a:ext cx="5120640" cy="2743200"/>
+          </a:xfrm>
+          <a:prstGeom prst="rect">
+            <a:avLst/>
+          </a:prstGeom>
+          <a:noFill/>
+          <a:ln/>
+        </p:spPr>
+        <p:txBody>
+          <a:bodyPr wrap="square" rtlCol="0" anchor="ctr"/>
+          <a:lstStyle/>
+          <a:p>
+            <a:pPr algn="ctr" indent="0" marL="0">
+              <a:buNone/>
+            </a:pPr>
+            <a:r>
+              <a:rPr lang="en-US" sz="1000" dirty="0">
+                <a:solidFill>
+                  <a:srgbClr val="94A3B8"/>
+                </a:solidFill>
+                <a:latin typeface="Calibri" pitchFamily="34" charset="0"/>
+                <a:ea typeface="Calibri" pitchFamily="34" charset="-122"/>
+                <a:cs typeface="Calibri" pitchFamily="34" charset="-120"/>
+              </a:rPr>
+              <a:t>{{chart_spend}}</a:t>
+            </a:r>
+            <a:endParaRPr lang="en-US" sz="1000" dirty="0"/>
+          </a:p>
+        </p:txBody>
+      </p:sp>
+      <p:sp>
+        <p:nvSpPr>
+          <p:cNvPr id="7" name="Shape 5"/>
+          <p:cNvSpPr/>
+          <p:nvPr/>
+        </p:nvSpPr>
+        <p:spPr>
+          <a:xfrm>
+            <a:off x="6217920" y="1463040"/>
+            <a:ext cx="5212080" cy="2743200"/>
+          </a:xfrm>
+          <a:prstGeom prst="roundRect">
+            <a:avLst>
+              <a:gd name="adj" fmla="val 3333"/>
+            </a:avLst>
+          </a:prstGeom>
+          <a:solidFill>
+            <a:srgbClr val="FFFFFF"/>
+          </a:solidFill>
+          <a:ln/>
+          <a:effectLst>
+            <a:outerShdw sx="100000" sy="100000" kx="0" ky="0" algn="bl" rotWithShape="0" blurRad="76200" dist="25400" dir="8100000">
+              <a:srgbClr val="000000">
+                <a:alpha val="8000"/>
+              </a:srgbClr>
+            </a:outerShdw>
+          </a:effectLst>
+        </p:spPr>
+      </p:sp>
+      <p:sp>
+        <p:nvSpPr>
+          <p:cNvPr id="8" name="Text 6"/>
+          <p:cNvSpPr/>
+          <p:nvPr/>
+        </p:nvSpPr>
+        <p:spPr>
+          <a:xfrm>
+            <a:off x="6217920" y="1463040"/>
+            <a:ext cx="5212080" cy="2743200"/>
+          </a:xfrm>
+          <a:prstGeom prst="rect">
+            <a:avLst/>
+          </a:prstGeom>
+          <a:noFill/>
+          <a:ln/>
+        </p:spPr>
+        <p:txBody>
+          <a:bodyPr wrap="square" rtlCol="0" anchor="ctr"/>
+          <a:lstStyle/>
+          <a:p>
+            <a:pPr algn="ctr" indent="0" marL="0">
+              <a:buNone/>
+            </a:pPr>
+            <a:r>
+              <a:rPr lang="en-US" sz="1000" dirty="0">
+                <a:solidFill>
+                  <a:srgbClr val="94A3B8"/>
+                </a:solidFill>
+                <a:latin typeface="Calibri" pitchFamily="34" charset="0"/>
+                <a:ea typeface="Calibri" pitchFamily="34" charset="-122"/>
+                <a:cs typeface="Calibri" pitchFamily="34" charset="-120"/>
+              </a:rPr>
+              <a:t>{{chart_campaigns}}</a:t>
+            </a:r>
+            <a:endParaRPr lang="en-US" sz="1000" dirty="0"/>
+          </a:p>
+        </p:txBody>
+      </p:sp>
+      <p:sp>
+        <p:nvSpPr>
+          <p:cNvPr id="9" name="Text 7"/>
+          <p:cNvSpPr/>
+          <p:nvPr/>
+        </p:nvSpPr>
+        <p:spPr>
+          <a:xfrm>
+            <a:off x="731520" y="4480560"/>
+            <a:ext cx="10698480" cy="1737360"/>
           </a:xfrm>
           <a:prstGeom prst="rect">
             <a:avLst/>
@@ -4400,12 +8893,12 @@
           <a:p>
             <a:pPr indent="0" marL="0">
               <a:lnSpc>
-                <a:spcPct val="150000"/>
+                <a:spcPct val="135000"/>
               </a:lnSpc>
               <a:buNone/>
             </a:pPr>
             <a:r>
-              <a:rPr lang="en-US" sz="1300" dirty="0">
+              <a:rPr lang="en-US" sz="1200" dirty="0">
                 <a:solidFill>
                   <a:srgbClr val="334155"/>
                 </a:solidFill>
@@ -4413,62 +8906,22 @@
                 <a:ea typeface="Calibri" pitchFamily="34" charset="-122"/>
                 <a:cs typeface="Calibri" pitchFamily="34" charset="-120"/>
               </a:rPr>
-              <a:t>{{next_steps}}</a:t>
-            </a:r>
-            <a:endParaRPr lang="en-US" sz="1300" dirty="0"/>
-          </a:p>
-        </p:txBody>
-      </p:sp>
-      <p:sp>
-        <p:nvSpPr>
-          <p:cNvPr id="6" name="Shape 4"/>
-          <p:cNvSpPr/>
-          <p:nvPr/>
-        </p:nvSpPr>
-        <p:spPr>
-          <a:xfrm>
-            <a:off x="0" y="5760720"/>
-            <a:ext cx="12161520" cy="1097280"/>
-          </a:xfrm>
-          <a:prstGeom prst="rect">
-            <a:avLst/>
-          </a:prstGeom>
-          <a:solidFill>
-            <a:srgbClr val="4338CA"/>
-          </a:solidFill>
-          <a:ln/>
-        </p:spPr>
-      </p:sp>
-      <p:sp>
-        <p:nvSpPr>
-          <p:cNvPr id="7" name="Shape 5"/>
-          <p:cNvSpPr/>
-          <p:nvPr/>
-        </p:nvSpPr>
-        <p:spPr>
-          <a:xfrm>
-            <a:off x="9418320" y="5760720"/>
-            <a:ext cx="2743200" cy="1097280"/>
-          </a:xfrm>
-          <a:prstGeom prst="rtTriangle">
-            <a:avLst/>
-          </a:prstGeom>
-          <a:solidFill>
-            <a:srgbClr val="3730A3"/>
-          </a:solidFill>
-          <a:ln/>
-        </p:spPr>
-      </p:sp>
-      <p:sp>
-        <p:nvSpPr>
-          <p:cNvPr id="8" name="Text 6"/>
-          <p:cNvSpPr/>
-          <p:nvPr/>
-        </p:nvSpPr>
-        <p:spPr>
-          <a:xfrm>
-            <a:off x="731520" y="5806440"/>
-            <a:ext cx="10698480" cy="411480"/>
+              <a:t>{{ads_narrative}}</a:t>
+            </a:r>
+            <a:endParaRPr lang="en-US" sz="1200" dirty="0"/>
+          </a:p>
+        </p:txBody>
+      </p:sp>
+      <p:sp>
+        <p:nvSpPr>
+          <p:cNvPr id="10" name="Text 8"/>
+          <p:cNvSpPr/>
+          <p:nvPr/>
+        </p:nvSpPr>
+        <p:spPr>
+          <a:xfrm>
+            <a:off x="731520" y="6510528"/>
+            <a:ext cx="10698480" cy="256032"/>
           </a:xfrm>
           <a:prstGeom prst="rect">
             <a:avLst/>
@@ -4484,56 +8937,17 @@
               <a:buNone/>
             </a:pPr>
             <a:r>
-              <a:rPr lang="en-US" sz="1300" b="1" dirty="0">
-                <a:solidFill>
-                  <a:srgbClr val="FFFFFF"/>
-                </a:solidFill>
-                <a:latin typeface="Calibri" pitchFamily="34" charset="0"/>
-                <a:ea typeface="Calibri" pitchFamily="34" charset="-122"/>
-                <a:cs typeface="Calibri" pitchFamily="34" charset="-120"/>
-              </a:rPr>
-              <a:t>Questions? Reply to this email or schedule a call.</a:t>
-            </a:r>
-            <a:endParaRPr lang="en-US" sz="1300" dirty="0"/>
-          </a:p>
-        </p:txBody>
-      </p:sp>
-      <p:sp>
-        <p:nvSpPr>
-          <p:cNvPr id="9" name="Text 7"/>
-          <p:cNvSpPr/>
-          <p:nvPr/>
-        </p:nvSpPr>
-        <p:spPr>
-          <a:xfrm>
-            <a:off x="731520" y="6263640"/>
-            <a:ext cx="10698480" cy="320040"/>
-          </a:xfrm>
-          <a:prstGeom prst="rect">
-            <a:avLst/>
-          </a:prstGeom>
-          <a:noFill/>
-          <a:ln/>
-        </p:spPr>
-        <p:txBody>
-          <a:bodyPr wrap="square" rtlCol="0" anchor="ctr"/>
-          <a:lstStyle/>
-          <a:p>
-            <a:pPr indent="0" marL="0">
-              <a:buNone/>
-            </a:pPr>
-            <a:r>
-              <a:rPr lang="en-US" sz="1100" dirty="0">
-                <a:solidFill>
-                  <a:srgbClr val="C7D2FE"/>
-                </a:solidFill>
-                <a:latin typeface="Calibri" pitchFamily="34" charset="0"/>
-                <a:ea typeface="Calibri" pitchFamily="34" charset="-122"/>
-                <a:cs typeface="Calibri" pitchFamily="34" charset="-120"/>
-              </a:rPr>
-              <a:t>{{agency_name}}  •  {{agency_email}}</a:t>
-            </a:r>
-            <a:endParaRPr lang="en-US" sz="1100" dirty="0"/>
+              <a:rPr lang="en-US" sz="800" dirty="0">
+                <a:solidFill>
+                  <a:srgbClr val="94A3B8"/>
+                </a:solidFill>
+                <a:latin typeface="Calibri" pitchFamily="34" charset="0"/>
+                <a:ea typeface="Calibri" pitchFamily="34" charset="-122"/>
+                <a:cs typeface="Calibri" pitchFamily="34" charset="-120"/>
+              </a:rPr>
+              <a:t>{{agency_name}}  •  Confidential  •  Page 8</a:t>
+            </a:r>
+            <a:endParaRPr lang="en-US" sz="800" dirty="0"/>
           </a:p>
         </p:txBody>
       </p:sp>
@@ -4642,7 +9056,7 @@
                 <a:ea typeface="Calibri" pitchFamily="34" charset="-122"/>
                 <a:cs typeface="Calibri" pitchFamily="34" charset="-120"/>
               </a:rPr>
-              <a:t>{{custom_section_title}}</a:t>
+              <a:t>Meta Ads — Audience</a:t>
             </a:r>
             <a:endParaRPr lang="en-US" sz="2800" dirty="0"/>
           </a:p>
@@ -4650,14 +9064,150 @@
       </p:sp>
       <p:sp>
         <p:nvSpPr>
-          <p:cNvPr id="5" name="Text 3"/>
+          <p:cNvPr id="5" name="Shape 3"/>
           <p:cNvSpPr/>
           <p:nvPr/>
         </p:nvSpPr>
         <p:spPr>
           <a:xfrm>
             <a:off x="731520" y="1463040"/>
-            <a:ext cx="10698480" cy="4572000"/>
+            <a:ext cx="5120640" cy="2743200"/>
+          </a:xfrm>
+          <a:prstGeom prst="roundRect">
+            <a:avLst>
+              <a:gd name="adj" fmla="val 3333"/>
+            </a:avLst>
+          </a:prstGeom>
+          <a:solidFill>
+            <a:srgbClr val="FFFFFF"/>
+          </a:solidFill>
+          <a:ln/>
+          <a:effectLst>
+            <a:outerShdw sx="100000" sy="100000" kx="0" ky="0" algn="bl" rotWithShape="0" blurRad="76200" dist="25400" dir="8100000">
+              <a:srgbClr val="000000">
+                <a:alpha val="8000"/>
+              </a:srgbClr>
+            </a:outerShdw>
+          </a:effectLst>
+        </p:spPr>
+      </p:sp>
+      <p:sp>
+        <p:nvSpPr>
+          <p:cNvPr id="6" name="Text 4"/>
+          <p:cNvSpPr/>
+          <p:nvPr/>
+        </p:nvSpPr>
+        <p:spPr>
+          <a:xfrm>
+            <a:off x="731520" y="1463040"/>
+            <a:ext cx="5120640" cy="2743200"/>
+          </a:xfrm>
+          <a:prstGeom prst="rect">
+            <a:avLst/>
+          </a:prstGeom>
+          <a:noFill/>
+          <a:ln/>
+        </p:spPr>
+        <p:txBody>
+          <a:bodyPr wrap="square" rtlCol="0" anchor="ctr"/>
+          <a:lstStyle/>
+          <a:p>
+            <a:pPr algn="ctr" indent="0" marL="0">
+              <a:buNone/>
+            </a:pPr>
+            <a:r>
+              <a:rPr lang="en-US" sz="1000" dirty="0">
+                <a:solidFill>
+                  <a:srgbClr val="94A3B8"/>
+                </a:solidFill>
+                <a:latin typeface="Calibri" pitchFamily="34" charset="0"/>
+                <a:ea typeface="Calibri" pitchFamily="34" charset="-122"/>
+                <a:cs typeface="Calibri" pitchFamily="34" charset="-120"/>
+              </a:rPr>
+              <a:t>{{chart_demographics}}</a:t>
+            </a:r>
+            <a:endParaRPr lang="en-US" sz="1000" dirty="0"/>
+          </a:p>
+        </p:txBody>
+      </p:sp>
+      <p:sp>
+        <p:nvSpPr>
+          <p:cNvPr id="7" name="Shape 5"/>
+          <p:cNvSpPr/>
+          <p:nvPr/>
+        </p:nvSpPr>
+        <p:spPr>
+          <a:xfrm>
+            <a:off x="6217920" y="1463040"/>
+            <a:ext cx="5212080" cy="2743200"/>
+          </a:xfrm>
+          <a:prstGeom prst="roundRect">
+            <a:avLst>
+              <a:gd name="adj" fmla="val 3333"/>
+            </a:avLst>
+          </a:prstGeom>
+          <a:solidFill>
+            <a:srgbClr val="FFFFFF"/>
+          </a:solidFill>
+          <a:ln/>
+          <a:effectLst>
+            <a:outerShdw sx="100000" sy="100000" kx="0" ky="0" algn="bl" rotWithShape="0" blurRad="76200" dist="25400" dir="8100000">
+              <a:srgbClr val="000000">
+                <a:alpha val="8000"/>
+              </a:srgbClr>
+            </a:outerShdw>
+          </a:effectLst>
+        </p:spPr>
+      </p:sp>
+      <p:sp>
+        <p:nvSpPr>
+          <p:cNvPr id="8" name="Text 6"/>
+          <p:cNvSpPr/>
+          <p:nvPr/>
+        </p:nvSpPr>
+        <p:spPr>
+          <a:xfrm>
+            <a:off x="6217920" y="1463040"/>
+            <a:ext cx="5212080" cy="2743200"/>
+          </a:xfrm>
+          <a:prstGeom prst="rect">
+            <a:avLst/>
+          </a:prstGeom>
+          <a:noFill/>
+          <a:ln/>
+        </p:spPr>
+        <p:txBody>
+          <a:bodyPr wrap="square" rtlCol="0" anchor="ctr"/>
+          <a:lstStyle/>
+          <a:p>
+            <a:pPr algn="ctr" indent="0" marL="0">
+              <a:buNone/>
+            </a:pPr>
+            <a:r>
+              <a:rPr lang="en-US" sz="1000" dirty="0">
+                <a:solidFill>
+                  <a:srgbClr val="94A3B8"/>
+                </a:solidFill>
+                <a:latin typeface="Calibri" pitchFamily="34" charset="0"/>
+                <a:ea typeface="Calibri" pitchFamily="34" charset="-122"/>
+                <a:cs typeface="Calibri" pitchFamily="34" charset="-120"/>
+              </a:rPr>
+              <a:t>{{chart_placements}}</a:t>
+            </a:r>
+            <a:endParaRPr lang="en-US" sz="1000" dirty="0"/>
+          </a:p>
+        </p:txBody>
+      </p:sp>
+      <p:sp>
+        <p:nvSpPr>
+          <p:cNvPr id="9" name="Text 7"/>
+          <p:cNvSpPr/>
+          <p:nvPr/>
+        </p:nvSpPr>
+        <p:spPr>
+          <a:xfrm>
+            <a:off x="731520" y="4480560"/>
+            <a:ext cx="10698480" cy="1737360"/>
           </a:xfrm>
           <a:prstGeom prst="rect">
             <a:avLst/>
@@ -4671,12 +9221,12 @@
           <a:p>
             <a:pPr indent="0" marL="0">
               <a:lnSpc>
-                <a:spcPct val="140000"/>
+                <a:spcPct val="135000"/>
               </a:lnSpc>
               <a:buNone/>
             </a:pPr>
             <a:r>
-              <a:rPr lang="en-US" sz="1300" dirty="0">
+              <a:rPr lang="en-US" sz="1200" dirty="0">
                 <a:solidFill>
                   <a:srgbClr val="334155"/>
                 </a:solidFill>
@@ -4684,15 +9234,15 @@
                 <a:ea typeface="Calibri" pitchFamily="34" charset="-122"/>
                 <a:cs typeface="Calibri" pitchFamily="34" charset="-120"/>
               </a:rPr>
-              <a:t>{{custom_section_text}}</a:t>
-            </a:r>
-            <a:endParaRPr lang="en-US" sz="1300" dirty="0"/>
-          </a:p>
-        </p:txBody>
-      </p:sp>
-      <p:sp>
-        <p:nvSpPr>
-          <p:cNvPr id="6" name="Text 4"/>
+              <a:t>{{ads_narrative}}</a:t>
+            </a:r>
+            <a:endParaRPr lang="en-US" sz="1200" dirty="0"/>
+          </a:p>
+        </p:txBody>
+      </p:sp>
+      <p:sp>
+        <p:nvSpPr>
+          <p:cNvPr id="10" name="Text 8"/>
           <p:cNvSpPr/>
           <p:nvPr/>
         </p:nvSpPr>

--- a/backend/templates/pptx/bold_geometric.pptx
+++ b/backend/templates/pptx/bold_geometric.pptx
@@ -2496,6 +2496,10 @@
           </a:solidFill>
           <a:ln/>
         </p:spPr>
+        <p:txBody>
+          <a:bodyPr/>
+          <a:p/>
+        </p:txBody>
       </p:sp>
       <p:sp>
         <p:nvSpPr>
@@ -2555,6 +2559,10 @@
           </a:solidFill>
           <a:ln/>
         </p:spPr>
+        <p:txBody>
+          <a:bodyPr/>
+          <a:p/>
+        </p:txBody>
       </p:sp>
       <p:sp>
         <p:nvSpPr>
@@ -2841,6 +2849,10 @@
           </a:solidFill>
           <a:ln/>
         </p:spPr>
+        <p:txBody>
+          <a:bodyPr/>
+          <a:p/>
+        </p:txBody>
       </p:sp>
       <p:sp>
         <p:nvSpPr>
@@ -2861,6 +2873,10 @@
           </a:solidFill>
           <a:ln/>
         </p:spPr>
+        <p:txBody>
+          <a:bodyPr/>
+          <a:p/>
+        </p:txBody>
       </p:sp>
       <p:sp>
         <p:nvSpPr>
@@ -2929,6 +2945,10 @@
             </a:outerShdw>
           </a:effectLst>
         </p:spPr>
+        <p:txBody>
+          <a:bodyPr/>
+          <a:p/>
+        </p:txBody>
       </p:sp>
       <p:sp>
         <p:nvSpPr>
@@ -3101,6 +3121,10 @@
           </a:solidFill>
           <a:ln/>
         </p:spPr>
+        <p:txBody>
+          <a:bodyPr/>
+          <a:p/>
+        </p:txBody>
       </p:sp>
       <p:sp>
         <p:nvSpPr>
@@ -3121,6 +3145,10 @@
           </a:solidFill>
           <a:ln/>
         </p:spPr>
+        <p:txBody>
+          <a:bodyPr/>
+          <a:p/>
+        </p:txBody>
       </p:sp>
       <p:sp>
         <p:nvSpPr>
@@ -3189,6 +3217,10 @@
             </a:outerShdw>
           </a:effectLst>
         </p:spPr>
+        <p:txBody>
+          <a:bodyPr/>
+          <a:p/>
+        </p:txBody>
       </p:sp>
       <p:sp>
         <p:nvSpPr>
@@ -3257,6 +3289,10 @@
             </a:outerShdw>
           </a:effectLst>
         </p:spPr>
+        <p:txBody>
+          <a:bodyPr/>
+          <a:p/>
+        </p:txBody>
       </p:sp>
       <p:sp>
         <p:nvSpPr>
@@ -3429,6 +3465,10 @@
           </a:solidFill>
           <a:ln/>
         </p:spPr>
+        <p:txBody>
+          <a:bodyPr/>
+          <a:p/>
+        </p:txBody>
       </p:sp>
       <p:sp>
         <p:nvSpPr>
@@ -3449,6 +3489,10 @@
           </a:solidFill>
           <a:ln/>
         </p:spPr>
+        <p:txBody>
+          <a:bodyPr/>
+          <a:p/>
+        </p:txBody>
       </p:sp>
       <p:sp>
         <p:nvSpPr>
@@ -3517,6 +3561,10 @@
             </a:outerShdw>
           </a:effectLst>
         </p:spPr>
+        <p:txBody>
+          <a:bodyPr/>
+          <a:p/>
+        </p:txBody>
       </p:sp>
       <p:sp>
         <p:nvSpPr>
@@ -3689,6 +3737,10 @@
           </a:solidFill>
           <a:ln/>
         </p:spPr>
+        <p:txBody>
+          <a:bodyPr/>
+          <a:p/>
+        </p:txBody>
       </p:sp>
       <p:sp>
         <p:nvSpPr>
@@ -3709,6 +3761,10 @@
           </a:solidFill>
           <a:ln/>
         </p:spPr>
+        <p:txBody>
+          <a:bodyPr/>
+          <a:p/>
+        </p:txBody>
       </p:sp>
       <p:sp>
         <p:nvSpPr>
@@ -3777,6 +3833,10 @@
             </a:outerShdw>
           </a:effectLst>
         </p:spPr>
+        <p:txBody>
+          <a:bodyPr/>
+          <a:p/>
+        </p:txBody>
       </p:sp>
       <p:sp>
         <p:nvSpPr>
@@ -3845,6 +3905,10 @@
             </a:outerShdw>
           </a:effectLst>
         </p:spPr>
+        <p:txBody>
+          <a:bodyPr/>
+          <a:p/>
+        </p:txBody>
       </p:sp>
       <p:sp>
         <p:nvSpPr>
@@ -4017,6 +4081,10 @@
           </a:solidFill>
           <a:ln/>
         </p:spPr>
+        <p:txBody>
+          <a:bodyPr/>
+          <a:p/>
+        </p:txBody>
       </p:sp>
       <p:sp>
         <p:nvSpPr>
@@ -4037,6 +4105,10 @@
           </a:solidFill>
           <a:ln/>
         </p:spPr>
+        <p:txBody>
+          <a:bodyPr/>
+          <a:p/>
+        </p:txBody>
       </p:sp>
       <p:sp>
         <p:nvSpPr>
@@ -4105,6 +4177,10 @@
             </a:outerShdw>
           </a:effectLst>
         </p:spPr>
+        <p:txBody>
+          <a:bodyPr/>
+          <a:p/>
+        </p:txBody>
       </p:sp>
       <p:sp>
         <p:nvSpPr>
@@ -4125,6 +4201,10 @@
           </a:solidFill>
           <a:ln/>
         </p:spPr>
+        <p:txBody>
+          <a:bodyPr/>
+          <a:p/>
+        </p:txBody>
       </p:sp>
       <p:sp>
         <p:nvSpPr>
@@ -4232,6 +4312,10 @@
             </a:outerShdw>
           </a:effectLst>
         </p:spPr>
+        <p:txBody>
+          <a:bodyPr/>
+          <a:p/>
+        </p:txBody>
       </p:sp>
       <p:sp>
         <p:nvSpPr>
@@ -4252,6 +4336,10 @@
           </a:solidFill>
           <a:ln/>
         </p:spPr>
+        <p:txBody>
+          <a:bodyPr/>
+          <a:p/>
+        </p:txBody>
       </p:sp>
       <p:sp>
         <p:nvSpPr>
@@ -4359,6 +4447,10 @@
             </a:outerShdw>
           </a:effectLst>
         </p:spPr>
+        <p:txBody>
+          <a:bodyPr/>
+          <a:p/>
+        </p:txBody>
       </p:sp>
       <p:sp>
         <p:nvSpPr>
@@ -4379,6 +4471,10 @@
           </a:solidFill>
           <a:ln/>
         </p:spPr>
+        <p:txBody>
+          <a:bodyPr/>
+          <a:p/>
+        </p:txBody>
       </p:sp>
       <p:sp>
         <p:nvSpPr>
@@ -4486,6 +4582,10 @@
             </a:outerShdw>
           </a:effectLst>
         </p:spPr>
+        <p:txBody>
+          <a:bodyPr/>
+          <a:p/>
+        </p:txBody>
       </p:sp>
       <p:sp>
         <p:nvSpPr>
@@ -4506,6 +4606,10 @@
           </a:solidFill>
           <a:ln/>
         </p:spPr>
+        <p:txBody>
+          <a:bodyPr/>
+          <a:p/>
+        </p:txBody>
       </p:sp>
       <p:sp>
         <p:nvSpPr>
@@ -4613,6 +4717,10 @@
             </a:outerShdw>
           </a:effectLst>
         </p:spPr>
+        <p:txBody>
+          <a:bodyPr/>
+          <a:p/>
+        </p:txBody>
       </p:sp>
       <p:sp>
         <p:nvSpPr>
@@ -4633,6 +4741,10 @@
           </a:solidFill>
           <a:ln/>
         </p:spPr>
+        <p:txBody>
+          <a:bodyPr/>
+          <a:p/>
+        </p:txBody>
       </p:sp>
       <p:sp>
         <p:nvSpPr>
@@ -4740,6 +4852,10 @@
             </a:outerShdw>
           </a:effectLst>
         </p:spPr>
+        <p:txBody>
+          <a:bodyPr/>
+          <a:p/>
+        </p:txBody>
       </p:sp>
       <p:sp>
         <p:nvSpPr>
@@ -4760,6 +4876,10 @@
           </a:solidFill>
           <a:ln/>
         </p:spPr>
+        <p:txBody>
+          <a:bodyPr/>
+          <a:p/>
+        </p:txBody>
       </p:sp>
       <p:sp>
         <p:nvSpPr>
@@ -4847,8 +4967,8 @@
         </p:nvSpPr>
         <p:spPr>
           <a:xfrm>
-            <a:off x="731520" y="3749040"/>
-            <a:ext cx="10698480" cy="2286000"/>
+            <a:off x="731520" y="3913632"/>
+            <a:ext cx="10698480" cy="2459736"/>
           </a:xfrm>
           <a:prstGeom prst="roundRect">
             <a:avLst>
@@ -4867,6 +4987,10 @@
             </a:outerShdw>
           </a:effectLst>
         </p:spPr>
+        <p:txBody>
+          <a:bodyPr/>
+          <a:p/>
+        </p:txBody>
       </p:sp>
       <p:sp>
         <p:nvSpPr>
@@ -4876,8 +5000,8 @@
         </p:nvSpPr>
         <p:spPr>
           <a:xfrm>
-            <a:off x="731520" y="3749040"/>
-            <a:ext cx="10698480" cy="2286000"/>
+            <a:off x="731520" y="3913632"/>
+            <a:ext cx="10698480" cy="2459736"/>
           </a:xfrm>
           <a:prstGeom prst="rect">
             <a:avLst/>
@@ -6104,6 +6228,10 @@
           </a:solidFill>
           <a:ln/>
         </p:spPr>
+        <p:txBody>
+          <a:bodyPr/>
+          <a:p/>
+        </p:txBody>
       </p:sp>
       <p:sp>
         <p:nvSpPr>
@@ -6124,6 +6252,10 @@
           </a:solidFill>
           <a:ln/>
         </p:spPr>
+        <p:txBody>
+          <a:bodyPr/>
+          <a:p/>
+        </p:txBody>
       </p:sp>
       <p:sp>
         <p:nvSpPr>
@@ -6296,6 +6428,10 @@
           </a:solidFill>
           <a:ln/>
         </p:spPr>
+        <p:txBody>
+          <a:bodyPr/>
+          <a:p/>
+        </p:txBody>
       </p:sp>
       <p:sp>
         <p:nvSpPr>
@@ -6316,6 +6452,10 @@
           </a:solidFill>
           <a:ln/>
         </p:spPr>
+        <p:txBody>
+          <a:bodyPr/>
+          <a:p/>
+        </p:txBody>
       </p:sp>
       <p:sp>
         <p:nvSpPr>
@@ -6382,6 +6522,10 @@
             </a:outerShdw>
           </a:effectLst>
         </p:spPr>
+        <p:txBody>
+          <a:bodyPr/>
+          <a:p/>
+        </p:txBody>
       </p:sp>
       <p:sp>
         <p:nvSpPr>
@@ -6402,6 +6546,10 @@
           </a:solidFill>
           <a:ln/>
         </p:spPr>
+        <p:txBody>
+          <a:bodyPr/>
+          <a:p/>
+        </p:txBody>
       </p:sp>
       <p:sp>
         <p:nvSpPr>
@@ -6546,6 +6694,10 @@
             </a:outerShdw>
           </a:effectLst>
         </p:spPr>
+        <p:txBody>
+          <a:bodyPr/>
+          <a:p/>
+        </p:txBody>
       </p:sp>
       <p:sp>
         <p:nvSpPr>
@@ -6566,6 +6718,10 @@
           </a:solidFill>
           <a:ln/>
         </p:spPr>
+        <p:txBody>
+          <a:bodyPr/>
+          <a:p/>
+        </p:txBody>
       </p:sp>
       <p:sp>
         <p:nvSpPr>
@@ -6710,6 +6866,10 @@
             </a:outerShdw>
           </a:effectLst>
         </p:spPr>
+        <p:txBody>
+          <a:bodyPr/>
+          <a:p/>
+        </p:txBody>
       </p:sp>
       <p:sp>
         <p:nvSpPr>
@@ -6730,6 +6890,10 @@
           </a:solidFill>
           <a:ln/>
         </p:spPr>
+        <p:txBody>
+          <a:bodyPr/>
+          <a:p/>
+        </p:txBody>
       </p:sp>
       <p:sp>
         <p:nvSpPr>
@@ -6874,6 +7038,10 @@
             </a:outerShdw>
           </a:effectLst>
         </p:spPr>
+        <p:txBody>
+          <a:bodyPr/>
+          <a:p/>
+        </p:txBody>
       </p:sp>
       <p:sp>
         <p:nvSpPr>
@@ -6894,6 +7062,10 @@
           </a:solidFill>
           <a:ln/>
         </p:spPr>
+        <p:txBody>
+          <a:bodyPr/>
+          <a:p/>
+        </p:txBody>
       </p:sp>
       <p:sp>
         <p:nvSpPr>
@@ -7038,6 +7210,10 @@
             </a:outerShdw>
           </a:effectLst>
         </p:spPr>
+        <p:txBody>
+          <a:bodyPr/>
+          <a:p/>
+        </p:txBody>
       </p:sp>
       <p:sp>
         <p:nvSpPr>
@@ -7058,6 +7234,10 @@
           </a:solidFill>
           <a:ln/>
         </p:spPr>
+        <p:txBody>
+          <a:bodyPr/>
+          <a:p/>
+        </p:txBody>
       </p:sp>
       <p:sp>
         <p:nvSpPr>
@@ -7202,6 +7382,10 @@
             </a:outerShdw>
           </a:effectLst>
         </p:spPr>
+        <p:txBody>
+          <a:bodyPr/>
+          <a:p/>
+        </p:txBody>
       </p:sp>
       <p:sp>
         <p:nvSpPr>
@@ -7222,6 +7406,10 @@
           </a:solidFill>
           <a:ln/>
         </p:spPr>
+        <p:txBody>
+          <a:bodyPr/>
+          <a:p/>
+        </p:txBody>
       </p:sp>
       <p:sp>
         <p:nvSpPr>
@@ -7430,6 +7618,10 @@
           </a:solidFill>
           <a:ln/>
         </p:spPr>
+        <p:txBody>
+          <a:bodyPr/>
+          <a:p/>
+        </p:txBody>
       </p:sp>
       <p:sp>
         <p:nvSpPr>
@@ -7450,6 +7642,10 @@
           </a:solidFill>
           <a:ln/>
         </p:spPr>
+        <p:txBody>
+          <a:bodyPr/>
+          <a:p/>
+        </p:txBody>
       </p:sp>
       <p:sp>
         <p:nvSpPr>
@@ -7518,6 +7714,10 @@
             </a:outerShdw>
           </a:effectLst>
         </p:spPr>
+        <p:txBody>
+          <a:bodyPr/>
+          <a:p/>
+        </p:txBody>
       </p:sp>
       <p:sp>
         <p:nvSpPr>
@@ -7586,6 +7786,10 @@
             </a:outerShdw>
           </a:effectLst>
         </p:spPr>
+        <p:txBody>
+          <a:bodyPr/>
+          <a:p/>
+        </p:txBody>
       </p:sp>
       <p:sp>
         <p:nvSpPr>
@@ -7758,6 +7962,10 @@
           </a:solidFill>
           <a:ln/>
         </p:spPr>
+        <p:txBody>
+          <a:bodyPr/>
+          <a:p/>
+        </p:txBody>
       </p:sp>
       <p:sp>
         <p:nvSpPr>
@@ -7778,6 +7986,10 @@
           </a:solidFill>
           <a:ln/>
         </p:spPr>
+        <p:txBody>
+          <a:bodyPr/>
+          <a:p/>
+        </p:txBody>
       </p:sp>
       <p:sp>
         <p:nvSpPr>
@@ -7846,6 +8058,10 @@
             </a:outerShdw>
           </a:effectLst>
         </p:spPr>
+        <p:txBody>
+          <a:bodyPr/>
+          <a:p/>
+        </p:txBody>
       </p:sp>
       <p:sp>
         <p:nvSpPr>
@@ -7914,6 +8130,10 @@
             </a:outerShdw>
           </a:effectLst>
         </p:spPr>
+        <p:txBody>
+          <a:bodyPr/>
+          <a:p/>
+        </p:txBody>
       </p:sp>
       <p:sp>
         <p:nvSpPr>
@@ -8086,6 +8306,10 @@
           </a:solidFill>
           <a:ln/>
         </p:spPr>
+        <p:txBody>
+          <a:bodyPr/>
+          <a:p/>
+        </p:txBody>
       </p:sp>
       <p:sp>
         <p:nvSpPr>
@@ -8106,6 +8330,10 @@
           </a:solidFill>
           <a:ln/>
         </p:spPr>
+        <p:txBody>
+          <a:bodyPr/>
+          <a:p/>
+        </p:txBody>
       </p:sp>
       <p:sp>
         <p:nvSpPr>
@@ -8174,6 +8402,10 @@
             </a:outerShdw>
           </a:effectLst>
         </p:spPr>
+        <p:txBody>
+          <a:bodyPr/>
+          <a:p/>
+        </p:txBody>
       </p:sp>
       <p:sp>
         <p:nvSpPr>
@@ -8242,6 +8474,10 @@
             </a:outerShdw>
           </a:effectLst>
         </p:spPr>
+        <p:txBody>
+          <a:bodyPr/>
+          <a:p/>
+        </p:txBody>
       </p:sp>
       <p:sp>
         <p:nvSpPr>
@@ -8414,6 +8650,10 @@
           </a:solidFill>
           <a:ln/>
         </p:spPr>
+        <p:txBody>
+          <a:bodyPr/>
+          <a:p/>
+        </p:txBody>
       </p:sp>
       <p:sp>
         <p:nvSpPr>
@@ -8434,6 +8674,10 @@
           </a:solidFill>
           <a:ln/>
         </p:spPr>
+        <p:txBody>
+          <a:bodyPr/>
+          <a:p/>
+        </p:txBody>
       </p:sp>
       <p:sp>
         <p:nvSpPr>
@@ -8502,6 +8746,10 @@
             </a:outerShdw>
           </a:effectLst>
         </p:spPr>
+        <p:txBody>
+          <a:bodyPr/>
+          <a:p/>
+        </p:txBody>
       </p:sp>
       <p:sp>
         <p:nvSpPr>
@@ -8674,6 +8922,10 @@
           </a:solidFill>
           <a:ln/>
         </p:spPr>
+        <p:txBody>
+          <a:bodyPr/>
+          <a:p/>
+        </p:txBody>
       </p:sp>
       <p:sp>
         <p:nvSpPr>
@@ -8694,6 +8946,10 @@
           </a:solidFill>
           <a:ln/>
         </p:spPr>
+        <p:txBody>
+          <a:bodyPr/>
+          <a:p/>
+        </p:txBody>
       </p:sp>
       <p:sp>
         <p:nvSpPr>
@@ -8762,6 +9018,10 @@
             </a:outerShdw>
           </a:effectLst>
         </p:spPr>
+        <p:txBody>
+          <a:bodyPr/>
+          <a:p/>
+        </p:txBody>
       </p:sp>
       <p:sp>
         <p:nvSpPr>
@@ -8830,6 +9090,10 @@
             </a:outerShdw>
           </a:effectLst>
         </p:spPr>
+        <p:txBody>
+          <a:bodyPr/>
+          <a:p/>
+        </p:txBody>
       </p:sp>
       <p:sp>
         <p:nvSpPr>
@@ -9002,6 +9266,10 @@
           </a:solidFill>
           <a:ln/>
         </p:spPr>
+        <p:txBody>
+          <a:bodyPr/>
+          <a:p/>
+        </p:txBody>
       </p:sp>
       <p:sp>
         <p:nvSpPr>
@@ -9022,6 +9290,10 @@
           </a:solidFill>
           <a:ln/>
         </p:spPr>
+        <p:txBody>
+          <a:bodyPr/>
+          <a:p/>
+        </p:txBody>
       </p:sp>
       <p:sp>
         <p:nvSpPr>
@@ -9090,6 +9362,10 @@
             </a:outerShdw>
           </a:effectLst>
         </p:spPr>
+        <p:txBody>
+          <a:bodyPr/>
+          <a:p/>
+        </p:txBody>
       </p:sp>
       <p:sp>
         <p:nvSpPr>
@@ -9158,6 +9434,10 @@
             </a:outerShdw>
           </a:effectLst>
         </p:spPr>
+        <p:txBody>
+          <a:bodyPr/>
+          <a:p/>
+        </p:txBody>
       </p:sp>
       <p:sp>
         <p:nvSpPr>

--- a/backend/templates/pptx/bold_geometric.pptx
+++ b/backend/templates/pptx/bold_geometric.pptx
@@ -2496,10 +2496,6 @@
           </a:solidFill>
           <a:ln/>
         </p:spPr>
-        <p:txBody>
-          <a:bodyPr/>
-          <a:p/>
-        </p:txBody>
       </p:sp>
       <p:sp>
         <p:nvSpPr>
@@ -2559,10 +2555,6 @@
           </a:solidFill>
           <a:ln/>
         </p:spPr>
-        <p:txBody>
-          <a:bodyPr/>
-          <a:p/>
-        </p:txBody>
       </p:sp>
       <p:sp>
         <p:nvSpPr>
@@ -2849,10 +2841,6 @@
           </a:solidFill>
           <a:ln/>
         </p:spPr>
-        <p:txBody>
-          <a:bodyPr/>
-          <a:p/>
-        </p:txBody>
       </p:sp>
       <p:sp>
         <p:nvSpPr>
@@ -2873,10 +2861,6 @@
           </a:solidFill>
           <a:ln/>
         </p:spPr>
-        <p:txBody>
-          <a:bodyPr/>
-          <a:p/>
-        </p:txBody>
       </p:sp>
       <p:sp>
         <p:nvSpPr>
@@ -2945,10 +2929,6 @@
             </a:outerShdw>
           </a:effectLst>
         </p:spPr>
-        <p:txBody>
-          <a:bodyPr/>
-          <a:p/>
-        </p:txBody>
       </p:sp>
       <p:sp>
         <p:nvSpPr>
@@ -3121,10 +3101,6 @@
           </a:solidFill>
           <a:ln/>
         </p:spPr>
-        <p:txBody>
-          <a:bodyPr/>
-          <a:p/>
-        </p:txBody>
       </p:sp>
       <p:sp>
         <p:nvSpPr>
@@ -3145,10 +3121,6 @@
           </a:solidFill>
           <a:ln/>
         </p:spPr>
-        <p:txBody>
-          <a:bodyPr/>
-          <a:p/>
-        </p:txBody>
       </p:sp>
       <p:sp>
         <p:nvSpPr>
@@ -3217,10 +3189,6 @@
             </a:outerShdw>
           </a:effectLst>
         </p:spPr>
-        <p:txBody>
-          <a:bodyPr/>
-          <a:p/>
-        </p:txBody>
       </p:sp>
       <p:sp>
         <p:nvSpPr>
@@ -3289,10 +3257,6 @@
             </a:outerShdw>
           </a:effectLst>
         </p:spPr>
-        <p:txBody>
-          <a:bodyPr/>
-          <a:p/>
-        </p:txBody>
       </p:sp>
       <p:sp>
         <p:nvSpPr>
@@ -3465,10 +3429,6 @@
           </a:solidFill>
           <a:ln/>
         </p:spPr>
-        <p:txBody>
-          <a:bodyPr/>
-          <a:p/>
-        </p:txBody>
       </p:sp>
       <p:sp>
         <p:nvSpPr>
@@ -3489,10 +3449,6 @@
           </a:solidFill>
           <a:ln/>
         </p:spPr>
-        <p:txBody>
-          <a:bodyPr/>
-          <a:p/>
-        </p:txBody>
       </p:sp>
       <p:sp>
         <p:nvSpPr>
@@ -3561,10 +3517,6 @@
             </a:outerShdw>
           </a:effectLst>
         </p:spPr>
-        <p:txBody>
-          <a:bodyPr/>
-          <a:p/>
-        </p:txBody>
       </p:sp>
       <p:sp>
         <p:nvSpPr>
@@ -3737,10 +3689,6 @@
           </a:solidFill>
           <a:ln/>
         </p:spPr>
-        <p:txBody>
-          <a:bodyPr/>
-          <a:p/>
-        </p:txBody>
       </p:sp>
       <p:sp>
         <p:nvSpPr>
@@ -3761,10 +3709,6 @@
           </a:solidFill>
           <a:ln/>
         </p:spPr>
-        <p:txBody>
-          <a:bodyPr/>
-          <a:p/>
-        </p:txBody>
       </p:sp>
       <p:sp>
         <p:nvSpPr>
@@ -3833,10 +3777,6 @@
             </a:outerShdw>
           </a:effectLst>
         </p:spPr>
-        <p:txBody>
-          <a:bodyPr/>
-          <a:p/>
-        </p:txBody>
       </p:sp>
       <p:sp>
         <p:nvSpPr>
@@ -3905,10 +3845,6 @@
             </a:outerShdw>
           </a:effectLst>
         </p:spPr>
-        <p:txBody>
-          <a:bodyPr/>
-          <a:p/>
-        </p:txBody>
       </p:sp>
       <p:sp>
         <p:nvSpPr>
@@ -4081,10 +4017,6 @@
           </a:solidFill>
           <a:ln/>
         </p:spPr>
-        <p:txBody>
-          <a:bodyPr/>
-          <a:p/>
-        </p:txBody>
       </p:sp>
       <p:sp>
         <p:nvSpPr>
@@ -4105,10 +4037,6 @@
           </a:solidFill>
           <a:ln/>
         </p:spPr>
-        <p:txBody>
-          <a:bodyPr/>
-          <a:p/>
-        </p:txBody>
       </p:sp>
       <p:sp>
         <p:nvSpPr>
@@ -4177,10 +4105,6 @@
             </a:outerShdw>
           </a:effectLst>
         </p:spPr>
-        <p:txBody>
-          <a:bodyPr/>
-          <a:p/>
-        </p:txBody>
       </p:sp>
       <p:sp>
         <p:nvSpPr>
@@ -4201,10 +4125,6 @@
           </a:solidFill>
           <a:ln/>
         </p:spPr>
-        <p:txBody>
-          <a:bodyPr/>
-          <a:p/>
-        </p:txBody>
       </p:sp>
       <p:sp>
         <p:nvSpPr>
@@ -4312,10 +4232,6 @@
             </a:outerShdw>
           </a:effectLst>
         </p:spPr>
-        <p:txBody>
-          <a:bodyPr/>
-          <a:p/>
-        </p:txBody>
       </p:sp>
       <p:sp>
         <p:nvSpPr>
@@ -4336,10 +4252,6 @@
           </a:solidFill>
           <a:ln/>
         </p:spPr>
-        <p:txBody>
-          <a:bodyPr/>
-          <a:p/>
-        </p:txBody>
       </p:sp>
       <p:sp>
         <p:nvSpPr>
@@ -4447,10 +4359,6 @@
             </a:outerShdw>
           </a:effectLst>
         </p:spPr>
-        <p:txBody>
-          <a:bodyPr/>
-          <a:p/>
-        </p:txBody>
       </p:sp>
       <p:sp>
         <p:nvSpPr>
@@ -4471,10 +4379,6 @@
           </a:solidFill>
           <a:ln/>
         </p:spPr>
-        <p:txBody>
-          <a:bodyPr/>
-          <a:p/>
-        </p:txBody>
       </p:sp>
       <p:sp>
         <p:nvSpPr>
@@ -4582,10 +4486,6 @@
             </a:outerShdw>
           </a:effectLst>
         </p:spPr>
-        <p:txBody>
-          <a:bodyPr/>
-          <a:p/>
-        </p:txBody>
       </p:sp>
       <p:sp>
         <p:nvSpPr>
@@ -4606,10 +4506,6 @@
           </a:solidFill>
           <a:ln/>
         </p:spPr>
-        <p:txBody>
-          <a:bodyPr/>
-          <a:p/>
-        </p:txBody>
       </p:sp>
       <p:sp>
         <p:nvSpPr>
@@ -4717,10 +4613,6 @@
             </a:outerShdw>
           </a:effectLst>
         </p:spPr>
-        <p:txBody>
-          <a:bodyPr/>
-          <a:p/>
-        </p:txBody>
       </p:sp>
       <p:sp>
         <p:nvSpPr>
@@ -4741,10 +4633,6 @@
           </a:solidFill>
           <a:ln/>
         </p:spPr>
-        <p:txBody>
-          <a:bodyPr/>
-          <a:p/>
-        </p:txBody>
       </p:sp>
       <p:sp>
         <p:nvSpPr>
@@ -4852,10 +4740,6 @@
             </a:outerShdw>
           </a:effectLst>
         </p:spPr>
-        <p:txBody>
-          <a:bodyPr/>
-          <a:p/>
-        </p:txBody>
       </p:sp>
       <p:sp>
         <p:nvSpPr>
@@ -4876,10 +4760,6 @@
           </a:solidFill>
           <a:ln/>
         </p:spPr>
-        <p:txBody>
-          <a:bodyPr/>
-          <a:p/>
-        </p:txBody>
       </p:sp>
       <p:sp>
         <p:nvSpPr>
@@ -4967,8 +4847,8 @@
         </p:nvSpPr>
         <p:spPr>
           <a:xfrm>
-            <a:off x="731520" y="3913632"/>
-            <a:ext cx="10698480" cy="2459736"/>
+            <a:off x="731520" y="3749040"/>
+            <a:ext cx="10698480" cy="2286000"/>
           </a:xfrm>
           <a:prstGeom prst="roundRect">
             <a:avLst>
@@ -4987,10 +4867,6 @@
             </a:outerShdw>
           </a:effectLst>
         </p:spPr>
-        <p:txBody>
-          <a:bodyPr/>
-          <a:p/>
-        </p:txBody>
       </p:sp>
       <p:sp>
         <p:nvSpPr>
@@ -5000,8 +4876,8 @@
         </p:nvSpPr>
         <p:spPr>
           <a:xfrm>
-            <a:off x="731520" y="3913632"/>
-            <a:ext cx="10698480" cy="2459736"/>
+            <a:off x="731520" y="3749040"/>
+            <a:ext cx="10698480" cy="2286000"/>
           </a:xfrm>
           <a:prstGeom prst="rect">
             <a:avLst/>
@@ -6228,10 +6104,6 @@
           </a:solidFill>
           <a:ln/>
         </p:spPr>
-        <p:txBody>
-          <a:bodyPr/>
-          <a:p/>
-        </p:txBody>
       </p:sp>
       <p:sp>
         <p:nvSpPr>
@@ -6252,10 +6124,6 @@
           </a:solidFill>
           <a:ln/>
         </p:spPr>
-        <p:txBody>
-          <a:bodyPr/>
-          <a:p/>
-        </p:txBody>
       </p:sp>
       <p:sp>
         <p:nvSpPr>
@@ -6428,10 +6296,6 @@
           </a:solidFill>
           <a:ln/>
         </p:spPr>
-        <p:txBody>
-          <a:bodyPr/>
-          <a:p/>
-        </p:txBody>
       </p:sp>
       <p:sp>
         <p:nvSpPr>
@@ -6452,10 +6316,6 @@
           </a:solidFill>
           <a:ln/>
         </p:spPr>
-        <p:txBody>
-          <a:bodyPr/>
-          <a:p/>
-        </p:txBody>
       </p:sp>
       <p:sp>
         <p:nvSpPr>
@@ -6522,10 +6382,6 @@
             </a:outerShdw>
           </a:effectLst>
         </p:spPr>
-        <p:txBody>
-          <a:bodyPr/>
-          <a:p/>
-        </p:txBody>
       </p:sp>
       <p:sp>
         <p:nvSpPr>
@@ -6546,10 +6402,6 @@
           </a:solidFill>
           <a:ln/>
         </p:spPr>
-        <p:txBody>
-          <a:bodyPr/>
-          <a:p/>
-        </p:txBody>
       </p:sp>
       <p:sp>
         <p:nvSpPr>
@@ -6694,10 +6546,6 @@
             </a:outerShdw>
           </a:effectLst>
         </p:spPr>
-        <p:txBody>
-          <a:bodyPr/>
-          <a:p/>
-        </p:txBody>
       </p:sp>
       <p:sp>
         <p:nvSpPr>
@@ -6718,10 +6566,6 @@
           </a:solidFill>
           <a:ln/>
         </p:spPr>
-        <p:txBody>
-          <a:bodyPr/>
-          <a:p/>
-        </p:txBody>
       </p:sp>
       <p:sp>
         <p:nvSpPr>
@@ -6866,10 +6710,6 @@
             </a:outerShdw>
           </a:effectLst>
         </p:spPr>
-        <p:txBody>
-          <a:bodyPr/>
-          <a:p/>
-        </p:txBody>
       </p:sp>
       <p:sp>
         <p:nvSpPr>
@@ -6890,10 +6730,6 @@
           </a:solidFill>
           <a:ln/>
         </p:spPr>
-        <p:txBody>
-          <a:bodyPr/>
-          <a:p/>
-        </p:txBody>
       </p:sp>
       <p:sp>
         <p:nvSpPr>
@@ -7038,10 +6874,6 @@
             </a:outerShdw>
           </a:effectLst>
         </p:spPr>
-        <p:txBody>
-          <a:bodyPr/>
-          <a:p/>
-        </p:txBody>
       </p:sp>
       <p:sp>
         <p:nvSpPr>
@@ -7062,10 +6894,6 @@
           </a:solidFill>
           <a:ln/>
         </p:spPr>
-        <p:txBody>
-          <a:bodyPr/>
-          <a:p/>
-        </p:txBody>
       </p:sp>
       <p:sp>
         <p:nvSpPr>
@@ -7210,10 +7038,6 @@
             </a:outerShdw>
           </a:effectLst>
         </p:spPr>
-        <p:txBody>
-          <a:bodyPr/>
-          <a:p/>
-        </p:txBody>
       </p:sp>
       <p:sp>
         <p:nvSpPr>
@@ -7234,10 +7058,6 @@
           </a:solidFill>
           <a:ln/>
         </p:spPr>
-        <p:txBody>
-          <a:bodyPr/>
-          <a:p/>
-        </p:txBody>
       </p:sp>
       <p:sp>
         <p:nvSpPr>
@@ -7382,10 +7202,6 @@
             </a:outerShdw>
           </a:effectLst>
         </p:spPr>
-        <p:txBody>
-          <a:bodyPr/>
-          <a:p/>
-        </p:txBody>
       </p:sp>
       <p:sp>
         <p:nvSpPr>
@@ -7406,10 +7222,6 @@
           </a:solidFill>
           <a:ln/>
         </p:spPr>
-        <p:txBody>
-          <a:bodyPr/>
-          <a:p/>
-        </p:txBody>
       </p:sp>
       <p:sp>
         <p:nvSpPr>
@@ -7618,10 +7430,6 @@
           </a:solidFill>
           <a:ln/>
         </p:spPr>
-        <p:txBody>
-          <a:bodyPr/>
-          <a:p/>
-        </p:txBody>
       </p:sp>
       <p:sp>
         <p:nvSpPr>
@@ -7642,10 +7450,6 @@
           </a:solidFill>
           <a:ln/>
         </p:spPr>
-        <p:txBody>
-          <a:bodyPr/>
-          <a:p/>
-        </p:txBody>
       </p:sp>
       <p:sp>
         <p:nvSpPr>
@@ -7714,10 +7518,6 @@
             </a:outerShdw>
           </a:effectLst>
         </p:spPr>
-        <p:txBody>
-          <a:bodyPr/>
-          <a:p/>
-        </p:txBody>
       </p:sp>
       <p:sp>
         <p:nvSpPr>
@@ -7786,10 +7586,6 @@
             </a:outerShdw>
           </a:effectLst>
         </p:spPr>
-        <p:txBody>
-          <a:bodyPr/>
-          <a:p/>
-        </p:txBody>
       </p:sp>
       <p:sp>
         <p:nvSpPr>
@@ -7962,10 +7758,6 @@
           </a:solidFill>
           <a:ln/>
         </p:spPr>
-        <p:txBody>
-          <a:bodyPr/>
-          <a:p/>
-        </p:txBody>
       </p:sp>
       <p:sp>
         <p:nvSpPr>
@@ -7986,10 +7778,6 @@
           </a:solidFill>
           <a:ln/>
         </p:spPr>
-        <p:txBody>
-          <a:bodyPr/>
-          <a:p/>
-        </p:txBody>
       </p:sp>
       <p:sp>
         <p:nvSpPr>
@@ -8058,10 +7846,6 @@
             </a:outerShdw>
           </a:effectLst>
         </p:spPr>
-        <p:txBody>
-          <a:bodyPr/>
-          <a:p/>
-        </p:txBody>
       </p:sp>
       <p:sp>
         <p:nvSpPr>
@@ -8130,10 +7914,6 @@
             </a:outerShdw>
           </a:effectLst>
         </p:spPr>
-        <p:txBody>
-          <a:bodyPr/>
-          <a:p/>
-        </p:txBody>
       </p:sp>
       <p:sp>
         <p:nvSpPr>
@@ -8210,7 +7990,7 @@
                 <a:ea typeface="Calibri" pitchFamily="34" charset="-122"/>
                 <a:cs typeface="Calibri" pitchFamily="34" charset="-120"/>
               </a:rPr>
-              <a:t>{{website_narrative}}</a:t>
+              <a:t>{{engagement_narrative}}</a:t>
             </a:r>
             <a:endParaRPr lang="en-US" sz="1200" dirty="0"/>
           </a:p>
@@ -8306,10 +8086,6 @@
           </a:solidFill>
           <a:ln/>
         </p:spPr>
-        <p:txBody>
-          <a:bodyPr/>
-          <a:p/>
-        </p:txBody>
       </p:sp>
       <p:sp>
         <p:nvSpPr>
@@ -8330,10 +8106,6 @@
           </a:solidFill>
           <a:ln/>
         </p:spPr>
-        <p:txBody>
-          <a:bodyPr/>
-          <a:p/>
-        </p:txBody>
       </p:sp>
       <p:sp>
         <p:nvSpPr>
@@ -8402,10 +8174,6 @@
             </a:outerShdw>
           </a:effectLst>
         </p:spPr>
-        <p:txBody>
-          <a:bodyPr/>
-          <a:p/>
-        </p:txBody>
       </p:sp>
       <p:sp>
         <p:nvSpPr>
@@ -8474,10 +8242,6 @@
             </a:outerShdw>
           </a:effectLst>
         </p:spPr>
-        <p:txBody>
-          <a:bodyPr/>
-          <a:p/>
-        </p:txBody>
       </p:sp>
       <p:sp>
         <p:nvSpPr>
@@ -8650,10 +8414,6 @@
           </a:solidFill>
           <a:ln/>
         </p:spPr>
-        <p:txBody>
-          <a:bodyPr/>
-          <a:p/>
-        </p:txBody>
       </p:sp>
       <p:sp>
         <p:nvSpPr>
@@ -8674,10 +8434,6 @@
           </a:solidFill>
           <a:ln/>
         </p:spPr>
-        <p:txBody>
-          <a:bodyPr/>
-          <a:p/>
-        </p:txBody>
       </p:sp>
       <p:sp>
         <p:nvSpPr>
@@ -8746,10 +8502,6 @@
             </a:outerShdw>
           </a:effectLst>
         </p:spPr>
-        <p:txBody>
-          <a:bodyPr/>
-          <a:p/>
-        </p:txBody>
       </p:sp>
       <p:sp>
         <p:nvSpPr>
@@ -8922,10 +8674,6 @@
           </a:solidFill>
           <a:ln/>
         </p:spPr>
-        <p:txBody>
-          <a:bodyPr/>
-          <a:p/>
-        </p:txBody>
       </p:sp>
       <p:sp>
         <p:nvSpPr>
@@ -8946,10 +8694,6 @@
           </a:solidFill>
           <a:ln/>
         </p:spPr>
-        <p:txBody>
-          <a:bodyPr/>
-          <a:p/>
-        </p:txBody>
       </p:sp>
       <p:sp>
         <p:nvSpPr>
@@ -9018,10 +8762,6 @@
             </a:outerShdw>
           </a:effectLst>
         </p:spPr>
-        <p:txBody>
-          <a:bodyPr/>
-          <a:p/>
-        </p:txBody>
       </p:sp>
       <p:sp>
         <p:nvSpPr>
@@ -9090,10 +8830,6 @@
             </a:outerShdw>
           </a:effectLst>
         </p:spPr>
-        <p:txBody>
-          <a:bodyPr/>
-          <a:p/>
-        </p:txBody>
       </p:sp>
       <p:sp>
         <p:nvSpPr>
@@ -9266,10 +9002,6 @@
           </a:solidFill>
           <a:ln/>
         </p:spPr>
-        <p:txBody>
-          <a:bodyPr/>
-          <a:p/>
-        </p:txBody>
       </p:sp>
       <p:sp>
         <p:nvSpPr>
@@ -9290,10 +9022,6 @@
           </a:solidFill>
           <a:ln/>
         </p:spPr>
-        <p:txBody>
-          <a:bodyPr/>
-          <a:p/>
-        </p:txBody>
       </p:sp>
       <p:sp>
         <p:nvSpPr>
@@ -9362,10 +9090,6 @@
             </a:outerShdw>
           </a:effectLst>
         </p:spPr>
-        <p:txBody>
-          <a:bodyPr/>
-          <a:p/>
-        </p:txBody>
       </p:sp>
       <p:sp>
         <p:nvSpPr>
@@ -9434,10 +9158,6 @@
             </a:outerShdw>
           </a:effectLst>
         </p:spPr>
-        <p:txBody>
-          <a:bodyPr/>
-          <a:p/>
-        </p:txBody>
       </p:sp>
       <p:sp>
         <p:nvSpPr>

--- a/backend/templates/pptx/bold_geometric.pptx
+++ b/backend/templates/pptx/bold_geometric.pptx
@@ -2496,6 +2496,10 @@
           </a:solidFill>
           <a:ln/>
         </p:spPr>
+        <p:txBody>
+          <a:bodyPr/>
+          <a:p/>
+        </p:txBody>
       </p:sp>
       <p:sp>
         <p:nvSpPr>
@@ -2555,239 +2559,9 @@
           </a:solidFill>
           <a:ln/>
         </p:spPr>
-      </p:sp>
-      <p:sp>
-        <p:nvSpPr>
-          <p:cNvPr id="5" name="Text 3"/>
-          <p:cNvSpPr/>
-          <p:nvPr/>
-        </p:nvSpPr>
-        <p:spPr>
-          <a:xfrm>
-            <a:off x="9418320" y="457200"/>
-            <a:ext cx="2011680" cy="914400"/>
-          </a:xfrm>
-          <a:prstGeom prst="rect">
-            <a:avLst/>
-          </a:prstGeom>
-          <a:noFill/>
-          <a:ln/>
-        </p:spPr>
-        <p:txBody>
-          <a:bodyPr wrap="square" rtlCol="0" anchor="ctr"/>
-          <a:lstStyle/>
-          <a:p>
-            <a:pPr algn="r" indent="0" marL="0">
-              <a:buNone/>
-            </a:pPr>
-            <a:r>
-              <a:rPr lang="en-US" sz="900" dirty="0">
-                <a:solidFill>
-                  <a:srgbClr val="C7D2FE"/>
-                </a:solidFill>
-                <a:latin typeface="Calibri" pitchFamily="34" charset="0"/>
-                <a:ea typeface="Calibri" pitchFamily="34" charset="-122"/>
-                <a:cs typeface="Calibri" pitchFamily="34" charset="-120"/>
-              </a:rPr>
-              <a:t>{{agency_logo}}</a:t>
-            </a:r>
-            <a:endParaRPr lang="en-US" sz="900" dirty="0"/>
-          </a:p>
-        </p:txBody>
-      </p:sp>
-      <p:sp>
-        <p:nvSpPr>
-          <p:cNvPr id="6" name="Text 4"/>
-          <p:cNvSpPr/>
-          <p:nvPr/>
-        </p:nvSpPr>
-        <p:spPr>
-          <a:xfrm>
-            <a:off x="731520" y="1828800"/>
-            <a:ext cx="6400800" cy="1645920"/>
-          </a:xfrm>
-          <a:prstGeom prst="rect">
-            <a:avLst/>
-          </a:prstGeom>
-          <a:noFill/>
-          <a:ln/>
-        </p:spPr>
-        <p:txBody>
-          <a:bodyPr wrap="square" rtlCol="0" anchor="ctr"/>
-          <a:lstStyle/>
-          <a:p>
-            <a:pPr indent="0" marL="0">
-              <a:buNone/>
-            </a:pPr>
-            <a:r>
-              <a:rPr lang="en-US" sz="4400" b="1" dirty="0">
-                <a:solidFill>
-                  <a:srgbClr val="FFFFFF"/>
-                </a:solidFill>
-                <a:latin typeface="Calibri" pitchFamily="34" charset="0"/>
-                <a:ea typeface="Calibri" pitchFamily="34" charset="-122"/>
-                <a:cs typeface="Calibri" pitchFamily="34" charset="-120"/>
-              </a:rPr>
-              <a:t>{{client_name}}</a:t>
-            </a:r>
-            <a:endParaRPr lang="en-US" sz="4400" dirty="0"/>
-          </a:p>
-        </p:txBody>
-      </p:sp>
-      <p:sp>
-        <p:nvSpPr>
-          <p:cNvPr id="7" name="Text 5"/>
-          <p:cNvSpPr/>
-          <p:nvPr/>
-        </p:nvSpPr>
-        <p:spPr>
-          <a:xfrm>
-            <a:off x="731520" y="3566160"/>
-            <a:ext cx="5486400" cy="411480"/>
-          </a:xfrm>
-          <a:prstGeom prst="rect">
-            <a:avLst/>
-          </a:prstGeom>
-          <a:noFill/>
-          <a:ln/>
-        </p:spPr>
-        <p:txBody>
-          <a:bodyPr wrap="square" rtlCol="0" anchor="ctr"/>
-          <a:lstStyle/>
-          <a:p>
-            <a:pPr indent="0" marL="0">
-              <a:buNone/>
-            </a:pPr>
-            <a:r>
-              <a:rPr lang="en-US" sz="1600" dirty="0">
-                <a:solidFill>
-                  <a:srgbClr val="C7D2FE"/>
-                </a:solidFill>
-                <a:latin typeface="Calibri" pitchFamily="34" charset="0"/>
-                <a:ea typeface="Calibri" pitchFamily="34" charset="-122"/>
-                <a:cs typeface="Calibri" pitchFamily="34" charset="-120"/>
-              </a:rPr>
-              <a:t>{{report_period}}</a:t>
-            </a:r>
-            <a:endParaRPr lang="en-US" sz="1600" dirty="0"/>
-          </a:p>
-        </p:txBody>
-      </p:sp>
-      <p:sp>
-        <p:nvSpPr>
-          <p:cNvPr id="8" name="Text 6"/>
-          <p:cNvSpPr/>
-          <p:nvPr/>
-        </p:nvSpPr>
-        <p:spPr>
-          <a:xfrm>
-            <a:off x="731520" y="4069080"/>
-            <a:ext cx="5486400" cy="320040"/>
-          </a:xfrm>
-          <a:prstGeom prst="rect">
-            <a:avLst/>
-          </a:prstGeom>
-          <a:noFill/>
-          <a:ln/>
-        </p:spPr>
-        <p:txBody>
-          <a:bodyPr wrap="square" rtlCol="0" anchor="ctr"/>
-          <a:lstStyle/>
-          <a:p>
-            <a:pPr indent="0" marL="0">
-              <a:buNone/>
-            </a:pPr>
-            <a:r>
-              <a:rPr lang="en-US" sz="1200" dirty="0">
-                <a:solidFill>
-                  <a:srgbClr val="A5B4FC"/>
-                </a:solidFill>
-                <a:latin typeface="Calibri" pitchFamily="34" charset="0"/>
-                <a:ea typeface="Calibri" pitchFamily="34" charset="-122"/>
-                <a:cs typeface="Calibri" pitchFamily="34" charset="-120"/>
-              </a:rPr>
-              <a:t>{{report_type}}</a:t>
-            </a:r>
-            <a:endParaRPr lang="en-US" sz="1200" dirty="0"/>
-          </a:p>
-        </p:txBody>
-      </p:sp>
-      <p:sp>
-        <p:nvSpPr>
-          <p:cNvPr id="9" name="Text 7"/>
-          <p:cNvSpPr/>
-          <p:nvPr/>
-        </p:nvSpPr>
-        <p:spPr>
-          <a:xfrm>
-            <a:off x="8961120" y="3657600"/>
-            <a:ext cx="2286000" cy="1645920"/>
-          </a:xfrm>
-          <a:prstGeom prst="rect">
-            <a:avLst/>
-          </a:prstGeom>
-          <a:noFill/>
-          <a:ln/>
-        </p:spPr>
-        <p:txBody>
-          <a:bodyPr wrap="square" rtlCol="0" anchor="ctr"/>
-          <a:lstStyle/>
-          <a:p>
-            <a:pPr algn="ctr" indent="0" marL="0">
-              <a:buNone/>
-            </a:pPr>
-            <a:r>
-              <a:rPr lang="en-US" sz="900" dirty="0">
-                <a:solidFill>
-                  <a:srgbClr val="C7D2FE"/>
-                </a:solidFill>
-                <a:latin typeface="Calibri" pitchFamily="34" charset="0"/>
-                <a:ea typeface="Calibri" pitchFamily="34" charset="-122"/>
-                <a:cs typeface="Calibri" pitchFamily="34" charset="-120"/>
-              </a:rPr>
-              <a:t>{{client_logo}}</a:t>
-            </a:r>
-            <a:endParaRPr lang="en-US" sz="900" dirty="0"/>
-          </a:p>
-        </p:txBody>
-      </p:sp>
-      <p:sp>
-        <p:nvSpPr>
-          <p:cNvPr id="10" name="Text 8"/>
-          <p:cNvSpPr/>
-          <p:nvPr/>
-        </p:nvSpPr>
-        <p:spPr>
-          <a:xfrm>
-            <a:off x="731520" y="6217920"/>
-            <a:ext cx="7315200" cy="320040"/>
-          </a:xfrm>
-          <a:prstGeom prst="rect">
-            <a:avLst/>
-          </a:prstGeom>
-          <a:noFill/>
-          <a:ln/>
-        </p:spPr>
-        <p:txBody>
-          <a:bodyPr wrap="square" rtlCol="0" anchor="ctr"/>
-          <a:lstStyle/>
-          <a:p>
-            <a:pPr indent="0" marL="0">
-              <a:buNone/>
-            </a:pPr>
-            <a:r>
-              <a:rPr lang="en-US" sz="1100" dirty="0">
-                <a:solidFill>
-                  <a:srgbClr val="A5B4FC"/>
-                </a:solidFill>
-                <a:latin typeface="Calibri" pitchFamily="34" charset="0"/>
-                <a:ea typeface="Calibri" pitchFamily="34" charset="-122"/>
-                <a:cs typeface="Calibri" pitchFamily="34" charset="-120"/>
-              </a:rPr>
-              <a:t>Prepared by {{agency_name}}</a:t>
-            </a:r>
-            <a:endParaRPr lang="en-US" sz="1100" dirty="0"/>
-          </a:p>
+        <p:txBody>
+          <a:bodyPr/>
+          <a:p/>
         </p:txBody>
       </p:sp>
     </p:spTree>
